--- a/ocp/ztp-work-flow.pptx
+++ b/ocp/ztp-work-flow.pptx
@@ -4,10 +4,14 @@
   <p:sldMasterIdLst>
     <p:sldMasterId id="2147483648" r:id="rId1"/>
   </p:sldMasterIdLst>
+  <p:notesMasterIdLst>
+    <p:notesMasterId r:id="rId6"/>
+  </p:notesMasterIdLst>
   <p:sldIdLst>
     <p:sldId id="256" r:id="rId2"/>
-    <p:sldId id="257" r:id="rId3"/>
-    <p:sldId id="258" r:id="rId4"/>
+    <p:sldId id="260" r:id="rId3"/>
+    <p:sldId id="257" r:id="rId4"/>
+    <p:sldId id="258" r:id="rId5"/>
   </p:sldIdLst>
   <p:sldSz cx="12192000" cy="6858000"/>
   <p:notesSz cx="6858000" cy="9144000"/>
@@ -114,6 +118,439 @@
 </p:presentation>
 </file>
 
+<file path=ppt/notesMasters/notesMaster1.xml><?xml version="1.0" encoding="utf-8"?>
+<p:notesMaster xmlns:a="http://schemas.openxmlformats.org/drawingml/2006/main" xmlns:r="http://schemas.openxmlformats.org/officeDocument/2006/relationships" xmlns:p="http://schemas.openxmlformats.org/presentationml/2006/main">
+  <p:cSld>
+    <p:bg>
+      <p:bgRef idx="1001">
+        <a:schemeClr val="bg1"/>
+      </p:bgRef>
+    </p:bg>
+    <p:spTree>
+      <p:nvGrpSpPr>
+        <p:cNvPr id="1" name=""/>
+        <p:cNvGrpSpPr/>
+        <p:nvPr/>
+      </p:nvGrpSpPr>
+      <p:grpSpPr>
+        <a:xfrm>
+          <a:off x="0" y="0"/>
+          <a:ext cx="0" cy="0"/>
+          <a:chOff x="0" y="0"/>
+          <a:chExt cx="0" cy="0"/>
+        </a:xfrm>
+      </p:grpSpPr>
+      <p:sp>
+        <p:nvSpPr>
+          <p:cNvPr id="2" name="Header Placeholder 1"/>
+          <p:cNvSpPr>
+            <a:spLocks noGrp="1"/>
+          </p:cNvSpPr>
+          <p:nvPr>
+            <p:ph type="hdr" sz="quarter"/>
+          </p:nvPr>
+        </p:nvSpPr>
+        <p:spPr>
+          <a:xfrm>
+            <a:off x="0" y="0"/>
+            <a:ext cx="2971800" cy="458788"/>
+          </a:xfrm>
+          <a:prstGeom prst="rect">
+            <a:avLst/>
+          </a:prstGeom>
+        </p:spPr>
+        <p:txBody>
+          <a:bodyPr vert="horz" lIns="91440" tIns="45720" rIns="91440" bIns="45720" rtlCol="0"/>
+          <a:lstStyle>
+            <a:lvl1pPr algn="l">
+              <a:defRPr sz="1200"/>
+            </a:lvl1pPr>
+          </a:lstStyle>
+          <a:p>
+            <a:endParaRPr lang="en-US"/>
+          </a:p>
+        </p:txBody>
+      </p:sp>
+      <p:sp>
+        <p:nvSpPr>
+          <p:cNvPr id="3" name="Date Placeholder 2"/>
+          <p:cNvSpPr>
+            <a:spLocks noGrp="1"/>
+          </p:cNvSpPr>
+          <p:nvPr>
+            <p:ph type="dt" idx="1"/>
+          </p:nvPr>
+        </p:nvSpPr>
+        <p:spPr>
+          <a:xfrm>
+            <a:off x="3884613" y="0"/>
+            <a:ext cx="2971800" cy="458788"/>
+          </a:xfrm>
+          <a:prstGeom prst="rect">
+            <a:avLst/>
+          </a:prstGeom>
+        </p:spPr>
+        <p:txBody>
+          <a:bodyPr vert="horz" lIns="91440" tIns="45720" rIns="91440" bIns="45720" rtlCol="0"/>
+          <a:lstStyle>
+            <a:lvl1pPr algn="r">
+              <a:defRPr sz="1200"/>
+            </a:lvl1pPr>
+          </a:lstStyle>
+          <a:p>
+            <a:fld id="{5DB70C7A-BF7A-4A31-8523-E2CAE6345113}" type="datetimeFigureOut">
+              <a:rPr lang="en-US" smtClean="0"/>
+              <a:t>01-Mar-26</a:t>
+            </a:fld>
+            <a:endParaRPr lang="en-US"/>
+          </a:p>
+        </p:txBody>
+      </p:sp>
+      <p:sp>
+        <p:nvSpPr>
+          <p:cNvPr id="4" name="Slide Image Placeholder 3"/>
+          <p:cNvSpPr>
+            <a:spLocks noGrp="1" noRot="1" noChangeAspect="1"/>
+          </p:cNvSpPr>
+          <p:nvPr>
+            <p:ph type="sldImg" idx="2"/>
+          </p:nvPr>
+        </p:nvSpPr>
+        <p:spPr>
+          <a:xfrm>
+            <a:off x="685800" y="1143000"/>
+            <a:ext cx="5486400" cy="3086100"/>
+          </a:xfrm>
+          <a:prstGeom prst="rect">
+            <a:avLst/>
+          </a:prstGeom>
+          <a:noFill/>
+          <a:ln w="12700">
+            <a:solidFill>
+              <a:prstClr val="black"/>
+            </a:solidFill>
+          </a:ln>
+        </p:spPr>
+        <p:txBody>
+          <a:bodyPr vert="horz" lIns="91440" tIns="45720" rIns="91440" bIns="45720" rtlCol="0" anchor="ctr"/>
+          <a:lstStyle/>
+          <a:p>
+            <a:endParaRPr lang="en-US"/>
+          </a:p>
+        </p:txBody>
+      </p:sp>
+      <p:sp>
+        <p:nvSpPr>
+          <p:cNvPr id="5" name="Notes Placeholder 4"/>
+          <p:cNvSpPr>
+            <a:spLocks noGrp="1"/>
+          </p:cNvSpPr>
+          <p:nvPr>
+            <p:ph type="body" sz="quarter" idx="3"/>
+          </p:nvPr>
+        </p:nvSpPr>
+        <p:spPr>
+          <a:xfrm>
+            <a:off x="685800" y="4400550"/>
+            <a:ext cx="5486400" cy="3600450"/>
+          </a:xfrm>
+          <a:prstGeom prst="rect">
+            <a:avLst/>
+          </a:prstGeom>
+        </p:spPr>
+        <p:txBody>
+          <a:bodyPr vert="horz" lIns="91440" tIns="45720" rIns="91440" bIns="45720" rtlCol="0"/>
+          <a:lstStyle/>
+          <a:p>
+            <a:pPr lvl="0"/>
+            <a:r>
+              <a:rPr lang="en-US"/>
+              <a:t>Click to edit Master text styles</a:t>
+            </a:r>
+          </a:p>
+          <a:p>
+            <a:pPr lvl="1"/>
+            <a:r>
+              <a:rPr lang="en-US"/>
+              <a:t>Second level</a:t>
+            </a:r>
+          </a:p>
+          <a:p>
+            <a:pPr lvl="2"/>
+            <a:r>
+              <a:rPr lang="en-US"/>
+              <a:t>Third level</a:t>
+            </a:r>
+          </a:p>
+          <a:p>
+            <a:pPr lvl="3"/>
+            <a:r>
+              <a:rPr lang="en-US"/>
+              <a:t>Fourth level</a:t>
+            </a:r>
+          </a:p>
+          <a:p>
+            <a:pPr lvl="4"/>
+            <a:r>
+              <a:rPr lang="en-US"/>
+              <a:t>Fifth level</a:t>
+            </a:r>
+          </a:p>
+        </p:txBody>
+      </p:sp>
+      <p:sp>
+        <p:nvSpPr>
+          <p:cNvPr id="6" name="Footer Placeholder 5"/>
+          <p:cNvSpPr>
+            <a:spLocks noGrp="1"/>
+          </p:cNvSpPr>
+          <p:nvPr>
+            <p:ph type="ftr" sz="quarter" idx="4"/>
+          </p:nvPr>
+        </p:nvSpPr>
+        <p:spPr>
+          <a:xfrm>
+            <a:off x="0" y="8685213"/>
+            <a:ext cx="2971800" cy="458787"/>
+          </a:xfrm>
+          <a:prstGeom prst="rect">
+            <a:avLst/>
+          </a:prstGeom>
+        </p:spPr>
+        <p:txBody>
+          <a:bodyPr vert="horz" lIns="91440" tIns="45720" rIns="91440" bIns="45720" rtlCol="0" anchor="b"/>
+          <a:lstStyle>
+            <a:lvl1pPr algn="l">
+              <a:defRPr sz="1200"/>
+            </a:lvl1pPr>
+          </a:lstStyle>
+          <a:p>
+            <a:endParaRPr lang="en-US"/>
+          </a:p>
+        </p:txBody>
+      </p:sp>
+      <p:sp>
+        <p:nvSpPr>
+          <p:cNvPr id="7" name="Slide Number Placeholder 6"/>
+          <p:cNvSpPr>
+            <a:spLocks noGrp="1"/>
+          </p:cNvSpPr>
+          <p:nvPr>
+            <p:ph type="sldNum" sz="quarter" idx="5"/>
+          </p:nvPr>
+        </p:nvSpPr>
+        <p:spPr>
+          <a:xfrm>
+            <a:off x="3884613" y="8685213"/>
+            <a:ext cx="2971800" cy="458787"/>
+          </a:xfrm>
+          <a:prstGeom prst="rect">
+            <a:avLst/>
+          </a:prstGeom>
+        </p:spPr>
+        <p:txBody>
+          <a:bodyPr vert="horz" lIns="91440" tIns="45720" rIns="91440" bIns="45720" rtlCol="0" anchor="b"/>
+          <a:lstStyle>
+            <a:lvl1pPr algn="r">
+              <a:defRPr sz="1200"/>
+            </a:lvl1pPr>
+          </a:lstStyle>
+          <a:p>
+            <a:fld id="{8C85753F-14C9-4166-8F6E-A13BD4FF008C}" type="slidenum">
+              <a:rPr lang="en-US" smtClean="0"/>
+              <a:t>‹#›</a:t>
+            </a:fld>
+            <a:endParaRPr lang="en-US"/>
+          </a:p>
+        </p:txBody>
+      </p:sp>
+    </p:spTree>
+    <p:extLst>
+      <p:ext uri="{BB962C8B-B14F-4D97-AF65-F5344CB8AC3E}">
+        <p14:creationId xmlns:p14="http://schemas.microsoft.com/office/powerpoint/2010/main" val="3896054664"/>
+      </p:ext>
+    </p:extLst>
+  </p:cSld>
+  <p:clrMap bg1="lt1" tx1="dk1" bg2="lt2" tx2="dk2" accent1="accent1" accent2="accent2" accent3="accent3" accent4="accent4" accent5="accent5" accent6="accent6" hlink="hlink" folHlink="folHlink"/>
+  <p:notesStyle>
+    <a:lvl1pPr marL="0" algn="l" defTabSz="914400" rtl="0" eaLnBrk="1" latinLnBrk="0" hangingPunct="1">
+      <a:defRPr sz="1200" kern="1200">
+        <a:solidFill>
+          <a:schemeClr val="tx1"/>
+        </a:solidFill>
+        <a:latin typeface="+mn-lt"/>
+        <a:ea typeface="+mn-ea"/>
+        <a:cs typeface="+mn-cs"/>
+      </a:defRPr>
+    </a:lvl1pPr>
+    <a:lvl2pPr marL="457200" algn="l" defTabSz="914400" rtl="0" eaLnBrk="1" latinLnBrk="0" hangingPunct="1">
+      <a:defRPr sz="1200" kern="1200">
+        <a:solidFill>
+          <a:schemeClr val="tx1"/>
+        </a:solidFill>
+        <a:latin typeface="+mn-lt"/>
+        <a:ea typeface="+mn-ea"/>
+        <a:cs typeface="+mn-cs"/>
+      </a:defRPr>
+    </a:lvl2pPr>
+    <a:lvl3pPr marL="914400" algn="l" defTabSz="914400" rtl="0" eaLnBrk="1" latinLnBrk="0" hangingPunct="1">
+      <a:defRPr sz="1200" kern="1200">
+        <a:solidFill>
+          <a:schemeClr val="tx1"/>
+        </a:solidFill>
+        <a:latin typeface="+mn-lt"/>
+        <a:ea typeface="+mn-ea"/>
+        <a:cs typeface="+mn-cs"/>
+      </a:defRPr>
+    </a:lvl3pPr>
+    <a:lvl4pPr marL="1371600" algn="l" defTabSz="914400" rtl="0" eaLnBrk="1" latinLnBrk="0" hangingPunct="1">
+      <a:defRPr sz="1200" kern="1200">
+        <a:solidFill>
+          <a:schemeClr val="tx1"/>
+        </a:solidFill>
+        <a:latin typeface="+mn-lt"/>
+        <a:ea typeface="+mn-ea"/>
+        <a:cs typeface="+mn-cs"/>
+      </a:defRPr>
+    </a:lvl4pPr>
+    <a:lvl5pPr marL="1828800" algn="l" defTabSz="914400" rtl="0" eaLnBrk="1" latinLnBrk="0" hangingPunct="1">
+      <a:defRPr sz="1200" kern="1200">
+        <a:solidFill>
+          <a:schemeClr val="tx1"/>
+        </a:solidFill>
+        <a:latin typeface="+mn-lt"/>
+        <a:ea typeface="+mn-ea"/>
+        <a:cs typeface="+mn-cs"/>
+      </a:defRPr>
+    </a:lvl5pPr>
+    <a:lvl6pPr marL="2286000" algn="l" defTabSz="914400" rtl="0" eaLnBrk="1" latinLnBrk="0" hangingPunct="1">
+      <a:defRPr sz="1200" kern="1200">
+        <a:solidFill>
+          <a:schemeClr val="tx1"/>
+        </a:solidFill>
+        <a:latin typeface="+mn-lt"/>
+        <a:ea typeface="+mn-ea"/>
+        <a:cs typeface="+mn-cs"/>
+      </a:defRPr>
+    </a:lvl6pPr>
+    <a:lvl7pPr marL="2743200" algn="l" defTabSz="914400" rtl="0" eaLnBrk="1" latinLnBrk="0" hangingPunct="1">
+      <a:defRPr sz="1200" kern="1200">
+        <a:solidFill>
+          <a:schemeClr val="tx1"/>
+        </a:solidFill>
+        <a:latin typeface="+mn-lt"/>
+        <a:ea typeface="+mn-ea"/>
+        <a:cs typeface="+mn-cs"/>
+      </a:defRPr>
+    </a:lvl7pPr>
+    <a:lvl8pPr marL="3200400" algn="l" defTabSz="914400" rtl="0" eaLnBrk="1" latinLnBrk="0" hangingPunct="1">
+      <a:defRPr sz="1200" kern="1200">
+        <a:solidFill>
+          <a:schemeClr val="tx1"/>
+        </a:solidFill>
+        <a:latin typeface="+mn-lt"/>
+        <a:ea typeface="+mn-ea"/>
+        <a:cs typeface="+mn-cs"/>
+      </a:defRPr>
+    </a:lvl8pPr>
+    <a:lvl9pPr marL="3657600" algn="l" defTabSz="914400" rtl="0" eaLnBrk="1" latinLnBrk="0" hangingPunct="1">
+      <a:defRPr sz="1200" kern="1200">
+        <a:solidFill>
+          <a:schemeClr val="tx1"/>
+        </a:solidFill>
+        <a:latin typeface="+mn-lt"/>
+        <a:ea typeface="+mn-ea"/>
+        <a:cs typeface="+mn-cs"/>
+      </a:defRPr>
+    </a:lvl9pPr>
+  </p:notesStyle>
+</p:notesMaster>
+</file>
+
+<file path=ppt/notesSlides/notesSlide1.xml><?xml version="1.0" encoding="utf-8"?>
+<p:notes xmlns:a="http://schemas.openxmlformats.org/drawingml/2006/main" xmlns:r="http://schemas.openxmlformats.org/officeDocument/2006/relationships" xmlns:p="http://schemas.openxmlformats.org/presentationml/2006/main">
+  <p:cSld>
+    <p:spTree>
+      <p:nvGrpSpPr>
+        <p:cNvPr id="1" name=""/>
+        <p:cNvGrpSpPr/>
+        <p:nvPr/>
+      </p:nvGrpSpPr>
+      <p:grpSpPr>
+        <a:xfrm>
+          <a:off x="0" y="0"/>
+          <a:ext cx="0" cy="0"/>
+          <a:chOff x="0" y="0"/>
+          <a:chExt cx="0" cy="0"/>
+        </a:xfrm>
+      </p:grpSpPr>
+      <p:sp>
+        <p:nvSpPr>
+          <p:cNvPr id="2" name="Slide Image Placeholder 1"/>
+          <p:cNvSpPr>
+            <a:spLocks noGrp="1" noRot="1" noChangeAspect="1"/>
+          </p:cNvSpPr>
+          <p:nvPr>
+            <p:ph type="sldImg"/>
+          </p:nvPr>
+        </p:nvSpPr>
+        <p:spPr/>
+      </p:sp>
+      <p:sp>
+        <p:nvSpPr>
+          <p:cNvPr id="3" name="Notes Placeholder 2"/>
+          <p:cNvSpPr>
+            <a:spLocks noGrp="1"/>
+          </p:cNvSpPr>
+          <p:nvPr>
+            <p:ph type="body" idx="1"/>
+          </p:nvPr>
+        </p:nvSpPr>
+        <p:spPr/>
+        <p:txBody>
+          <a:bodyPr/>
+          <a:lstStyle/>
+          <a:p>
+            <a:endParaRPr lang="en-US" dirty="0"/>
+          </a:p>
+        </p:txBody>
+      </p:sp>
+      <p:sp>
+        <p:nvSpPr>
+          <p:cNvPr id="4" name="Slide Number Placeholder 3"/>
+          <p:cNvSpPr>
+            <a:spLocks noGrp="1"/>
+          </p:cNvSpPr>
+          <p:nvPr>
+            <p:ph type="sldNum" sz="quarter" idx="5"/>
+          </p:nvPr>
+        </p:nvSpPr>
+        <p:spPr/>
+        <p:txBody>
+          <a:bodyPr/>
+          <a:lstStyle/>
+          <a:p>
+            <a:fld id="{8C85753F-14C9-4166-8F6E-A13BD4FF008C}" type="slidenum">
+              <a:rPr lang="en-US" smtClean="0"/>
+              <a:t>2</a:t>
+            </a:fld>
+            <a:endParaRPr lang="en-US"/>
+          </a:p>
+        </p:txBody>
+      </p:sp>
+    </p:spTree>
+    <p:extLst>
+      <p:ext uri="{BB962C8B-B14F-4D97-AF65-F5344CB8AC3E}">
+        <p14:creationId xmlns:p14="http://schemas.microsoft.com/office/powerpoint/2010/main" val="522985297"/>
+      </p:ext>
+    </p:extLst>
+  </p:cSld>
+  <p:clrMapOvr>
+    <a:masterClrMapping/>
+  </p:clrMapOvr>
+</p:notes>
+</file>
+
 <file path=ppt/slideLayouts/slideLayout1.xml><?xml version="1.0" encoding="utf-8"?>
 <p:sldLayout xmlns:a="http://schemas.openxmlformats.org/drawingml/2006/main" xmlns:r="http://schemas.openxmlformats.org/officeDocument/2006/relationships" xmlns:p="http://schemas.openxmlformats.org/presentationml/2006/main" type="title" preserve="1">
   <p:cSld name="Title Slide">
@@ -261,7 +698,7 @@
           <a:p>
             <a:fld id="{EB3DC7E2-BD84-4B87-A2A2-E22DB4B76BFE}" type="datetimeFigureOut">
               <a:rPr lang="en-US" smtClean="0"/>
-              <a:t>28-Feb-26</a:t>
+              <a:t>01-Mar-26</a:t>
             </a:fld>
             <a:endParaRPr lang="en-US"/>
           </a:p>
@@ -459,7 +896,7 @@
           <a:p>
             <a:fld id="{EB3DC7E2-BD84-4B87-A2A2-E22DB4B76BFE}" type="datetimeFigureOut">
               <a:rPr lang="en-US" smtClean="0"/>
-              <a:t>28-Feb-26</a:t>
+              <a:t>01-Mar-26</a:t>
             </a:fld>
             <a:endParaRPr lang="en-US"/>
           </a:p>
@@ -667,7 +1104,7 @@
           <a:p>
             <a:fld id="{EB3DC7E2-BD84-4B87-A2A2-E22DB4B76BFE}" type="datetimeFigureOut">
               <a:rPr lang="en-US" smtClean="0"/>
-              <a:t>28-Feb-26</a:t>
+              <a:t>01-Mar-26</a:t>
             </a:fld>
             <a:endParaRPr lang="en-US"/>
           </a:p>
@@ -865,7 +1302,7 @@
           <a:p>
             <a:fld id="{EB3DC7E2-BD84-4B87-A2A2-E22DB4B76BFE}" type="datetimeFigureOut">
               <a:rPr lang="en-US" smtClean="0"/>
-              <a:t>28-Feb-26</a:t>
+              <a:t>01-Mar-26</a:t>
             </a:fld>
             <a:endParaRPr lang="en-US"/>
           </a:p>
@@ -1140,7 +1577,7 @@
           <a:p>
             <a:fld id="{EB3DC7E2-BD84-4B87-A2A2-E22DB4B76BFE}" type="datetimeFigureOut">
               <a:rPr lang="en-US" smtClean="0"/>
-              <a:t>28-Feb-26</a:t>
+              <a:t>01-Mar-26</a:t>
             </a:fld>
             <a:endParaRPr lang="en-US"/>
           </a:p>
@@ -1405,7 +1842,7 @@
           <a:p>
             <a:fld id="{EB3DC7E2-BD84-4B87-A2A2-E22DB4B76BFE}" type="datetimeFigureOut">
               <a:rPr lang="en-US" smtClean="0"/>
-              <a:t>28-Feb-26</a:t>
+              <a:t>01-Mar-26</a:t>
             </a:fld>
             <a:endParaRPr lang="en-US"/>
           </a:p>
@@ -1817,7 +2254,7 @@
           <a:p>
             <a:fld id="{EB3DC7E2-BD84-4B87-A2A2-E22DB4B76BFE}" type="datetimeFigureOut">
               <a:rPr lang="en-US" smtClean="0"/>
-              <a:t>28-Feb-26</a:t>
+              <a:t>01-Mar-26</a:t>
             </a:fld>
             <a:endParaRPr lang="en-US"/>
           </a:p>
@@ -1958,7 +2395,7 @@
           <a:p>
             <a:fld id="{EB3DC7E2-BD84-4B87-A2A2-E22DB4B76BFE}" type="datetimeFigureOut">
               <a:rPr lang="en-US" smtClean="0"/>
-              <a:t>28-Feb-26</a:t>
+              <a:t>01-Mar-26</a:t>
             </a:fld>
             <a:endParaRPr lang="en-US"/>
           </a:p>
@@ -2071,7 +2508,7 @@
           <a:p>
             <a:fld id="{EB3DC7E2-BD84-4B87-A2A2-E22DB4B76BFE}" type="datetimeFigureOut">
               <a:rPr lang="en-US" smtClean="0"/>
-              <a:t>28-Feb-26</a:t>
+              <a:t>01-Mar-26</a:t>
             </a:fld>
             <a:endParaRPr lang="en-US"/>
           </a:p>
@@ -2382,7 +2819,7 @@
           <a:p>
             <a:fld id="{EB3DC7E2-BD84-4B87-A2A2-E22DB4B76BFE}" type="datetimeFigureOut">
               <a:rPr lang="en-US" smtClean="0"/>
-              <a:t>28-Feb-26</a:t>
+              <a:t>01-Mar-26</a:t>
             </a:fld>
             <a:endParaRPr lang="en-US"/>
           </a:p>
@@ -2670,7 +3107,7 @@
           <a:p>
             <a:fld id="{EB3DC7E2-BD84-4B87-A2A2-E22DB4B76BFE}" type="datetimeFigureOut">
               <a:rPr lang="en-US" smtClean="0"/>
-              <a:t>28-Feb-26</a:t>
+              <a:t>01-Mar-26</a:t>
             </a:fld>
             <a:endParaRPr lang="en-US"/>
           </a:p>
@@ -2911,7 +3348,7 @@
           <a:p>
             <a:fld id="{EB3DC7E2-BD84-4B87-A2A2-E22DB4B76BFE}" type="datetimeFigureOut">
               <a:rPr lang="en-US" smtClean="0"/>
-              <a:t>28-Feb-26</a:t>
+              <a:t>01-Mar-26</a:t>
             </a:fld>
             <a:endParaRPr lang="en-US"/>
           </a:p>
@@ -4631,162 +5068,6 @@
           </a:p>
         </p:txBody>
       </p:sp>
-      <p:grpSp>
-        <p:nvGrpSpPr>
-          <p:cNvPr id="1114" name="Group 1113">
-            <a:extLst>
-              <a:ext uri="{FF2B5EF4-FFF2-40B4-BE49-F238E27FC236}">
-                <a16:creationId xmlns:a16="http://schemas.microsoft.com/office/drawing/2014/main" id="{F72AD2A7-4527-76AB-65B0-22DEB9C74406}"/>
-              </a:ext>
-            </a:extLst>
-          </p:cNvPr>
-          <p:cNvGrpSpPr/>
-          <p:nvPr/>
-        </p:nvGrpSpPr>
-        <p:grpSpPr>
-          <a:xfrm>
-            <a:off x="5551584" y="5083984"/>
-            <a:ext cx="1142208" cy="1505898"/>
-            <a:chOff x="5551584" y="5083984"/>
-            <a:chExt cx="1142208" cy="1505898"/>
-          </a:xfrm>
-        </p:grpSpPr>
-        <p:sp>
-          <p:nvSpPr>
-            <p:cNvPr id="19" name="TextBox 18">
-              <a:extLst>
-                <a:ext uri="{FF2B5EF4-FFF2-40B4-BE49-F238E27FC236}">
-                  <a16:creationId xmlns:a16="http://schemas.microsoft.com/office/drawing/2014/main" id="{8A0E0DF1-1FEE-0216-2597-65D76538A894}"/>
-                </a:ext>
-              </a:extLst>
-            </p:cNvPr>
-            <p:cNvSpPr txBox="1"/>
-            <p:nvPr/>
-          </p:nvSpPr>
-          <p:spPr>
-            <a:xfrm>
-              <a:off x="5774728" y="6282105"/>
-              <a:ext cx="766672" cy="307777"/>
-            </a:xfrm>
-            <a:prstGeom prst="rect">
-              <a:avLst/>
-            </a:prstGeom>
-            <a:noFill/>
-          </p:spPr>
-          <p:txBody>
-            <a:bodyPr wrap="square" rtlCol="0">
-              <a:spAutoFit/>
-            </a:bodyPr>
-            <a:lstStyle/>
-            <a:p>
-              <a:r>
-                <a:rPr lang="en-US" sz="1400" b="1" dirty="0"/>
-                <a:t>RHACM</a:t>
-              </a:r>
-            </a:p>
-          </p:txBody>
-        </p:sp>
-        <p:pic>
-          <p:nvPicPr>
-            <p:cNvPr id="18" name="Picture 17">
-              <a:extLst>
-                <a:ext uri="{FF2B5EF4-FFF2-40B4-BE49-F238E27FC236}">
-                  <a16:creationId xmlns:a16="http://schemas.microsoft.com/office/drawing/2014/main" id="{1994EBA3-FAA7-9160-CA2D-A284DC11C782}"/>
-                </a:ext>
-              </a:extLst>
-            </p:cNvPr>
-            <p:cNvPicPr>
-              <a:picLocks noChangeAspect="1"/>
-            </p:cNvPicPr>
-            <p:nvPr/>
-          </p:nvPicPr>
-          <p:blipFill>
-            <a:blip r:embed="rId9"/>
-            <a:stretch>
-              <a:fillRect/>
-            </a:stretch>
-          </p:blipFill>
-          <p:spPr>
-            <a:xfrm>
-              <a:off x="5577325" y="5083984"/>
-              <a:ext cx="1116467" cy="1348187"/>
-            </a:xfrm>
-            <a:prstGeom prst="rect">
-              <a:avLst/>
-            </a:prstGeom>
-          </p:spPr>
-        </p:pic>
-        <p:sp>
-          <p:nvSpPr>
-            <p:cNvPr id="1070" name="TextBox 1069">
-              <a:extLst>
-                <a:ext uri="{FF2B5EF4-FFF2-40B4-BE49-F238E27FC236}">
-                  <a16:creationId xmlns:a16="http://schemas.microsoft.com/office/drawing/2014/main" id="{B31B4411-2764-059D-0892-05FD5A0F9E23}"/>
-                </a:ext>
-              </a:extLst>
-            </p:cNvPr>
-            <p:cNvSpPr txBox="1"/>
-            <p:nvPr/>
-          </p:nvSpPr>
-          <p:spPr>
-            <a:xfrm rot="5400000">
-              <a:off x="5067801" y="5812214"/>
-              <a:ext cx="1244565" cy="276999"/>
-            </a:xfrm>
-            <a:prstGeom prst="rect">
-              <a:avLst/>
-            </a:prstGeom>
-            <a:noFill/>
-          </p:spPr>
-          <p:txBody>
-            <a:bodyPr wrap="square" rtlCol="0">
-              <a:spAutoFit/>
-            </a:bodyPr>
-            <a:lstStyle/>
-            <a:p>
-              <a:r>
-                <a:rPr lang="en-US" sz="1200" b="1" dirty="0"/>
-                <a:t>192.168.0.135</a:t>
-              </a:r>
-            </a:p>
-          </p:txBody>
-        </p:sp>
-        <p:sp>
-          <p:nvSpPr>
-            <p:cNvPr id="1072" name="TextBox 1071">
-              <a:extLst>
-                <a:ext uri="{FF2B5EF4-FFF2-40B4-BE49-F238E27FC236}">
-                  <a16:creationId xmlns:a16="http://schemas.microsoft.com/office/drawing/2014/main" id="{3E0F963E-B56F-F8E4-4104-EAB275CDE178}"/>
-                </a:ext>
-              </a:extLst>
-            </p:cNvPr>
-            <p:cNvSpPr txBox="1"/>
-            <p:nvPr/>
-          </p:nvSpPr>
-          <p:spPr>
-            <a:xfrm rot="5400000">
-              <a:off x="6181625" y="6025930"/>
-              <a:ext cx="766537" cy="230832"/>
-            </a:xfrm>
-            <a:prstGeom prst="rect">
-              <a:avLst/>
-            </a:prstGeom>
-            <a:noFill/>
-          </p:spPr>
-          <p:txBody>
-            <a:bodyPr wrap="square" rtlCol="0">
-              <a:spAutoFit/>
-            </a:bodyPr>
-            <a:lstStyle/>
-            <a:p>
-              <a:r>
-                <a:rPr lang="en-US" sz="900" b="1" dirty="0"/>
-                <a:t>SNO-ACM</a:t>
-              </a:r>
-            </a:p>
-          </p:txBody>
-        </p:sp>
-      </p:grpSp>
       <p:pic>
         <p:nvPicPr>
           <p:cNvPr id="1074" name="Picture 8" descr="Internet - Free signs icons">
@@ -5400,7 +5681,7 @@
         </p:blipFill>
         <p:spPr bwMode="auto">
           <a:xfrm>
-            <a:off x="5954764" y="4316772"/>
+            <a:off x="5954764" y="4338544"/>
             <a:ext cx="269762" cy="269762"/>
           </a:xfrm>
           <a:prstGeom prst="rect">
@@ -5483,7 +5764,7 @@
         <p:spPr>
           <a:xfrm>
             <a:off x="6089645" y="4074469"/>
-            <a:ext cx="35761" cy="1206271"/>
+            <a:ext cx="15608" cy="1174254"/>
           </a:xfrm>
           <a:prstGeom prst="straightConnector1">
             <a:avLst/>
@@ -5953,7 +6234,7 @@
         </p:nvSpPr>
         <p:spPr>
           <a:xfrm>
-            <a:off x="7629356" y="5617557"/>
+            <a:off x="7836186" y="5617557"/>
             <a:ext cx="4297971" cy="1107996"/>
           </a:xfrm>
           <a:prstGeom prst="rect">
@@ -6182,8 +6463,8 @@
         </p:nvSpPr>
         <p:spPr>
           <a:xfrm>
-            <a:off x="7511143" y="5870815"/>
-            <a:ext cx="118213" cy="766537"/>
+            <a:off x="7511143" y="5865307"/>
+            <a:ext cx="325043" cy="772046"/>
           </a:xfrm>
           <a:prstGeom prst="leftBrace">
             <a:avLst/>
@@ -6474,36 +6755,6 @@
       </p:sp>
       <p:pic>
         <p:nvPicPr>
-          <p:cNvPr id="1168" name="Picture 1167">
-            <a:extLst>
-              <a:ext uri="{FF2B5EF4-FFF2-40B4-BE49-F238E27FC236}">
-                <a16:creationId xmlns:a16="http://schemas.microsoft.com/office/drawing/2014/main" id="{B3292B54-6A2C-E0DC-ABD3-3F8582F5C6AA}"/>
-              </a:ext>
-            </a:extLst>
-          </p:cNvPr>
-          <p:cNvPicPr>
-            <a:picLocks noChangeAspect="1"/>
-          </p:cNvPicPr>
-          <p:nvPr/>
-        </p:nvPicPr>
-        <p:blipFill>
-          <a:blip r:embed="rId25"/>
-          <a:stretch>
-            <a:fillRect/>
-          </a:stretch>
-        </p:blipFill>
-        <p:spPr>
-          <a:xfrm>
-            <a:off x="5814751" y="6002334"/>
-            <a:ext cx="243040" cy="341664"/>
-          </a:xfrm>
-          <a:prstGeom prst="rect">
-            <a:avLst/>
-          </a:prstGeom>
-        </p:spPr>
-      </p:pic>
-      <p:pic>
-        <p:nvPicPr>
           <p:cNvPr id="1169" name="Picture 1168">
             <a:extLst>
               <a:ext uri="{FF2B5EF4-FFF2-40B4-BE49-F238E27FC236}">
@@ -6622,6 +6873,863 @@
           </a:prstGeom>
         </p:spPr>
       </p:pic>
+      <p:grpSp>
+        <p:nvGrpSpPr>
+          <p:cNvPr id="50" name="Group 49">
+            <a:extLst>
+              <a:ext uri="{FF2B5EF4-FFF2-40B4-BE49-F238E27FC236}">
+                <a16:creationId xmlns:a16="http://schemas.microsoft.com/office/drawing/2014/main" id="{E883E804-FB04-97DC-3905-1F93A70DC2B3}"/>
+              </a:ext>
+            </a:extLst>
+          </p:cNvPr>
+          <p:cNvGrpSpPr/>
+          <p:nvPr/>
+        </p:nvGrpSpPr>
+        <p:grpSpPr>
+          <a:xfrm>
+            <a:off x="5562877" y="5164185"/>
+            <a:ext cx="1162962" cy="1572988"/>
+            <a:chOff x="8275533" y="1105491"/>
+            <a:chExt cx="1162962" cy="1572988"/>
+          </a:xfrm>
+        </p:grpSpPr>
+        <p:pic>
+          <p:nvPicPr>
+            <p:cNvPr id="45" name="Picture 18" descr="Virtual Server Icon Design for Modern ...">
+              <a:extLst>
+                <a:ext uri="{FF2B5EF4-FFF2-40B4-BE49-F238E27FC236}">
+                  <a16:creationId xmlns:a16="http://schemas.microsoft.com/office/drawing/2014/main" id="{0B5D12C7-844B-6D4C-0446-1D36E804F809}"/>
+                </a:ext>
+              </a:extLst>
+            </p:cNvPr>
+            <p:cNvPicPr>
+              <a:picLocks noChangeAspect="1" noChangeArrowheads="1"/>
+            </p:cNvPicPr>
+            <p:nvPr/>
+          </p:nvPicPr>
+          <p:blipFill>
+            <a:blip r:embed="rId26">
+              <a:extLst>
+                <a:ext uri="{28A0092B-C50C-407E-A947-70E740481C1C}">
+                  <a14:useLocalDpi xmlns:a14="http://schemas.microsoft.com/office/drawing/2010/main" val="0"/>
+                </a:ext>
+              </a:extLst>
+            </a:blip>
+            <a:srcRect/>
+            <a:stretch>
+              <a:fillRect/>
+            </a:stretch>
+          </p:blipFill>
+          <p:spPr bwMode="auto">
+            <a:xfrm>
+              <a:off x="8286144" y="1360393"/>
+              <a:ext cx="1152351" cy="1152351"/>
+            </a:xfrm>
+            <a:prstGeom prst="rect">
+              <a:avLst/>
+            </a:prstGeom>
+            <a:noFill/>
+            <a:extLst>
+              <a:ext uri="{909E8E84-426E-40DD-AFC4-6F175D3DCCD1}">
+                <a14:hiddenFill xmlns:a14="http://schemas.microsoft.com/office/drawing/2010/main">
+                  <a:solidFill>
+                    <a:srgbClr val="FFFFFF"/>
+                  </a:solidFill>
+                </a14:hiddenFill>
+              </a:ext>
+            </a:extLst>
+          </p:spPr>
+        </p:pic>
+        <p:sp>
+          <p:nvSpPr>
+            <p:cNvPr id="19" name="TextBox 18">
+              <a:extLst>
+                <a:ext uri="{FF2B5EF4-FFF2-40B4-BE49-F238E27FC236}">
+                  <a16:creationId xmlns:a16="http://schemas.microsoft.com/office/drawing/2014/main" id="{8A0E0DF1-1FEE-0216-2597-65D76538A894}"/>
+                </a:ext>
+              </a:extLst>
+            </p:cNvPr>
+            <p:cNvSpPr txBox="1"/>
+            <p:nvPr/>
+          </p:nvSpPr>
+          <p:spPr>
+            <a:xfrm>
+              <a:off x="8481128" y="2354497"/>
+              <a:ext cx="766672" cy="307777"/>
+            </a:xfrm>
+            <a:prstGeom prst="rect">
+              <a:avLst/>
+            </a:prstGeom>
+            <a:noFill/>
+          </p:spPr>
+          <p:txBody>
+            <a:bodyPr wrap="square" rtlCol="0">
+              <a:spAutoFit/>
+            </a:bodyPr>
+            <a:lstStyle/>
+            <a:p>
+              <a:r>
+                <a:rPr lang="en-US" sz="1400" b="1" dirty="0"/>
+                <a:t>RHACM</a:t>
+              </a:r>
+            </a:p>
+          </p:txBody>
+        </p:sp>
+        <p:sp>
+          <p:nvSpPr>
+            <p:cNvPr id="1070" name="TextBox 1069">
+              <a:extLst>
+                <a:ext uri="{FF2B5EF4-FFF2-40B4-BE49-F238E27FC236}">
+                  <a16:creationId xmlns:a16="http://schemas.microsoft.com/office/drawing/2014/main" id="{B31B4411-2764-059D-0892-05FD5A0F9E23}"/>
+                </a:ext>
+              </a:extLst>
+            </p:cNvPr>
+            <p:cNvSpPr txBox="1"/>
+            <p:nvPr/>
+          </p:nvSpPr>
+          <p:spPr>
+            <a:xfrm rot="5400000">
+              <a:off x="7791750" y="1917697"/>
+              <a:ext cx="1244565" cy="276999"/>
+            </a:xfrm>
+            <a:prstGeom prst="rect">
+              <a:avLst/>
+            </a:prstGeom>
+            <a:noFill/>
+          </p:spPr>
+          <p:txBody>
+            <a:bodyPr wrap="square" rtlCol="0">
+              <a:spAutoFit/>
+            </a:bodyPr>
+            <a:lstStyle/>
+            <a:p>
+              <a:r>
+                <a:rPr lang="en-US" sz="1200" b="1" dirty="0"/>
+                <a:t>192.168.0.135</a:t>
+              </a:r>
+            </a:p>
+          </p:txBody>
+        </p:sp>
+        <p:sp>
+          <p:nvSpPr>
+            <p:cNvPr id="1072" name="TextBox 1071">
+              <a:extLst>
+                <a:ext uri="{FF2B5EF4-FFF2-40B4-BE49-F238E27FC236}">
+                  <a16:creationId xmlns:a16="http://schemas.microsoft.com/office/drawing/2014/main" id="{3E0F963E-B56F-F8E4-4104-EAB275CDE178}"/>
+                </a:ext>
+              </a:extLst>
+            </p:cNvPr>
+            <p:cNvSpPr txBox="1"/>
+            <p:nvPr/>
+          </p:nvSpPr>
+          <p:spPr>
+            <a:xfrm rot="5400000">
+              <a:off x="8887155" y="1900337"/>
+              <a:ext cx="766537" cy="230832"/>
+            </a:xfrm>
+            <a:prstGeom prst="rect">
+              <a:avLst/>
+            </a:prstGeom>
+            <a:noFill/>
+          </p:spPr>
+          <p:txBody>
+            <a:bodyPr wrap="square" rtlCol="0">
+              <a:spAutoFit/>
+            </a:bodyPr>
+            <a:lstStyle/>
+            <a:p>
+              <a:r>
+                <a:rPr lang="en-US" sz="900" b="1" dirty="0"/>
+                <a:t>SNO-ACM</a:t>
+              </a:r>
+            </a:p>
+          </p:txBody>
+        </p:sp>
+        <p:pic>
+          <p:nvPicPr>
+            <p:cNvPr id="46" name="Picture 20" descr="Openshift icon - Free Download PNG ...">
+              <a:extLst>
+                <a:ext uri="{FF2B5EF4-FFF2-40B4-BE49-F238E27FC236}">
+                  <a16:creationId xmlns:a16="http://schemas.microsoft.com/office/drawing/2014/main" id="{E1BE8310-DC8C-9505-9893-1BB95EC264EB}"/>
+                </a:ext>
+              </a:extLst>
+            </p:cNvPr>
+            <p:cNvPicPr>
+              <a:picLocks noChangeAspect="1" noChangeArrowheads="1"/>
+            </p:cNvPicPr>
+            <p:nvPr/>
+          </p:nvPicPr>
+          <p:blipFill>
+            <a:blip r:embed="rId27">
+              <a:extLst>
+                <a:ext uri="{28A0092B-C50C-407E-A947-70E740481C1C}">
+                  <a14:useLocalDpi xmlns:a14="http://schemas.microsoft.com/office/drawing/2010/main" val="0"/>
+                </a:ext>
+              </a:extLst>
+            </a:blip>
+            <a:srcRect/>
+            <a:stretch>
+              <a:fillRect/>
+            </a:stretch>
+          </p:blipFill>
+          <p:spPr bwMode="auto">
+            <a:xfrm>
+              <a:off x="8665531" y="1105491"/>
+              <a:ext cx="341450" cy="341450"/>
+            </a:xfrm>
+            <a:prstGeom prst="rect">
+              <a:avLst/>
+            </a:prstGeom>
+            <a:noFill/>
+            <a:extLst>
+              <a:ext uri="{909E8E84-426E-40DD-AFC4-6F175D3DCCD1}">
+                <a14:hiddenFill xmlns:a14="http://schemas.microsoft.com/office/drawing/2010/main">
+                  <a:solidFill>
+                    <a:srgbClr val="FFFFFF"/>
+                  </a:solidFill>
+                </a14:hiddenFill>
+              </a:ext>
+            </a:extLst>
+          </p:spPr>
+        </p:pic>
+        <p:pic>
+          <p:nvPicPr>
+            <p:cNvPr id="47" name="Picture 46">
+              <a:extLst>
+                <a:ext uri="{FF2B5EF4-FFF2-40B4-BE49-F238E27FC236}">
+                  <a16:creationId xmlns:a16="http://schemas.microsoft.com/office/drawing/2014/main" id="{EB9C14D9-B6CF-8184-4508-A94AA1CE2B7A}"/>
+                </a:ext>
+              </a:extLst>
+            </p:cNvPr>
+            <p:cNvPicPr>
+              <a:picLocks noChangeAspect="1"/>
+            </p:cNvPicPr>
+            <p:nvPr/>
+          </p:nvPicPr>
+          <p:blipFill>
+            <a:blip r:embed="rId25"/>
+            <a:stretch>
+              <a:fillRect/>
+            </a:stretch>
+          </p:blipFill>
+          <p:spPr>
+            <a:xfrm>
+              <a:off x="8740799" y="2062668"/>
+              <a:ext cx="243040" cy="341664"/>
+            </a:xfrm>
+            <a:prstGeom prst="rect">
+              <a:avLst/>
+            </a:prstGeom>
+          </p:spPr>
+        </p:pic>
+      </p:grpSp>
+      <p:cxnSp>
+        <p:nvCxnSpPr>
+          <p:cNvPr id="44" name="Straight Arrow Connector 43">
+            <a:extLst>
+              <a:ext uri="{FF2B5EF4-FFF2-40B4-BE49-F238E27FC236}">
+                <a16:creationId xmlns:a16="http://schemas.microsoft.com/office/drawing/2014/main" id="{0C6DC352-DE1F-8330-2ED9-1F6BFBF0BC74}"/>
+              </a:ext>
+            </a:extLst>
+          </p:cNvPr>
+          <p:cNvCxnSpPr>
+            <a:cxnSpLocks/>
+            <a:endCxn id="1070" idx="1"/>
+          </p:cNvCxnSpPr>
+          <p:nvPr/>
+        </p:nvCxnSpPr>
+        <p:spPr>
+          <a:xfrm>
+            <a:off x="2817424" y="5103604"/>
+            <a:ext cx="2883952" cy="389004"/>
+          </a:xfrm>
+          <a:prstGeom prst="straightConnector1">
+            <a:avLst/>
+          </a:prstGeom>
+          <a:ln>
+            <a:solidFill>
+              <a:schemeClr val="accent2">
+                <a:lumMod val="75000"/>
+              </a:schemeClr>
+            </a:solidFill>
+            <a:prstDash val="lgDash"/>
+            <a:headEnd type="triangle"/>
+            <a:tailEnd type="triangle"/>
+          </a:ln>
+        </p:spPr>
+        <p:style>
+          <a:lnRef idx="1">
+            <a:schemeClr val="accent1"/>
+          </a:lnRef>
+          <a:fillRef idx="0">
+            <a:schemeClr val="accent1"/>
+          </a:fillRef>
+          <a:effectRef idx="0">
+            <a:schemeClr val="accent1"/>
+          </a:effectRef>
+          <a:fontRef idx="minor">
+            <a:schemeClr val="tx1"/>
+          </a:fontRef>
+        </p:style>
+      </p:cxnSp>
+      <p:grpSp>
+        <p:nvGrpSpPr>
+          <p:cNvPr id="2" name="Group 1">
+            <a:extLst>
+              <a:ext uri="{FF2B5EF4-FFF2-40B4-BE49-F238E27FC236}">
+                <a16:creationId xmlns:a16="http://schemas.microsoft.com/office/drawing/2014/main" id="{13886825-93A3-A436-A5DA-F3F1D97A73EC}"/>
+              </a:ext>
+            </a:extLst>
+          </p:cNvPr>
+          <p:cNvGrpSpPr/>
+          <p:nvPr/>
+        </p:nvGrpSpPr>
+        <p:grpSpPr>
+          <a:xfrm rot="303431">
+            <a:off x="3908700" y="5031612"/>
+            <a:ext cx="880663" cy="534137"/>
+            <a:chOff x="5487804" y="5725120"/>
+            <a:chExt cx="1371808" cy="918663"/>
+          </a:xfrm>
+        </p:grpSpPr>
+        <p:sp>
+          <p:nvSpPr>
+            <p:cNvPr id="3" name="Oval 2">
+              <a:extLst>
+                <a:ext uri="{FF2B5EF4-FFF2-40B4-BE49-F238E27FC236}">
+                  <a16:creationId xmlns:a16="http://schemas.microsoft.com/office/drawing/2014/main" id="{88AB165C-A702-1A90-ADD8-462FF1AB3796}"/>
+                </a:ext>
+              </a:extLst>
+            </p:cNvPr>
+            <p:cNvSpPr/>
+            <p:nvPr/>
+          </p:nvSpPr>
+          <p:spPr>
+            <a:xfrm>
+              <a:off x="5582659" y="5892443"/>
+              <a:ext cx="1086354" cy="581935"/>
+            </a:xfrm>
+            <a:prstGeom prst="ellipse">
+              <a:avLst/>
+            </a:prstGeom>
+            <a:solidFill>
+              <a:schemeClr val="bg1"/>
+            </a:solidFill>
+          </p:spPr>
+          <p:style>
+            <a:lnRef idx="1">
+              <a:schemeClr val="accent1"/>
+            </a:lnRef>
+            <a:fillRef idx="2">
+              <a:schemeClr val="accent1"/>
+            </a:fillRef>
+            <a:effectRef idx="1">
+              <a:schemeClr val="accent1"/>
+            </a:effectRef>
+            <a:fontRef idx="minor">
+              <a:schemeClr val="dk1"/>
+            </a:fontRef>
+          </p:style>
+          <p:txBody>
+            <a:bodyPr rtlCol="0" anchor="ctr"/>
+            <a:lstStyle/>
+            <a:p>
+              <a:pPr algn="ctr"/>
+              <a:endParaRPr lang="en-US" sz="1600" b="1" dirty="0"/>
+            </a:p>
+          </p:txBody>
+        </p:sp>
+        <p:pic>
+          <p:nvPicPr>
+            <p:cNvPr id="4" name="Picture 26" descr="Docker full logo transparent PNG - StickPNG">
+              <a:extLst>
+                <a:ext uri="{FF2B5EF4-FFF2-40B4-BE49-F238E27FC236}">
+                  <a16:creationId xmlns:a16="http://schemas.microsoft.com/office/drawing/2014/main" id="{BD6B5A60-BDDE-3337-75F3-6C834A25BF28}"/>
+                </a:ext>
+              </a:extLst>
+            </p:cNvPr>
+            <p:cNvPicPr>
+              <a:picLocks noChangeAspect="1" noChangeArrowheads="1"/>
+            </p:cNvPicPr>
+            <p:nvPr/>
+          </p:nvPicPr>
+          <p:blipFill>
+            <a:blip r:embed="rId28">
+              <a:extLst>
+                <a:ext uri="{28A0092B-C50C-407E-A947-70E740481C1C}">
+                  <a14:useLocalDpi xmlns:a14="http://schemas.microsoft.com/office/drawing/2010/main" val="0"/>
+                </a:ext>
+              </a:extLst>
+            </a:blip>
+            <a:srcRect/>
+            <a:stretch>
+              <a:fillRect/>
+            </a:stretch>
+          </p:blipFill>
+          <p:spPr bwMode="auto">
+            <a:xfrm>
+              <a:off x="5922040" y="5947022"/>
+              <a:ext cx="480968" cy="480968"/>
+            </a:xfrm>
+            <a:prstGeom prst="rect">
+              <a:avLst/>
+            </a:prstGeom>
+            <a:noFill/>
+            <a:extLst>
+              <a:ext uri="{909E8E84-426E-40DD-AFC4-6F175D3DCCD1}">
+                <a14:hiddenFill xmlns:a14="http://schemas.microsoft.com/office/drawing/2010/main">
+                  <a:solidFill>
+                    <a:srgbClr val="FFFFFF"/>
+                  </a:solidFill>
+                </a14:hiddenFill>
+              </a:ext>
+            </a:extLst>
+          </p:spPr>
+        </p:pic>
+        <p:sp>
+          <p:nvSpPr>
+            <p:cNvPr id="6" name="TextBox 5">
+              <a:extLst>
+                <a:ext uri="{FF2B5EF4-FFF2-40B4-BE49-F238E27FC236}">
+                  <a16:creationId xmlns:a16="http://schemas.microsoft.com/office/drawing/2014/main" id="{577DE9D9-4567-F4D0-5732-2ADFB79494B4}"/>
+                </a:ext>
+              </a:extLst>
+            </p:cNvPr>
+            <p:cNvSpPr txBox="1"/>
+            <p:nvPr/>
+          </p:nvSpPr>
+          <p:spPr>
+            <a:xfrm rot="2080869">
+              <a:off x="6274852" y="6074807"/>
+              <a:ext cx="521320" cy="225557"/>
+            </a:xfrm>
+            <a:prstGeom prst="rect">
+              <a:avLst/>
+            </a:prstGeom>
+            <a:noFill/>
+          </p:spPr>
+          <p:txBody>
+            <a:bodyPr wrap="square" rtlCol="0">
+              <a:spAutoFit/>
+            </a:bodyPr>
+            <a:lstStyle/>
+            <a:p>
+              <a:r>
+                <a:rPr lang="en-US" sz="600" b="1" dirty="0"/>
+                <a:t>Tool</a:t>
+              </a:r>
+            </a:p>
+          </p:txBody>
+        </p:sp>
+        <p:sp>
+          <p:nvSpPr>
+            <p:cNvPr id="8" name="TextBox 7">
+              <a:extLst>
+                <a:ext uri="{FF2B5EF4-FFF2-40B4-BE49-F238E27FC236}">
+                  <a16:creationId xmlns:a16="http://schemas.microsoft.com/office/drawing/2014/main" id="{80997061-5929-9DDA-B6CC-7990C158DFAE}"/>
+                </a:ext>
+              </a:extLst>
+            </p:cNvPr>
+            <p:cNvSpPr txBox="1"/>
+            <p:nvPr/>
+          </p:nvSpPr>
+          <p:spPr>
+            <a:xfrm rot="19537392">
+              <a:off x="5487804" y="5988340"/>
+              <a:ext cx="639646" cy="244354"/>
+            </a:xfrm>
+            <a:prstGeom prst="rect">
+              <a:avLst/>
+            </a:prstGeom>
+            <a:noFill/>
+          </p:spPr>
+          <p:txBody>
+            <a:bodyPr wrap="square" rtlCol="0">
+              <a:spAutoFit/>
+            </a:bodyPr>
+            <a:lstStyle/>
+            <a:p>
+              <a:r>
+                <a:rPr lang="en-US" sz="700" b="1" dirty="0"/>
+                <a:t>Sushy</a:t>
+              </a:r>
+            </a:p>
+          </p:txBody>
+        </p:sp>
+        <p:sp>
+          <p:nvSpPr>
+            <p:cNvPr id="11" name="TextBox 10">
+              <a:extLst>
+                <a:ext uri="{FF2B5EF4-FFF2-40B4-BE49-F238E27FC236}">
+                  <a16:creationId xmlns:a16="http://schemas.microsoft.com/office/drawing/2014/main" id="{A40DDCF0-6819-1CF9-6FB9-148A5FC1DFFC}"/>
+                </a:ext>
+              </a:extLst>
+            </p:cNvPr>
+            <p:cNvSpPr txBox="1"/>
+            <p:nvPr/>
+          </p:nvSpPr>
+          <p:spPr>
+            <a:xfrm>
+              <a:off x="5516668" y="6418226"/>
+              <a:ext cx="1342944" cy="225557"/>
+            </a:xfrm>
+            <a:prstGeom prst="rect">
+              <a:avLst/>
+            </a:prstGeom>
+            <a:noFill/>
+          </p:spPr>
+          <p:txBody>
+            <a:bodyPr wrap="square" rtlCol="0">
+              <a:spAutoFit/>
+            </a:bodyPr>
+            <a:lstStyle/>
+            <a:p>
+              <a:r>
+                <a:rPr lang="en-US" sz="600" b="1" dirty="0"/>
+                <a:t>Virtual Redfish BMC</a:t>
+              </a:r>
+            </a:p>
+          </p:txBody>
+        </p:sp>
+        <p:sp>
+          <p:nvSpPr>
+            <p:cNvPr id="13" name="TextBox 12">
+              <a:extLst>
+                <a:ext uri="{FF2B5EF4-FFF2-40B4-BE49-F238E27FC236}">
+                  <a16:creationId xmlns:a16="http://schemas.microsoft.com/office/drawing/2014/main" id="{16176E8C-D24F-5B2B-E9F1-EBDF604A0F5D}"/>
+                </a:ext>
+              </a:extLst>
+            </p:cNvPr>
+            <p:cNvSpPr txBox="1"/>
+            <p:nvPr/>
+          </p:nvSpPr>
+          <p:spPr>
+            <a:xfrm>
+              <a:off x="5901394" y="5725120"/>
+              <a:ext cx="499419" cy="206760"/>
+            </a:xfrm>
+            <a:prstGeom prst="rect">
+              <a:avLst/>
+            </a:prstGeom>
+            <a:noFill/>
+          </p:spPr>
+          <p:txBody>
+            <a:bodyPr wrap="square" rtlCol="0">
+              <a:spAutoFit/>
+            </a:bodyPr>
+            <a:lstStyle/>
+            <a:p>
+              <a:r>
+                <a:rPr lang="en-US" sz="500" b="1" dirty="0"/>
+                <a:t>8000</a:t>
+              </a:r>
+            </a:p>
+          </p:txBody>
+        </p:sp>
+      </p:grpSp>
+      <p:cxnSp>
+        <p:nvCxnSpPr>
+          <p:cNvPr id="54" name="Straight Arrow Connector 53">
+            <a:extLst>
+              <a:ext uri="{FF2B5EF4-FFF2-40B4-BE49-F238E27FC236}">
+                <a16:creationId xmlns:a16="http://schemas.microsoft.com/office/drawing/2014/main" id="{FC08F25F-BDBC-E7F5-49F5-DF3ECB7F06DB}"/>
+              </a:ext>
+            </a:extLst>
+          </p:cNvPr>
+          <p:cNvCxnSpPr>
+            <a:cxnSpLocks/>
+          </p:cNvCxnSpPr>
+          <p:nvPr/>
+        </p:nvCxnSpPr>
+        <p:spPr>
+          <a:xfrm flipH="1">
+            <a:off x="6577748" y="5205231"/>
+            <a:ext cx="2745191" cy="312132"/>
+          </a:xfrm>
+          <a:prstGeom prst="straightConnector1">
+            <a:avLst/>
+          </a:prstGeom>
+          <a:ln>
+            <a:solidFill>
+              <a:schemeClr val="accent2">
+                <a:lumMod val="75000"/>
+              </a:schemeClr>
+            </a:solidFill>
+            <a:prstDash val="lgDash"/>
+            <a:headEnd type="triangle"/>
+            <a:tailEnd type="triangle"/>
+          </a:ln>
+        </p:spPr>
+        <p:style>
+          <a:lnRef idx="1">
+            <a:schemeClr val="accent1"/>
+          </a:lnRef>
+          <a:fillRef idx="0">
+            <a:schemeClr val="accent1"/>
+          </a:fillRef>
+          <a:effectRef idx="0">
+            <a:schemeClr val="accent1"/>
+          </a:effectRef>
+          <a:fontRef idx="minor">
+            <a:schemeClr val="tx1"/>
+          </a:fontRef>
+        </p:style>
+      </p:cxnSp>
+      <p:grpSp>
+        <p:nvGrpSpPr>
+          <p:cNvPr id="31" name="Group 30">
+            <a:extLst>
+              <a:ext uri="{FF2B5EF4-FFF2-40B4-BE49-F238E27FC236}">
+                <a16:creationId xmlns:a16="http://schemas.microsoft.com/office/drawing/2014/main" id="{286A3246-9D3B-A8A6-6AA9-60171C558AF9}"/>
+              </a:ext>
+            </a:extLst>
+          </p:cNvPr>
+          <p:cNvGrpSpPr/>
+          <p:nvPr/>
+        </p:nvGrpSpPr>
+        <p:grpSpPr>
+          <a:xfrm rot="21065701">
+            <a:off x="7275519" y="5088498"/>
+            <a:ext cx="880663" cy="534137"/>
+            <a:chOff x="5487804" y="5725120"/>
+            <a:chExt cx="1371808" cy="918663"/>
+          </a:xfrm>
+        </p:grpSpPr>
+        <p:sp>
+          <p:nvSpPr>
+            <p:cNvPr id="32" name="Oval 31">
+              <a:extLst>
+                <a:ext uri="{FF2B5EF4-FFF2-40B4-BE49-F238E27FC236}">
+                  <a16:creationId xmlns:a16="http://schemas.microsoft.com/office/drawing/2014/main" id="{0025A43D-08D5-E89B-87C4-8DE39F821162}"/>
+                </a:ext>
+              </a:extLst>
+            </p:cNvPr>
+            <p:cNvSpPr/>
+            <p:nvPr/>
+          </p:nvSpPr>
+          <p:spPr>
+            <a:xfrm>
+              <a:off x="5582659" y="5892443"/>
+              <a:ext cx="1086354" cy="581935"/>
+            </a:xfrm>
+            <a:prstGeom prst="ellipse">
+              <a:avLst/>
+            </a:prstGeom>
+            <a:solidFill>
+              <a:schemeClr val="bg1"/>
+            </a:solidFill>
+          </p:spPr>
+          <p:style>
+            <a:lnRef idx="1">
+              <a:schemeClr val="accent1"/>
+            </a:lnRef>
+            <a:fillRef idx="2">
+              <a:schemeClr val="accent1"/>
+            </a:fillRef>
+            <a:effectRef idx="1">
+              <a:schemeClr val="accent1"/>
+            </a:effectRef>
+            <a:fontRef idx="minor">
+              <a:schemeClr val="dk1"/>
+            </a:fontRef>
+          </p:style>
+          <p:txBody>
+            <a:bodyPr rtlCol="0" anchor="ctr"/>
+            <a:lstStyle/>
+            <a:p>
+              <a:pPr algn="ctr"/>
+              <a:endParaRPr lang="en-US" sz="1600" b="1" dirty="0"/>
+            </a:p>
+          </p:txBody>
+        </p:sp>
+        <p:pic>
+          <p:nvPicPr>
+            <p:cNvPr id="33" name="Picture 26" descr="Docker full logo transparent PNG - StickPNG">
+              <a:extLst>
+                <a:ext uri="{FF2B5EF4-FFF2-40B4-BE49-F238E27FC236}">
+                  <a16:creationId xmlns:a16="http://schemas.microsoft.com/office/drawing/2014/main" id="{46EB6DBD-C313-0B00-3FBC-7F766774A286}"/>
+                </a:ext>
+              </a:extLst>
+            </p:cNvPr>
+            <p:cNvPicPr>
+              <a:picLocks noChangeAspect="1" noChangeArrowheads="1"/>
+            </p:cNvPicPr>
+            <p:nvPr/>
+          </p:nvPicPr>
+          <p:blipFill>
+            <a:blip r:embed="rId28">
+              <a:extLst>
+                <a:ext uri="{28A0092B-C50C-407E-A947-70E740481C1C}">
+                  <a14:useLocalDpi xmlns:a14="http://schemas.microsoft.com/office/drawing/2010/main" val="0"/>
+                </a:ext>
+              </a:extLst>
+            </a:blip>
+            <a:srcRect/>
+            <a:stretch>
+              <a:fillRect/>
+            </a:stretch>
+          </p:blipFill>
+          <p:spPr bwMode="auto">
+            <a:xfrm>
+              <a:off x="5922040" y="5947022"/>
+              <a:ext cx="480968" cy="480968"/>
+            </a:xfrm>
+            <a:prstGeom prst="rect">
+              <a:avLst/>
+            </a:prstGeom>
+            <a:noFill/>
+            <a:extLst>
+              <a:ext uri="{909E8E84-426E-40DD-AFC4-6F175D3DCCD1}">
+                <a14:hiddenFill xmlns:a14="http://schemas.microsoft.com/office/drawing/2010/main">
+                  <a:solidFill>
+                    <a:srgbClr val="FFFFFF"/>
+                  </a:solidFill>
+                </a14:hiddenFill>
+              </a:ext>
+            </a:extLst>
+          </p:spPr>
+        </p:pic>
+        <p:sp>
+          <p:nvSpPr>
+            <p:cNvPr id="34" name="TextBox 33">
+              <a:extLst>
+                <a:ext uri="{FF2B5EF4-FFF2-40B4-BE49-F238E27FC236}">
+                  <a16:creationId xmlns:a16="http://schemas.microsoft.com/office/drawing/2014/main" id="{B1D39D84-B351-D32F-B957-427FA50C66E6}"/>
+                </a:ext>
+              </a:extLst>
+            </p:cNvPr>
+            <p:cNvSpPr txBox="1"/>
+            <p:nvPr/>
+          </p:nvSpPr>
+          <p:spPr>
+            <a:xfrm rot="2080869">
+              <a:off x="6274852" y="6074807"/>
+              <a:ext cx="521320" cy="225557"/>
+            </a:xfrm>
+            <a:prstGeom prst="rect">
+              <a:avLst/>
+            </a:prstGeom>
+            <a:noFill/>
+          </p:spPr>
+          <p:txBody>
+            <a:bodyPr wrap="square" rtlCol="0">
+              <a:spAutoFit/>
+            </a:bodyPr>
+            <a:lstStyle/>
+            <a:p>
+              <a:r>
+                <a:rPr lang="en-US" sz="600" b="1" dirty="0"/>
+                <a:t>Tool</a:t>
+              </a:r>
+            </a:p>
+          </p:txBody>
+        </p:sp>
+        <p:sp>
+          <p:nvSpPr>
+            <p:cNvPr id="35" name="TextBox 34">
+              <a:extLst>
+                <a:ext uri="{FF2B5EF4-FFF2-40B4-BE49-F238E27FC236}">
+                  <a16:creationId xmlns:a16="http://schemas.microsoft.com/office/drawing/2014/main" id="{A804D4B1-748C-C90E-D33D-5D3DA1A4FB12}"/>
+                </a:ext>
+              </a:extLst>
+            </p:cNvPr>
+            <p:cNvSpPr txBox="1"/>
+            <p:nvPr/>
+          </p:nvSpPr>
+          <p:spPr>
+            <a:xfrm rot="19537392">
+              <a:off x="5487804" y="5988340"/>
+              <a:ext cx="639646" cy="244354"/>
+            </a:xfrm>
+            <a:prstGeom prst="rect">
+              <a:avLst/>
+            </a:prstGeom>
+            <a:noFill/>
+          </p:spPr>
+          <p:txBody>
+            <a:bodyPr wrap="square" rtlCol="0">
+              <a:spAutoFit/>
+            </a:bodyPr>
+            <a:lstStyle/>
+            <a:p>
+              <a:r>
+                <a:rPr lang="en-US" sz="700" b="1" dirty="0"/>
+                <a:t>Sushy</a:t>
+              </a:r>
+            </a:p>
+          </p:txBody>
+        </p:sp>
+        <p:sp>
+          <p:nvSpPr>
+            <p:cNvPr id="40" name="TextBox 39">
+              <a:extLst>
+                <a:ext uri="{FF2B5EF4-FFF2-40B4-BE49-F238E27FC236}">
+                  <a16:creationId xmlns:a16="http://schemas.microsoft.com/office/drawing/2014/main" id="{932F3E6B-DE31-F028-2A6F-2B41DC9DC422}"/>
+                </a:ext>
+              </a:extLst>
+            </p:cNvPr>
+            <p:cNvSpPr txBox="1"/>
+            <p:nvPr/>
+          </p:nvSpPr>
+          <p:spPr>
+            <a:xfrm>
+              <a:off x="5516668" y="6418226"/>
+              <a:ext cx="1342944" cy="225557"/>
+            </a:xfrm>
+            <a:prstGeom prst="rect">
+              <a:avLst/>
+            </a:prstGeom>
+            <a:noFill/>
+          </p:spPr>
+          <p:txBody>
+            <a:bodyPr wrap="square" rtlCol="0">
+              <a:spAutoFit/>
+            </a:bodyPr>
+            <a:lstStyle/>
+            <a:p>
+              <a:r>
+                <a:rPr lang="en-US" sz="600" b="1" dirty="0"/>
+                <a:t>Virtual Redfish BMC</a:t>
+              </a:r>
+            </a:p>
+          </p:txBody>
+        </p:sp>
+        <p:sp>
+          <p:nvSpPr>
+            <p:cNvPr id="42" name="TextBox 41">
+              <a:extLst>
+                <a:ext uri="{FF2B5EF4-FFF2-40B4-BE49-F238E27FC236}">
+                  <a16:creationId xmlns:a16="http://schemas.microsoft.com/office/drawing/2014/main" id="{2570CEA0-FA93-0CFE-53D2-F9DBACC28D57}"/>
+                </a:ext>
+              </a:extLst>
+            </p:cNvPr>
+            <p:cNvSpPr txBox="1"/>
+            <p:nvPr/>
+          </p:nvSpPr>
+          <p:spPr>
+            <a:xfrm>
+              <a:off x="5901393" y="5725120"/>
+              <a:ext cx="499419" cy="206760"/>
+            </a:xfrm>
+            <a:prstGeom prst="rect">
+              <a:avLst/>
+            </a:prstGeom>
+            <a:noFill/>
+          </p:spPr>
+          <p:txBody>
+            <a:bodyPr wrap="square" rtlCol="0">
+              <a:spAutoFit/>
+            </a:bodyPr>
+            <a:lstStyle/>
+            <a:p>
+              <a:r>
+                <a:rPr lang="en-US" sz="500" b="1" dirty="0"/>
+                <a:t>8000</a:t>
+              </a:r>
+            </a:p>
+          </p:txBody>
+        </p:sp>
+      </p:grpSp>
     </p:spTree>
     <p:extLst>
       <p:ext uri="{BB962C8B-B14F-4D97-AF65-F5344CB8AC3E}">
@@ -6636,6 +7744,3213 @@
 </file>
 
 <file path=ppt/slides/slide2.xml><?xml version="1.0" encoding="utf-8"?>
+<p:sld xmlns:a="http://schemas.openxmlformats.org/drawingml/2006/main" xmlns:r="http://schemas.openxmlformats.org/officeDocument/2006/relationships" xmlns:p="http://schemas.openxmlformats.org/presentationml/2006/main">
+  <p:cSld>
+    <p:spTree>
+      <p:nvGrpSpPr>
+        <p:cNvPr id="1" name="">
+          <a:extLst>
+            <a:ext uri="{FF2B5EF4-FFF2-40B4-BE49-F238E27FC236}">
+              <a16:creationId xmlns:a16="http://schemas.microsoft.com/office/drawing/2014/main" id="{4DDA39E3-7722-E302-EC6E-259F4954B689}"/>
+            </a:ext>
+          </a:extLst>
+        </p:cNvPr>
+        <p:cNvGrpSpPr/>
+        <p:nvPr/>
+      </p:nvGrpSpPr>
+      <p:grpSpPr>
+        <a:xfrm>
+          <a:off x="0" y="0"/>
+          <a:ext cx="0" cy="0"/>
+          <a:chOff x="0" y="0"/>
+          <a:chExt cx="0" cy="0"/>
+        </a:xfrm>
+      </p:grpSpPr>
+      <p:cxnSp>
+        <p:nvCxnSpPr>
+          <p:cNvPr id="1071" name="Connector: Elbow 1070">
+            <a:extLst>
+              <a:ext uri="{FF2B5EF4-FFF2-40B4-BE49-F238E27FC236}">
+                <a16:creationId xmlns:a16="http://schemas.microsoft.com/office/drawing/2014/main" id="{CD06093F-8D50-6C1A-0A3C-12CEF230D5DF}"/>
+              </a:ext>
+            </a:extLst>
+          </p:cNvPr>
+          <p:cNvCxnSpPr>
+            <a:stCxn id="17" idx="2"/>
+          </p:cNvCxnSpPr>
+          <p:nvPr/>
+        </p:nvCxnSpPr>
+        <p:spPr>
+          <a:xfrm rot="5400000">
+            <a:off x="2948090" y="3005595"/>
+            <a:ext cx="2802504" cy="3497729"/>
+          </a:xfrm>
+          <a:prstGeom prst="bentConnector2">
+            <a:avLst/>
+          </a:prstGeom>
+          <a:ln>
+            <a:solidFill>
+              <a:schemeClr val="accent1">
+                <a:lumMod val="75000"/>
+              </a:schemeClr>
+            </a:solidFill>
+            <a:prstDash val="lgDash"/>
+            <a:tailEnd type="triangle"/>
+          </a:ln>
+        </p:spPr>
+        <p:style>
+          <a:lnRef idx="1">
+            <a:schemeClr val="accent1"/>
+          </a:lnRef>
+          <a:fillRef idx="0">
+            <a:schemeClr val="accent1"/>
+          </a:fillRef>
+          <a:effectRef idx="0">
+            <a:schemeClr val="accent1"/>
+          </a:effectRef>
+          <a:fontRef idx="minor">
+            <a:schemeClr val="tx1"/>
+          </a:fontRef>
+        </p:style>
+      </p:cxnSp>
+      <p:cxnSp>
+        <p:nvCxnSpPr>
+          <p:cNvPr id="1072" name="Connector: Elbow 1071">
+            <a:extLst>
+              <a:ext uri="{FF2B5EF4-FFF2-40B4-BE49-F238E27FC236}">
+                <a16:creationId xmlns:a16="http://schemas.microsoft.com/office/drawing/2014/main" id="{2F85830B-BC70-55F5-61AD-757BCCDF70EE}"/>
+              </a:ext>
+            </a:extLst>
+          </p:cNvPr>
+          <p:cNvCxnSpPr>
+            <a:cxnSpLocks/>
+            <a:stCxn id="17" idx="2"/>
+          </p:cNvCxnSpPr>
+          <p:nvPr/>
+        </p:nvCxnSpPr>
+        <p:spPr>
+          <a:xfrm rot="16200000" flipH="1">
+            <a:off x="6392339" y="3059074"/>
+            <a:ext cx="2808830" cy="3397096"/>
+          </a:xfrm>
+          <a:prstGeom prst="bentConnector2">
+            <a:avLst/>
+          </a:prstGeom>
+          <a:ln>
+            <a:solidFill>
+              <a:schemeClr val="accent1">
+                <a:lumMod val="75000"/>
+              </a:schemeClr>
+            </a:solidFill>
+            <a:prstDash val="lgDash"/>
+            <a:tailEnd type="triangle"/>
+          </a:ln>
+        </p:spPr>
+        <p:style>
+          <a:lnRef idx="1">
+            <a:schemeClr val="accent1"/>
+          </a:lnRef>
+          <a:fillRef idx="0">
+            <a:schemeClr val="accent1"/>
+          </a:fillRef>
+          <a:effectRef idx="0">
+            <a:schemeClr val="accent1"/>
+          </a:effectRef>
+          <a:fontRef idx="minor">
+            <a:schemeClr val="tx1"/>
+          </a:fontRef>
+        </p:style>
+      </p:cxnSp>
+      <p:grpSp>
+        <p:nvGrpSpPr>
+          <p:cNvPr id="50" name="Group 49">
+            <a:extLst>
+              <a:ext uri="{FF2B5EF4-FFF2-40B4-BE49-F238E27FC236}">
+                <a16:creationId xmlns:a16="http://schemas.microsoft.com/office/drawing/2014/main" id="{5BCBA36A-F123-0DD6-DC87-19A78B9ABD4B}"/>
+              </a:ext>
+            </a:extLst>
+          </p:cNvPr>
+          <p:cNvGrpSpPr/>
+          <p:nvPr/>
+        </p:nvGrpSpPr>
+        <p:grpSpPr>
+          <a:xfrm>
+            <a:off x="886705" y="5583958"/>
+            <a:ext cx="1588818" cy="1143508"/>
+            <a:chOff x="8183462" y="4652739"/>
+            <a:chExt cx="2138787" cy="1519665"/>
+          </a:xfrm>
+        </p:grpSpPr>
+        <p:pic>
+          <p:nvPicPr>
+            <p:cNvPr id="30" name="Picture 14" descr="ThinkCentre M710 Tiny | 1L Micro ...">
+              <a:extLst>
+                <a:ext uri="{FF2B5EF4-FFF2-40B4-BE49-F238E27FC236}">
+                  <a16:creationId xmlns:a16="http://schemas.microsoft.com/office/drawing/2014/main" id="{B66795DA-C711-50E8-ED7F-D1E0FFBA3105}"/>
+                </a:ext>
+              </a:extLst>
+            </p:cNvPr>
+            <p:cNvPicPr>
+              <a:picLocks noChangeAspect="1" noChangeArrowheads="1"/>
+            </p:cNvPicPr>
+            <p:nvPr/>
+          </p:nvPicPr>
+          <p:blipFill>
+            <a:blip r:embed="rId3">
+              <a:extLst>
+                <a:ext uri="{28A0092B-C50C-407E-A947-70E740481C1C}">
+                  <a14:useLocalDpi xmlns:a14="http://schemas.microsoft.com/office/drawing/2010/main" val="0"/>
+                </a:ext>
+              </a:extLst>
+            </a:blip>
+            <a:srcRect/>
+            <a:stretch>
+              <a:fillRect/>
+            </a:stretch>
+          </p:blipFill>
+          <p:spPr bwMode="auto">
+            <a:xfrm>
+              <a:off x="8183462" y="4652739"/>
+              <a:ext cx="2138787" cy="1519665"/>
+            </a:xfrm>
+            <a:prstGeom prst="rect">
+              <a:avLst/>
+            </a:prstGeom>
+            <a:noFill/>
+            <a:extLst>
+              <a:ext uri="{909E8E84-426E-40DD-AFC4-6F175D3DCCD1}">
+                <a14:hiddenFill xmlns:a14="http://schemas.microsoft.com/office/drawing/2010/main">
+                  <a:solidFill>
+                    <a:srgbClr val="FFFFFF"/>
+                  </a:solidFill>
+                </a14:hiddenFill>
+              </a:ext>
+            </a:extLst>
+          </p:spPr>
+        </p:pic>
+        <p:pic>
+          <p:nvPicPr>
+            <p:cNvPr id="36" name="Picture 35">
+              <a:extLst>
+                <a:ext uri="{FF2B5EF4-FFF2-40B4-BE49-F238E27FC236}">
+                  <a16:creationId xmlns:a16="http://schemas.microsoft.com/office/drawing/2014/main" id="{2E8BA5B5-ADEF-A52D-DB3B-92A163DB91CF}"/>
+                </a:ext>
+              </a:extLst>
+            </p:cNvPr>
+            <p:cNvPicPr>
+              <a:picLocks noChangeAspect="1"/>
+            </p:cNvPicPr>
+            <p:nvPr/>
+          </p:nvPicPr>
+          <p:blipFill>
+            <a:blip r:embed="rId4"/>
+            <a:stretch>
+              <a:fillRect/>
+            </a:stretch>
+          </p:blipFill>
+          <p:spPr>
+            <a:xfrm>
+              <a:off x="9066015" y="5077977"/>
+              <a:ext cx="430438" cy="415335"/>
+            </a:xfrm>
+            <a:prstGeom prst="rect">
+              <a:avLst/>
+            </a:prstGeom>
+          </p:spPr>
+        </p:pic>
+        <p:pic>
+          <p:nvPicPr>
+            <p:cNvPr id="37" name="Picture 36">
+              <a:extLst>
+                <a:ext uri="{FF2B5EF4-FFF2-40B4-BE49-F238E27FC236}">
+                  <a16:creationId xmlns:a16="http://schemas.microsoft.com/office/drawing/2014/main" id="{61D51C17-6C5C-9B2E-5900-01510D37ED9D}"/>
+                </a:ext>
+              </a:extLst>
+            </p:cNvPr>
+            <p:cNvPicPr>
+              <a:picLocks noChangeAspect="1"/>
+            </p:cNvPicPr>
+            <p:nvPr/>
+          </p:nvPicPr>
+          <p:blipFill>
+            <a:blip r:embed="rId5"/>
+            <a:stretch>
+              <a:fillRect/>
+            </a:stretch>
+          </p:blipFill>
+          <p:spPr>
+            <a:xfrm>
+              <a:off x="9519741" y="5412570"/>
+              <a:ext cx="296767" cy="263793"/>
+            </a:xfrm>
+            <a:prstGeom prst="rect">
+              <a:avLst/>
+            </a:prstGeom>
+          </p:spPr>
+        </p:pic>
+        <p:sp>
+          <p:nvSpPr>
+            <p:cNvPr id="40" name="TextBox 39">
+              <a:extLst>
+                <a:ext uri="{FF2B5EF4-FFF2-40B4-BE49-F238E27FC236}">
+                  <a16:creationId xmlns:a16="http://schemas.microsoft.com/office/drawing/2014/main" id="{7C2A1422-7B0E-2FE8-FFB6-2CB87336803D}"/>
+                </a:ext>
+              </a:extLst>
+            </p:cNvPr>
+            <p:cNvSpPr txBox="1"/>
+            <p:nvPr/>
+          </p:nvSpPr>
+          <p:spPr>
+            <a:xfrm>
+              <a:off x="8466543" y="5699389"/>
+              <a:ext cx="1629384" cy="368118"/>
+            </a:xfrm>
+            <a:prstGeom prst="rect">
+              <a:avLst/>
+            </a:prstGeom>
+            <a:noFill/>
+          </p:spPr>
+          <p:txBody>
+            <a:bodyPr wrap="square" rtlCol="0">
+              <a:spAutoFit/>
+            </a:bodyPr>
+            <a:lstStyle/>
+            <a:p>
+              <a:r>
+                <a:rPr lang="en-US" sz="1200" dirty="0"/>
+                <a:t>192.168.0.159</a:t>
+              </a:r>
+            </a:p>
+          </p:txBody>
+        </p:sp>
+      </p:grpSp>
+      <p:cxnSp>
+        <p:nvCxnSpPr>
+          <p:cNvPr id="25" name="Straight Arrow Connector 24">
+            <a:extLst>
+              <a:ext uri="{FF2B5EF4-FFF2-40B4-BE49-F238E27FC236}">
+                <a16:creationId xmlns:a16="http://schemas.microsoft.com/office/drawing/2014/main" id="{6BE86318-CF80-17E1-A6C8-D2A7D3FBB69F}"/>
+              </a:ext>
+            </a:extLst>
+          </p:cNvPr>
+          <p:cNvCxnSpPr>
+            <a:cxnSpLocks/>
+          </p:cNvCxnSpPr>
+          <p:nvPr/>
+        </p:nvCxnSpPr>
+        <p:spPr>
+          <a:xfrm flipH="1">
+            <a:off x="7789137" y="1170795"/>
+            <a:ext cx="1226947" cy="696571"/>
+          </a:xfrm>
+          <a:prstGeom prst="straightConnector1">
+            <a:avLst/>
+          </a:prstGeom>
+          <a:ln w="28575">
+            <a:solidFill>
+              <a:srgbClr val="0070C0"/>
+            </a:solidFill>
+            <a:tailEnd type="triangle"/>
+          </a:ln>
+        </p:spPr>
+        <p:style>
+          <a:lnRef idx="1">
+            <a:schemeClr val="accent1"/>
+          </a:lnRef>
+          <a:fillRef idx="0">
+            <a:schemeClr val="accent1"/>
+          </a:fillRef>
+          <a:effectRef idx="0">
+            <a:schemeClr val="accent1"/>
+          </a:effectRef>
+          <a:fontRef idx="minor">
+            <a:schemeClr val="tx1"/>
+          </a:fontRef>
+        </p:style>
+      </p:cxnSp>
+      <p:grpSp>
+        <p:nvGrpSpPr>
+          <p:cNvPr id="19" name="Group 18">
+            <a:extLst>
+              <a:ext uri="{FF2B5EF4-FFF2-40B4-BE49-F238E27FC236}">
+                <a16:creationId xmlns:a16="http://schemas.microsoft.com/office/drawing/2014/main" id="{773150BD-18F7-B9E3-D44E-87C27DC935C7}"/>
+              </a:ext>
+            </a:extLst>
+          </p:cNvPr>
+          <p:cNvGrpSpPr/>
+          <p:nvPr/>
+        </p:nvGrpSpPr>
+        <p:grpSpPr>
+          <a:xfrm>
+            <a:off x="5927443" y="659199"/>
+            <a:ext cx="696683" cy="688742"/>
+            <a:chOff x="8447317" y="3034733"/>
+            <a:chExt cx="1118166" cy="962704"/>
+          </a:xfrm>
+        </p:grpSpPr>
+        <p:pic>
+          <p:nvPicPr>
+            <p:cNvPr id="1026" name="Picture 2" descr="Free argocd-original-wordmark SVG Icon ...">
+              <a:extLst>
+                <a:ext uri="{FF2B5EF4-FFF2-40B4-BE49-F238E27FC236}">
+                  <a16:creationId xmlns:a16="http://schemas.microsoft.com/office/drawing/2014/main" id="{FDB1B3EF-4F23-C4C1-C36C-EBFE3DDE9BEB}"/>
+                </a:ext>
+              </a:extLst>
+            </p:cNvPr>
+            <p:cNvPicPr>
+              <a:picLocks noChangeAspect="1" noChangeArrowheads="1"/>
+            </p:cNvPicPr>
+            <p:nvPr/>
+          </p:nvPicPr>
+          <p:blipFill>
+            <a:blip r:embed="rId6">
+              <a:extLst>
+                <a:ext uri="{28A0092B-C50C-407E-A947-70E740481C1C}">
+                  <a14:useLocalDpi xmlns:a14="http://schemas.microsoft.com/office/drawing/2010/main" val="0"/>
+                </a:ext>
+              </a:extLst>
+            </a:blip>
+            <a:srcRect/>
+            <a:stretch>
+              <a:fillRect/>
+            </a:stretch>
+          </p:blipFill>
+          <p:spPr bwMode="auto">
+            <a:xfrm>
+              <a:off x="8526576" y="3034733"/>
+              <a:ext cx="962704" cy="962704"/>
+            </a:xfrm>
+            <a:prstGeom prst="rect">
+              <a:avLst/>
+            </a:prstGeom>
+            <a:noFill/>
+            <a:extLst>
+              <a:ext uri="{909E8E84-426E-40DD-AFC4-6F175D3DCCD1}">
+                <a14:hiddenFill xmlns:a14="http://schemas.microsoft.com/office/drawing/2010/main">
+                  <a:solidFill>
+                    <a:srgbClr val="FFFFFF"/>
+                  </a:solidFill>
+                </a14:hiddenFill>
+              </a:ext>
+            </a:extLst>
+          </p:spPr>
+        </p:pic>
+        <p:sp>
+          <p:nvSpPr>
+            <p:cNvPr id="18" name="Oval 17">
+              <a:extLst>
+                <a:ext uri="{FF2B5EF4-FFF2-40B4-BE49-F238E27FC236}">
+                  <a16:creationId xmlns:a16="http://schemas.microsoft.com/office/drawing/2014/main" id="{03DE3E04-AF52-2466-5CE3-AE7A97051227}"/>
+                </a:ext>
+              </a:extLst>
+            </p:cNvPr>
+            <p:cNvSpPr/>
+            <p:nvPr/>
+          </p:nvSpPr>
+          <p:spPr>
+            <a:xfrm>
+              <a:off x="8447317" y="3034733"/>
+              <a:ext cx="1118166" cy="962704"/>
+            </a:xfrm>
+            <a:prstGeom prst="ellipse">
+              <a:avLst/>
+            </a:prstGeom>
+            <a:noFill/>
+          </p:spPr>
+          <p:style>
+            <a:lnRef idx="2">
+              <a:schemeClr val="accent1">
+                <a:shade val="15000"/>
+              </a:schemeClr>
+            </a:lnRef>
+            <a:fillRef idx="1">
+              <a:schemeClr val="accent1"/>
+            </a:fillRef>
+            <a:effectRef idx="0">
+              <a:schemeClr val="accent1"/>
+            </a:effectRef>
+            <a:fontRef idx="minor">
+              <a:schemeClr val="lt1"/>
+            </a:fontRef>
+          </p:style>
+          <p:txBody>
+            <a:bodyPr rtlCol="0" anchor="ctr"/>
+            <a:lstStyle/>
+            <a:p>
+              <a:pPr algn="ctr"/>
+              <a:endParaRPr lang="en-US"/>
+            </a:p>
+          </p:txBody>
+        </p:sp>
+      </p:grpSp>
+      <p:sp>
+        <p:nvSpPr>
+          <p:cNvPr id="14" name="Rectangle: Rounded Corners 13">
+            <a:extLst>
+              <a:ext uri="{FF2B5EF4-FFF2-40B4-BE49-F238E27FC236}">
+                <a16:creationId xmlns:a16="http://schemas.microsoft.com/office/drawing/2014/main" id="{C3741795-4EE9-2B44-D1A3-BB7960E7EB51}"/>
+              </a:ext>
+            </a:extLst>
+          </p:cNvPr>
+          <p:cNvSpPr/>
+          <p:nvPr/>
+        </p:nvSpPr>
+        <p:spPr>
+          <a:xfrm>
+            <a:off x="3037117" y="568215"/>
+            <a:ext cx="4982151" cy="2991414"/>
+          </a:xfrm>
+          <a:prstGeom prst="roundRect">
+            <a:avLst>
+              <a:gd name="adj" fmla="val 8453"/>
+            </a:avLst>
+          </a:prstGeom>
+          <a:noFill/>
+          <a:ln w="19050">
+            <a:solidFill>
+              <a:schemeClr val="accent2">
+                <a:lumMod val="60000"/>
+                <a:lumOff val="40000"/>
+              </a:schemeClr>
+            </a:solidFill>
+          </a:ln>
+        </p:spPr>
+        <p:style>
+          <a:lnRef idx="2">
+            <a:schemeClr val="accent1">
+              <a:shade val="15000"/>
+            </a:schemeClr>
+          </a:lnRef>
+          <a:fillRef idx="1">
+            <a:schemeClr val="accent1"/>
+          </a:fillRef>
+          <a:effectRef idx="0">
+            <a:schemeClr val="accent1"/>
+          </a:effectRef>
+          <a:fontRef idx="minor">
+            <a:schemeClr val="lt1"/>
+          </a:fontRef>
+        </p:style>
+        <p:txBody>
+          <a:bodyPr rtlCol="0" anchor="ctr"/>
+          <a:lstStyle/>
+          <a:p>
+            <a:pPr algn="ctr"/>
+            <a:endParaRPr lang="en-US"/>
+          </a:p>
+        </p:txBody>
+      </p:sp>
+      <p:grpSp>
+        <p:nvGrpSpPr>
+          <p:cNvPr id="4" name="Group 3">
+            <a:extLst>
+              <a:ext uri="{FF2B5EF4-FFF2-40B4-BE49-F238E27FC236}">
+                <a16:creationId xmlns:a16="http://schemas.microsoft.com/office/drawing/2014/main" id="{A8970627-2D59-6AA5-2290-348F6EDDE730}"/>
+              </a:ext>
+            </a:extLst>
+          </p:cNvPr>
+          <p:cNvGrpSpPr/>
+          <p:nvPr/>
+        </p:nvGrpSpPr>
+        <p:grpSpPr>
+          <a:xfrm>
+            <a:off x="2478883" y="1007161"/>
+            <a:ext cx="1116467" cy="904631"/>
+            <a:chOff x="4977976" y="4824144"/>
+            <a:chExt cx="2138787" cy="1519665"/>
+          </a:xfrm>
+        </p:grpSpPr>
+        <p:pic>
+          <p:nvPicPr>
+            <p:cNvPr id="5" name="Picture 14" descr="ThinkCentre M710 Tiny | 1L Micro ...">
+              <a:extLst>
+                <a:ext uri="{FF2B5EF4-FFF2-40B4-BE49-F238E27FC236}">
+                  <a16:creationId xmlns:a16="http://schemas.microsoft.com/office/drawing/2014/main" id="{BC855F88-70B4-FAE5-1AFE-A445E29B2B61}"/>
+                </a:ext>
+              </a:extLst>
+            </p:cNvPr>
+            <p:cNvPicPr>
+              <a:picLocks noChangeAspect="1" noChangeArrowheads="1"/>
+            </p:cNvPicPr>
+            <p:nvPr/>
+          </p:nvPicPr>
+          <p:blipFill>
+            <a:blip r:embed="rId3">
+              <a:extLst>
+                <a:ext uri="{28A0092B-C50C-407E-A947-70E740481C1C}">
+                  <a14:useLocalDpi xmlns:a14="http://schemas.microsoft.com/office/drawing/2010/main" val="0"/>
+                </a:ext>
+              </a:extLst>
+            </a:blip>
+            <a:srcRect/>
+            <a:stretch>
+              <a:fillRect/>
+            </a:stretch>
+          </p:blipFill>
+          <p:spPr bwMode="auto">
+            <a:xfrm>
+              <a:off x="4977976" y="4824144"/>
+              <a:ext cx="2138787" cy="1519665"/>
+            </a:xfrm>
+            <a:prstGeom prst="rect">
+              <a:avLst/>
+            </a:prstGeom>
+            <a:noFill/>
+            <a:extLst>
+              <a:ext uri="{909E8E84-426E-40DD-AFC4-6F175D3DCCD1}">
+                <a14:hiddenFill xmlns:a14="http://schemas.microsoft.com/office/drawing/2010/main">
+                  <a:solidFill>
+                    <a:srgbClr val="FFFFFF"/>
+                  </a:solidFill>
+                </a14:hiddenFill>
+              </a:ext>
+            </a:extLst>
+          </p:spPr>
+        </p:pic>
+        <p:pic>
+          <p:nvPicPr>
+            <p:cNvPr id="6" name="Picture 5">
+              <a:extLst>
+                <a:ext uri="{FF2B5EF4-FFF2-40B4-BE49-F238E27FC236}">
+                  <a16:creationId xmlns:a16="http://schemas.microsoft.com/office/drawing/2014/main" id="{F488ED50-99B4-B657-3E83-0FF240BEABAD}"/>
+                </a:ext>
+              </a:extLst>
+            </p:cNvPr>
+            <p:cNvPicPr>
+              <a:picLocks noChangeAspect="1"/>
+            </p:cNvPicPr>
+            <p:nvPr/>
+          </p:nvPicPr>
+          <p:blipFill>
+            <a:blip r:embed="rId4"/>
+            <a:stretch>
+              <a:fillRect/>
+            </a:stretch>
+          </p:blipFill>
+          <p:spPr>
+            <a:xfrm>
+              <a:off x="5842571" y="5249381"/>
+              <a:ext cx="430438" cy="415335"/>
+            </a:xfrm>
+            <a:prstGeom prst="rect">
+              <a:avLst/>
+            </a:prstGeom>
+          </p:spPr>
+        </p:pic>
+        <p:pic>
+          <p:nvPicPr>
+            <p:cNvPr id="7" name="Picture 6">
+              <a:extLst>
+                <a:ext uri="{FF2B5EF4-FFF2-40B4-BE49-F238E27FC236}">
+                  <a16:creationId xmlns:a16="http://schemas.microsoft.com/office/drawing/2014/main" id="{853E211E-8ADE-7ED3-963B-F7A35AFAC47C}"/>
+                </a:ext>
+              </a:extLst>
+            </p:cNvPr>
+            <p:cNvPicPr>
+              <a:picLocks noChangeAspect="1"/>
+            </p:cNvPicPr>
+            <p:nvPr/>
+          </p:nvPicPr>
+          <p:blipFill>
+            <a:blip r:embed="rId5"/>
+            <a:stretch>
+              <a:fillRect/>
+            </a:stretch>
+          </p:blipFill>
+          <p:spPr>
+            <a:xfrm>
+              <a:off x="6273009" y="5617617"/>
+              <a:ext cx="296767" cy="263793"/>
+            </a:xfrm>
+            <a:prstGeom prst="rect">
+              <a:avLst/>
+            </a:prstGeom>
+          </p:spPr>
+        </p:pic>
+        <p:sp>
+          <p:nvSpPr>
+            <p:cNvPr id="8" name="TextBox 7">
+              <a:extLst>
+                <a:ext uri="{FF2B5EF4-FFF2-40B4-BE49-F238E27FC236}">
+                  <a16:creationId xmlns:a16="http://schemas.microsoft.com/office/drawing/2014/main" id="{A41180B4-9E90-85AA-1143-2D9939FC7B52}"/>
+                </a:ext>
+              </a:extLst>
+            </p:cNvPr>
+            <p:cNvSpPr txBox="1"/>
+            <p:nvPr/>
+          </p:nvSpPr>
+          <p:spPr>
+            <a:xfrm>
+              <a:off x="5281308" y="5881411"/>
+              <a:ext cx="1629384" cy="387769"/>
+            </a:xfrm>
+            <a:prstGeom prst="rect">
+              <a:avLst/>
+            </a:prstGeom>
+            <a:noFill/>
+          </p:spPr>
+          <p:txBody>
+            <a:bodyPr wrap="square" rtlCol="0">
+              <a:spAutoFit/>
+            </a:bodyPr>
+            <a:lstStyle/>
+            <a:p>
+              <a:r>
+                <a:rPr lang="en-US" sz="900" dirty="0"/>
+                <a:t>192.168.0.160</a:t>
+              </a:r>
+            </a:p>
+          </p:txBody>
+        </p:sp>
+      </p:grpSp>
+      <p:grpSp>
+        <p:nvGrpSpPr>
+          <p:cNvPr id="9" name="Group 8">
+            <a:extLst>
+              <a:ext uri="{FF2B5EF4-FFF2-40B4-BE49-F238E27FC236}">
+                <a16:creationId xmlns:a16="http://schemas.microsoft.com/office/drawing/2014/main" id="{7847ADBB-6A94-C1A6-CA95-93B290714772}"/>
+              </a:ext>
+            </a:extLst>
+          </p:cNvPr>
+          <p:cNvGrpSpPr/>
+          <p:nvPr/>
+        </p:nvGrpSpPr>
+        <p:grpSpPr>
+          <a:xfrm>
+            <a:off x="2562910" y="130534"/>
+            <a:ext cx="934313" cy="1314895"/>
+            <a:chOff x="5529937" y="5083984"/>
+            <a:chExt cx="1178574" cy="1676604"/>
+          </a:xfrm>
+        </p:grpSpPr>
+        <p:sp>
+          <p:nvSpPr>
+            <p:cNvPr id="10" name="TextBox 9">
+              <a:extLst>
+                <a:ext uri="{FF2B5EF4-FFF2-40B4-BE49-F238E27FC236}">
+                  <a16:creationId xmlns:a16="http://schemas.microsoft.com/office/drawing/2014/main" id="{0F8C7FED-712F-887A-1F41-66D970C59114}"/>
+                </a:ext>
+              </a:extLst>
+            </p:cNvPr>
+            <p:cNvSpPr txBox="1"/>
+            <p:nvPr/>
+          </p:nvSpPr>
+          <p:spPr>
+            <a:xfrm>
+              <a:off x="5774728" y="6282104"/>
+              <a:ext cx="766672" cy="313953"/>
+            </a:xfrm>
+            <a:prstGeom prst="rect">
+              <a:avLst/>
+            </a:prstGeom>
+            <a:noFill/>
+          </p:spPr>
+          <p:txBody>
+            <a:bodyPr wrap="square" rtlCol="0">
+              <a:spAutoFit/>
+            </a:bodyPr>
+            <a:lstStyle/>
+            <a:p>
+              <a:r>
+                <a:rPr lang="en-US" sz="1000" b="1" dirty="0"/>
+                <a:t>RHACM</a:t>
+              </a:r>
+              <a:endParaRPr lang="en-US" sz="1200" b="1" dirty="0"/>
+            </a:p>
+          </p:txBody>
+        </p:sp>
+        <p:pic>
+          <p:nvPicPr>
+            <p:cNvPr id="11" name="Picture 10">
+              <a:extLst>
+                <a:ext uri="{FF2B5EF4-FFF2-40B4-BE49-F238E27FC236}">
+                  <a16:creationId xmlns:a16="http://schemas.microsoft.com/office/drawing/2014/main" id="{A7197FCA-598E-19C6-7989-176D926A5814}"/>
+                </a:ext>
+              </a:extLst>
+            </p:cNvPr>
+            <p:cNvPicPr>
+              <a:picLocks noChangeAspect="1"/>
+            </p:cNvPicPr>
+            <p:nvPr/>
+          </p:nvPicPr>
+          <p:blipFill>
+            <a:blip r:embed="rId7"/>
+            <a:stretch>
+              <a:fillRect/>
+            </a:stretch>
+          </p:blipFill>
+          <p:spPr>
+            <a:xfrm>
+              <a:off x="5577325" y="5083984"/>
+              <a:ext cx="1116467" cy="1348187"/>
+            </a:xfrm>
+            <a:prstGeom prst="rect">
+              <a:avLst/>
+            </a:prstGeom>
+          </p:spPr>
+        </p:pic>
+        <p:sp>
+          <p:nvSpPr>
+            <p:cNvPr id="12" name="TextBox 11">
+              <a:extLst>
+                <a:ext uri="{FF2B5EF4-FFF2-40B4-BE49-F238E27FC236}">
+                  <a16:creationId xmlns:a16="http://schemas.microsoft.com/office/drawing/2014/main" id="{078A80C4-DDBE-C04E-9E20-8BF15AFAD39E}"/>
+                </a:ext>
+              </a:extLst>
+            </p:cNvPr>
+            <p:cNvSpPr txBox="1"/>
+            <p:nvPr/>
+          </p:nvSpPr>
+          <p:spPr>
+            <a:xfrm rot="5400000">
+              <a:off x="5067803" y="5693400"/>
+              <a:ext cx="1244565" cy="320298"/>
+            </a:xfrm>
+            <a:prstGeom prst="rect">
+              <a:avLst/>
+            </a:prstGeom>
+            <a:noFill/>
+          </p:spPr>
+          <p:txBody>
+            <a:bodyPr wrap="square" rtlCol="0">
+              <a:spAutoFit/>
+            </a:bodyPr>
+            <a:lstStyle/>
+            <a:p>
+              <a:r>
+                <a:rPr lang="en-US" sz="1050" b="1" dirty="0"/>
+                <a:t>192.168.0.135</a:t>
+              </a:r>
+            </a:p>
+          </p:txBody>
+        </p:sp>
+        <p:sp>
+          <p:nvSpPr>
+            <p:cNvPr id="13" name="TextBox 12">
+              <a:extLst>
+                <a:ext uri="{FF2B5EF4-FFF2-40B4-BE49-F238E27FC236}">
+                  <a16:creationId xmlns:a16="http://schemas.microsoft.com/office/drawing/2014/main" id="{2B6782DF-AE15-837A-E85B-A3A82D69A499}"/>
+                </a:ext>
+              </a:extLst>
+            </p:cNvPr>
+            <p:cNvSpPr txBox="1"/>
+            <p:nvPr/>
+          </p:nvSpPr>
+          <p:spPr>
+            <a:xfrm rot="5400000">
+              <a:off x="6003661" y="6055737"/>
+              <a:ext cx="1118522" cy="291179"/>
+            </a:xfrm>
+            <a:prstGeom prst="rect">
+              <a:avLst/>
+            </a:prstGeom>
+            <a:noFill/>
+          </p:spPr>
+          <p:txBody>
+            <a:bodyPr wrap="square" rtlCol="0">
+              <a:spAutoFit/>
+            </a:bodyPr>
+            <a:lstStyle/>
+            <a:p>
+              <a:r>
+                <a:rPr lang="en-US" sz="900" b="1" dirty="0"/>
+                <a:t>SNO-ACM</a:t>
+              </a:r>
+            </a:p>
+          </p:txBody>
+        </p:sp>
+      </p:grpSp>
+      <p:grpSp>
+        <p:nvGrpSpPr>
+          <p:cNvPr id="2" name="Group 1">
+            <a:extLst>
+              <a:ext uri="{FF2B5EF4-FFF2-40B4-BE49-F238E27FC236}">
+                <a16:creationId xmlns:a16="http://schemas.microsoft.com/office/drawing/2014/main" id="{A64684B4-D443-1539-BAED-7559FF417E91}"/>
+              </a:ext>
+            </a:extLst>
+          </p:cNvPr>
+          <p:cNvGrpSpPr/>
+          <p:nvPr/>
+        </p:nvGrpSpPr>
+        <p:grpSpPr>
+          <a:xfrm>
+            <a:off x="4407274" y="1825270"/>
+            <a:ext cx="3367330" cy="1571481"/>
+            <a:chOff x="2672304" y="752430"/>
+            <a:chExt cx="3814051" cy="1571481"/>
+          </a:xfrm>
+        </p:grpSpPr>
+        <p:pic>
+          <p:nvPicPr>
+            <p:cNvPr id="16" name="Picture 15">
+              <a:extLst>
+                <a:ext uri="{FF2B5EF4-FFF2-40B4-BE49-F238E27FC236}">
+                  <a16:creationId xmlns:a16="http://schemas.microsoft.com/office/drawing/2014/main" id="{8C60ECBF-6390-CF90-6DD4-E33521E9FD42}"/>
+                </a:ext>
+              </a:extLst>
+            </p:cNvPr>
+            <p:cNvPicPr>
+              <a:picLocks noChangeAspect="1"/>
+            </p:cNvPicPr>
+            <p:nvPr/>
+          </p:nvPicPr>
+          <p:blipFill>
+            <a:blip r:embed="rId8"/>
+            <a:stretch>
+              <a:fillRect/>
+            </a:stretch>
+          </p:blipFill>
+          <p:spPr>
+            <a:xfrm>
+              <a:off x="2672304" y="795974"/>
+              <a:ext cx="3797590" cy="1527937"/>
+            </a:xfrm>
+            <a:prstGeom prst="rect">
+              <a:avLst/>
+            </a:prstGeom>
+          </p:spPr>
+        </p:pic>
+        <p:sp>
+          <p:nvSpPr>
+            <p:cNvPr id="17" name="Rectangle: Rounded Corners 16">
+              <a:extLst>
+                <a:ext uri="{FF2B5EF4-FFF2-40B4-BE49-F238E27FC236}">
+                  <a16:creationId xmlns:a16="http://schemas.microsoft.com/office/drawing/2014/main" id="{A7C4BA42-DD53-598A-942D-963AD4E53202}"/>
+                </a:ext>
+              </a:extLst>
+            </p:cNvPr>
+            <p:cNvSpPr/>
+            <p:nvPr/>
+          </p:nvSpPr>
+          <p:spPr>
+            <a:xfrm>
+              <a:off x="2688765" y="752430"/>
+              <a:ext cx="3797590" cy="1527937"/>
+            </a:xfrm>
+            <a:prstGeom prst="roundRect">
+              <a:avLst>
+                <a:gd name="adj" fmla="val 11680"/>
+              </a:avLst>
+            </a:prstGeom>
+            <a:noFill/>
+          </p:spPr>
+          <p:style>
+            <a:lnRef idx="2">
+              <a:schemeClr val="accent1">
+                <a:shade val="15000"/>
+              </a:schemeClr>
+            </a:lnRef>
+            <a:fillRef idx="1">
+              <a:schemeClr val="accent1"/>
+            </a:fillRef>
+            <a:effectRef idx="0">
+              <a:schemeClr val="accent1"/>
+            </a:effectRef>
+            <a:fontRef idx="minor">
+              <a:schemeClr val="lt1"/>
+            </a:fontRef>
+          </p:style>
+          <p:txBody>
+            <a:bodyPr rtlCol="0" anchor="ctr"/>
+            <a:lstStyle/>
+            <a:p>
+              <a:pPr algn="ctr"/>
+              <a:endParaRPr lang="en-US"/>
+            </a:p>
+          </p:txBody>
+        </p:sp>
+      </p:grpSp>
+      <p:cxnSp>
+        <p:nvCxnSpPr>
+          <p:cNvPr id="21" name="Straight Arrow Connector 20">
+            <a:extLst>
+              <a:ext uri="{FF2B5EF4-FFF2-40B4-BE49-F238E27FC236}">
+                <a16:creationId xmlns:a16="http://schemas.microsoft.com/office/drawing/2014/main" id="{F9C36474-CBB3-1836-F95E-DE94B3842A96}"/>
+              </a:ext>
+            </a:extLst>
+          </p:cNvPr>
+          <p:cNvCxnSpPr>
+            <a:cxnSpLocks/>
+          </p:cNvCxnSpPr>
+          <p:nvPr/>
+        </p:nvCxnSpPr>
+        <p:spPr>
+          <a:xfrm>
+            <a:off x="6275784" y="1386298"/>
+            <a:ext cx="1" cy="415910"/>
+          </a:xfrm>
+          <a:prstGeom prst="straightConnector1">
+            <a:avLst/>
+          </a:prstGeom>
+          <a:ln w="28575">
+            <a:solidFill>
+              <a:srgbClr val="0070C0"/>
+            </a:solidFill>
+            <a:tailEnd type="triangle"/>
+          </a:ln>
+        </p:spPr>
+        <p:style>
+          <a:lnRef idx="1">
+            <a:schemeClr val="accent1"/>
+          </a:lnRef>
+          <a:fillRef idx="0">
+            <a:schemeClr val="accent1"/>
+          </a:fillRef>
+          <a:effectRef idx="0">
+            <a:schemeClr val="accent1"/>
+          </a:effectRef>
+          <a:fontRef idx="minor">
+            <a:schemeClr val="tx1"/>
+          </a:fontRef>
+        </p:style>
+      </p:cxnSp>
+      <p:cxnSp>
+        <p:nvCxnSpPr>
+          <p:cNvPr id="24" name="Straight Arrow Connector 23">
+            <a:extLst>
+              <a:ext uri="{FF2B5EF4-FFF2-40B4-BE49-F238E27FC236}">
+                <a16:creationId xmlns:a16="http://schemas.microsoft.com/office/drawing/2014/main" id="{CD7575F7-AC3E-4008-8B69-B4BD43D1822E}"/>
+              </a:ext>
+            </a:extLst>
+          </p:cNvPr>
+          <p:cNvCxnSpPr>
+            <a:cxnSpLocks/>
+            <a:endCxn id="18" idx="6"/>
+          </p:cNvCxnSpPr>
+          <p:nvPr/>
+        </p:nvCxnSpPr>
+        <p:spPr>
+          <a:xfrm flipH="1">
+            <a:off x="6624126" y="964373"/>
+            <a:ext cx="4971102" cy="39197"/>
+          </a:xfrm>
+          <a:prstGeom prst="straightConnector1">
+            <a:avLst/>
+          </a:prstGeom>
+          <a:ln w="28575">
+            <a:solidFill>
+              <a:srgbClr val="0070C0"/>
+            </a:solidFill>
+            <a:tailEnd type="triangle"/>
+          </a:ln>
+        </p:spPr>
+        <p:style>
+          <a:lnRef idx="1">
+            <a:schemeClr val="accent1"/>
+          </a:lnRef>
+          <a:fillRef idx="0">
+            <a:schemeClr val="accent1"/>
+          </a:fillRef>
+          <a:effectRef idx="0">
+            <a:schemeClr val="accent1"/>
+          </a:effectRef>
+          <a:fontRef idx="minor">
+            <a:schemeClr val="tx1"/>
+          </a:fontRef>
+        </p:style>
+      </p:cxnSp>
+      <p:pic>
+        <p:nvPicPr>
+          <p:cNvPr id="1028" name="Picture 4" descr="Sync - Free arrows icons">
+            <a:extLst>
+              <a:ext uri="{FF2B5EF4-FFF2-40B4-BE49-F238E27FC236}">
+                <a16:creationId xmlns:a16="http://schemas.microsoft.com/office/drawing/2014/main" id="{F4B32112-FB6E-EF09-CF49-A361EA139EC0}"/>
+              </a:ext>
+            </a:extLst>
+          </p:cNvPr>
+          <p:cNvPicPr>
+            <a:picLocks noChangeAspect="1" noChangeArrowheads="1"/>
+          </p:cNvPicPr>
+          <p:nvPr/>
+        </p:nvPicPr>
+        <p:blipFill>
+          <a:blip r:embed="rId9">
+            <a:extLst>
+              <a:ext uri="{28A0092B-C50C-407E-A947-70E740481C1C}">
+                <a14:useLocalDpi xmlns:a14="http://schemas.microsoft.com/office/drawing/2010/main" val="0"/>
+              </a:ext>
+            </a:extLst>
+          </a:blip>
+          <a:srcRect/>
+          <a:stretch>
+            <a:fillRect/>
+          </a:stretch>
+        </p:blipFill>
+        <p:spPr bwMode="auto">
+          <a:xfrm>
+            <a:off x="9016084" y="837003"/>
+            <a:ext cx="363991" cy="363991"/>
+          </a:xfrm>
+          <a:prstGeom prst="rect">
+            <a:avLst/>
+          </a:prstGeom>
+          <a:noFill/>
+          <a:extLst>
+            <a:ext uri="{909E8E84-426E-40DD-AFC4-6F175D3DCCD1}">
+              <a14:hiddenFill xmlns:a14="http://schemas.microsoft.com/office/drawing/2010/main">
+                <a:solidFill>
+                  <a:srgbClr val="FFFFFF"/>
+                </a:solidFill>
+              </a14:hiddenFill>
+            </a:ext>
+          </a:extLst>
+        </p:spPr>
+      </p:pic>
+      <p:pic>
+        <p:nvPicPr>
+          <p:cNvPr id="28" name="Picture 36" descr="Makisu, Computer User, system ...">
+            <a:extLst>
+              <a:ext uri="{FF2B5EF4-FFF2-40B4-BE49-F238E27FC236}">
+                <a16:creationId xmlns:a16="http://schemas.microsoft.com/office/drawing/2014/main" id="{E4B77022-D022-1A28-686A-4E02F78B80F2}"/>
+              </a:ext>
+            </a:extLst>
+          </p:cNvPr>
+          <p:cNvPicPr>
+            <a:picLocks noChangeAspect="1" noChangeArrowheads="1"/>
+          </p:cNvPicPr>
+          <p:nvPr/>
+        </p:nvPicPr>
+        <p:blipFill>
+          <a:blip r:embed="rId10">
+            <a:extLst>
+              <a:ext uri="{28A0092B-C50C-407E-A947-70E740481C1C}">
+                <a14:useLocalDpi xmlns:a14="http://schemas.microsoft.com/office/drawing/2010/main" val="0"/>
+              </a:ext>
+            </a:extLst>
+          </a:blip>
+          <a:srcRect/>
+          <a:stretch>
+            <a:fillRect/>
+          </a:stretch>
+        </p:blipFill>
+        <p:spPr bwMode="auto">
+          <a:xfrm flipH="1">
+            <a:off x="11300442" y="597585"/>
+            <a:ext cx="684530" cy="684530"/>
+          </a:xfrm>
+          <a:prstGeom prst="rect">
+            <a:avLst/>
+          </a:prstGeom>
+          <a:noFill/>
+          <a:extLst>
+            <a:ext uri="{909E8E84-426E-40DD-AFC4-6F175D3DCCD1}">
+              <a14:hiddenFill xmlns:a14="http://schemas.microsoft.com/office/drawing/2010/main">
+                <a:solidFill>
+                  <a:srgbClr val="FFFFFF"/>
+                </a:solidFill>
+              </a14:hiddenFill>
+            </a:ext>
+          </a:extLst>
+        </p:spPr>
+      </p:pic>
+      <p:pic>
+        <p:nvPicPr>
+          <p:cNvPr id="22" name="Picture 21">
+            <a:extLst>
+              <a:ext uri="{FF2B5EF4-FFF2-40B4-BE49-F238E27FC236}">
+                <a16:creationId xmlns:a16="http://schemas.microsoft.com/office/drawing/2014/main" id="{7888937F-5CAE-F23B-89F0-513305EDB3E4}"/>
+              </a:ext>
+            </a:extLst>
+          </p:cNvPr>
+          <p:cNvPicPr>
+            <a:picLocks noChangeAspect="1"/>
+          </p:cNvPicPr>
+          <p:nvPr/>
+        </p:nvPicPr>
+        <p:blipFill>
+          <a:blip r:embed="rId11"/>
+          <a:stretch>
+            <a:fillRect/>
+          </a:stretch>
+        </p:blipFill>
+        <p:spPr>
+          <a:xfrm>
+            <a:off x="10064211" y="703802"/>
+            <a:ext cx="640727" cy="589875"/>
+          </a:xfrm>
+          <a:prstGeom prst="rect">
+            <a:avLst/>
+          </a:prstGeom>
+        </p:spPr>
+      </p:pic>
+      <p:cxnSp>
+        <p:nvCxnSpPr>
+          <p:cNvPr id="38" name="Straight Arrow Connector 37">
+            <a:extLst>
+              <a:ext uri="{FF2B5EF4-FFF2-40B4-BE49-F238E27FC236}">
+                <a16:creationId xmlns:a16="http://schemas.microsoft.com/office/drawing/2014/main" id="{4ACB61F4-3774-6957-9AA2-0936C7ED2197}"/>
+              </a:ext>
+            </a:extLst>
+          </p:cNvPr>
+          <p:cNvCxnSpPr>
+            <a:cxnSpLocks/>
+          </p:cNvCxnSpPr>
+          <p:nvPr/>
+        </p:nvCxnSpPr>
+        <p:spPr>
+          <a:xfrm>
+            <a:off x="867042" y="5446429"/>
+            <a:ext cx="419518" cy="404410"/>
+          </a:xfrm>
+          <a:prstGeom prst="straightConnector1">
+            <a:avLst/>
+          </a:prstGeom>
+          <a:ln>
+            <a:solidFill>
+              <a:schemeClr val="accent1"/>
+            </a:solidFill>
+            <a:prstDash val="lgDash"/>
+            <a:headEnd type="triangle"/>
+            <a:tailEnd type="triangle"/>
+          </a:ln>
+        </p:spPr>
+        <p:style>
+          <a:lnRef idx="1">
+            <a:schemeClr val="accent1"/>
+          </a:lnRef>
+          <a:fillRef idx="0">
+            <a:schemeClr val="accent1"/>
+          </a:fillRef>
+          <a:effectRef idx="0">
+            <a:schemeClr val="accent1"/>
+          </a:effectRef>
+          <a:fontRef idx="minor">
+            <a:schemeClr val="tx1"/>
+          </a:fontRef>
+        </p:style>
+      </p:cxnSp>
+      <p:cxnSp>
+        <p:nvCxnSpPr>
+          <p:cNvPr id="39" name="Straight Arrow Connector 38">
+            <a:extLst>
+              <a:ext uri="{FF2B5EF4-FFF2-40B4-BE49-F238E27FC236}">
+                <a16:creationId xmlns:a16="http://schemas.microsoft.com/office/drawing/2014/main" id="{310630B1-2BA6-D5AD-51D0-DA9F747B2322}"/>
+              </a:ext>
+            </a:extLst>
+          </p:cNvPr>
+          <p:cNvCxnSpPr>
+            <a:cxnSpLocks/>
+          </p:cNvCxnSpPr>
+          <p:nvPr/>
+        </p:nvCxnSpPr>
+        <p:spPr>
+          <a:xfrm flipH="1">
+            <a:off x="2159310" y="5466389"/>
+            <a:ext cx="358376" cy="433669"/>
+          </a:xfrm>
+          <a:prstGeom prst="straightConnector1">
+            <a:avLst/>
+          </a:prstGeom>
+          <a:ln>
+            <a:headEnd type="triangle"/>
+            <a:tailEnd type="triangle"/>
+          </a:ln>
+        </p:spPr>
+        <p:style>
+          <a:lnRef idx="1">
+            <a:schemeClr val="accent1"/>
+          </a:lnRef>
+          <a:fillRef idx="0">
+            <a:schemeClr val="accent1"/>
+          </a:fillRef>
+          <a:effectRef idx="0">
+            <a:schemeClr val="accent1"/>
+          </a:effectRef>
+          <a:fontRef idx="minor">
+            <a:schemeClr val="tx1"/>
+          </a:fontRef>
+        </p:style>
+      </p:cxnSp>
+      <p:pic>
+        <p:nvPicPr>
+          <p:cNvPr id="41" name="Picture 8" descr="Internet - Free signs icons">
+            <a:extLst>
+              <a:ext uri="{FF2B5EF4-FFF2-40B4-BE49-F238E27FC236}">
+                <a16:creationId xmlns:a16="http://schemas.microsoft.com/office/drawing/2014/main" id="{26C6FF51-7042-E91E-E210-06CC47A28C21}"/>
+              </a:ext>
+            </a:extLst>
+          </p:cNvPr>
+          <p:cNvPicPr>
+            <a:picLocks noChangeAspect="1" noChangeArrowheads="1"/>
+          </p:cNvPicPr>
+          <p:nvPr/>
+        </p:nvPicPr>
+        <p:blipFill>
+          <a:blip r:embed="rId12">
+            <a:extLst>
+              <a:ext uri="{28A0092B-C50C-407E-A947-70E740481C1C}">
+                <a14:useLocalDpi xmlns:a14="http://schemas.microsoft.com/office/drawing/2010/main" val="0"/>
+              </a:ext>
+            </a:extLst>
+          </a:blip>
+          <a:srcRect/>
+          <a:stretch>
+            <a:fillRect/>
+          </a:stretch>
+        </p:blipFill>
+        <p:spPr bwMode="auto">
+          <a:xfrm flipV="1">
+            <a:off x="2263050" y="5589011"/>
+            <a:ext cx="192876" cy="192876"/>
+          </a:xfrm>
+          <a:prstGeom prst="rect">
+            <a:avLst/>
+          </a:prstGeom>
+          <a:noFill/>
+          <a:extLst>
+            <a:ext uri="{909E8E84-426E-40DD-AFC4-6F175D3DCCD1}">
+              <a14:hiddenFill xmlns:a14="http://schemas.microsoft.com/office/drawing/2010/main">
+                <a:solidFill>
+                  <a:srgbClr val="FFFFFF"/>
+                </a:solidFill>
+              </a14:hiddenFill>
+            </a:ext>
+          </a:extLst>
+        </p:spPr>
+      </p:pic>
+      <p:sp>
+        <p:nvSpPr>
+          <p:cNvPr id="42" name="TextBox 41">
+            <a:extLst>
+              <a:ext uri="{FF2B5EF4-FFF2-40B4-BE49-F238E27FC236}">
+                <a16:creationId xmlns:a16="http://schemas.microsoft.com/office/drawing/2014/main" id="{120CDEBC-A3DC-2A0E-7137-8C39979A568A}"/>
+              </a:ext>
+            </a:extLst>
+          </p:cNvPr>
+          <p:cNvSpPr txBox="1"/>
+          <p:nvPr/>
+        </p:nvSpPr>
+        <p:spPr>
+          <a:xfrm rot="5400000">
+            <a:off x="1959114" y="4967104"/>
+            <a:ext cx="927397" cy="230832"/>
+          </a:xfrm>
+          <a:prstGeom prst="rect">
+            <a:avLst/>
+          </a:prstGeom>
+          <a:noFill/>
+        </p:spPr>
+        <p:txBody>
+          <a:bodyPr wrap="square" rtlCol="0">
+            <a:spAutoFit/>
+          </a:bodyPr>
+          <a:lstStyle/>
+          <a:p>
+            <a:r>
+              <a:rPr lang="en-US" sz="900" b="1" dirty="0"/>
+              <a:t>192.168.0.111</a:t>
+            </a:r>
+          </a:p>
+        </p:txBody>
+      </p:sp>
+      <p:pic>
+        <p:nvPicPr>
+          <p:cNvPr id="44" name="Picture 6" descr="Internet logo Images - Free Download on ...">
+            <a:extLst>
+              <a:ext uri="{FF2B5EF4-FFF2-40B4-BE49-F238E27FC236}">
+                <a16:creationId xmlns:a16="http://schemas.microsoft.com/office/drawing/2014/main" id="{EB8E5D14-1D7E-BA83-8A64-FD3803143E9A}"/>
+              </a:ext>
+            </a:extLst>
+          </p:cNvPr>
+          <p:cNvPicPr>
+            <a:picLocks noChangeAspect="1" noChangeArrowheads="1"/>
+          </p:cNvPicPr>
+          <p:nvPr/>
+        </p:nvPicPr>
+        <p:blipFill>
+          <a:blip r:embed="rId13">
+            <a:extLst>
+              <a:ext uri="{28A0092B-C50C-407E-A947-70E740481C1C}">
+                <a14:useLocalDpi xmlns:a14="http://schemas.microsoft.com/office/drawing/2010/main" val="0"/>
+              </a:ext>
+            </a:extLst>
+          </a:blip>
+          <a:srcRect/>
+          <a:stretch>
+            <a:fillRect/>
+          </a:stretch>
+        </p:blipFill>
+        <p:spPr bwMode="auto">
+          <a:xfrm>
+            <a:off x="1002582" y="5561097"/>
+            <a:ext cx="209507" cy="209507"/>
+          </a:xfrm>
+          <a:prstGeom prst="rect">
+            <a:avLst/>
+          </a:prstGeom>
+          <a:noFill/>
+          <a:extLst>
+            <a:ext uri="{909E8E84-426E-40DD-AFC4-6F175D3DCCD1}">
+              <a14:hiddenFill xmlns:a14="http://schemas.microsoft.com/office/drawing/2010/main">
+                <a:solidFill>
+                  <a:srgbClr val="FFFFFF"/>
+                </a:solidFill>
+              </a14:hiddenFill>
+            </a:ext>
+          </a:extLst>
+        </p:spPr>
+      </p:pic>
+      <p:grpSp>
+        <p:nvGrpSpPr>
+          <p:cNvPr id="52" name="Group 51">
+            <a:extLst>
+              <a:ext uri="{FF2B5EF4-FFF2-40B4-BE49-F238E27FC236}">
+                <a16:creationId xmlns:a16="http://schemas.microsoft.com/office/drawing/2014/main" id="{3D4E336F-ABE9-7EB2-035F-3A350863C11D}"/>
+              </a:ext>
+            </a:extLst>
+          </p:cNvPr>
+          <p:cNvGrpSpPr/>
+          <p:nvPr/>
+        </p:nvGrpSpPr>
+        <p:grpSpPr>
+          <a:xfrm>
+            <a:off x="2379850" y="4474843"/>
+            <a:ext cx="816921" cy="974219"/>
+            <a:chOff x="8219816" y="3483276"/>
+            <a:chExt cx="816921" cy="974219"/>
+          </a:xfrm>
+        </p:grpSpPr>
+        <p:grpSp>
+          <p:nvGrpSpPr>
+            <p:cNvPr id="32" name="Group 31">
+              <a:extLst>
+                <a:ext uri="{FF2B5EF4-FFF2-40B4-BE49-F238E27FC236}">
+                  <a16:creationId xmlns:a16="http://schemas.microsoft.com/office/drawing/2014/main" id="{ED52BC7A-48F0-D34A-29F3-22A7A81BCE16}"/>
+                </a:ext>
+              </a:extLst>
+            </p:cNvPr>
+            <p:cNvGrpSpPr/>
+            <p:nvPr/>
+          </p:nvGrpSpPr>
+          <p:grpSpPr>
+            <a:xfrm>
+              <a:off x="8219816" y="3483276"/>
+              <a:ext cx="816921" cy="974219"/>
+              <a:chOff x="7493898" y="2521679"/>
+              <a:chExt cx="720904" cy="907321"/>
+            </a:xfrm>
+          </p:grpSpPr>
+          <p:pic>
+            <p:nvPicPr>
+              <p:cNvPr id="33" name="Picture 32">
+                <a:extLst>
+                  <a:ext uri="{FF2B5EF4-FFF2-40B4-BE49-F238E27FC236}">
+                    <a16:creationId xmlns:a16="http://schemas.microsoft.com/office/drawing/2014/main" id="{4E6FE833-779D-C11C-272D-054FA9E562CB}"/>
+                  </a:ext>
+                </a:extLst>
+              </p:cNvPr>
+              <p:cNvPicPr>
+                <a:picLocks noChangeAspect="1"/>
+              </p:cNvPicPr>
+              <p:nvPr/>
+            </p:nvPicPr>
+            <p:blipFill>
+              <a:blip r:embed="rId7"/>
+              <a:stretch>
+                <a:fillRect/>
+              </a:stretch>
+            </p:blipFill>
+            <p:spPr>
+              <a:xfrm>
+                <a:off x="7493898" y="2612163"/>
+                <a:ext cx="676443" cy="816837"/>
+              </a:xfrm>
+              <a:prstGeom prst="rect">
+                <a:avLst/>
+              </a:prstGeom>
+            </p:spPr>
+          </p:pic>
+          <p:sp>
+            <p:nvSpPr>
+              <p:cNvPr id="34" name="TextBox 33">
+                <a:extLst>
+                  <a:ext uri="{FF2B5EF4-FFF2-40B4-BE49-F238E27FC236}">
+                    <a16:creationId xmlns:a16="http://schemas.microsoft.com/office/drawing/2014/main" id="{4764E113-2983-BCE0-3AD0-DB8D718F9A82}"/>
+                  </a:ext>
+                </a:extLst>
+              </p:cNvPr>
+              <p:cNvSpPr txBox="1"/>
+              <p:nvPr/>
+            </p:nvSpPr>
+            <p:spPr>
+              <a:xfrm>
+                <a:off x="7538360" y="2521679"/>
+                <a:ext cx="676442" cy="230832"/>
+              </a:xfrm>
+              <a:prstGeom prst="rect">
+                <a:avLst/>
+              </a:prstGeom>
+              <a:noFill/>
+            </p:spPr>
+            <p:txBody>
+              <a:bodyPr wrap="square" rtlCol="0">
+                <a:spAutoFit/>
+              </a:bodyPr>
+              <a:lstStyle/>
+              <a:p>
+                <a:r>
+                  <a:rPr lang="en-US" sz="900" b="1" dirty="0"/>
+                  <a:t>SNO2-ZTP</a:t>
+                </a:r>
+              </a:p>
+            </p:txBody>
+          </p:sp>
+        </p:grpSp>
+        <p:pic>
+          <p:nvPicPr>
+            <p:cNvPr id="48" name="Picture 47">
+              <a:extLst>
+                <a:ext uri="{FF2B5EF4-FFF2-40B4-BE49-F238E27FC236}">
+                  <a16:creationId xmlns:a16="http://schemas.microsoft.com/office/drawing/2014/main" id="{C9CAAF21-16B7-7ACE-2BCA-030A81003C88}"/>
+                </a:ext>
+              </a:extLst>
+            </p:cNvPr>
+            <p:cNvPicPr>
+              <a:picLocks noChangeAspect="1"/>
+            </p:cNvPicPr>
+            <p:nvPr/>
+          </p:nvPicPr>
+          <p:blipFill>
+            <a:blip r:embed="rId14"/>
+            <a:stretch>
+              <a:fillRect/>
+            </a:stretch>
+          </p:blipFill>
+          <p:spPr>
+            <a:xfrm>
+              <a:off x="8389793" y="4175340"/>
+              <a:ext cx="148610" cy="208915"/>
+            </a:xfrm>
+            <a:prstGeom prst="rect">
+              <a:avLst/>
+            </a:prstGeom>
+          </p:spPr>
+        </p:pic>
+      </p:grpSp>
+      <p:grpSp>
+        <p:nvGrpSpPr>
+          <p:cNvPr id="51" name="Group 50">
+            <a:extLst>
+              <a:ext uri="{FF2B5EF4-FFF2-40B4-BE49-F238E27FC236}">
+                <a16:creationId xmlns:a16="http://schemas.microsoft.com/office/drawing/2014/main" id="{7170C1C7-7F32-B57A-3FCB-2189516334CF}"/>
+              </a:ext>
+            </a:extLst>
+          </p:cNvPr>
+          <p:cNvGrpSpPr/>
+          <p:nvPr/>
+        </p:nvGrpSpPr>
+        <p:grpSpPr>
+          <a:xfrm>
+            <a:off x="264258" y="4152400"/>
+            <a:ext cx="1005402" cy="1408697"/>
+            <a:chOff x="10295980" y="3474525"/>
+            <a:chExt cx="1005402" cy="1408697"/>
+          </a:xfrm>
+        </p:grpSpPr>
+        <p:pic>
+          <p:nvPicPr>
+            <p:cNvPr id="31" name="Picture 30">
+              <a:extLst>
+                <a:ext uri="{FF2B5EF4-FFF2-40B4-BE49-F238E27FC236}">
+                  <a16:creationId xmlns:a16="http://schemas.microsoft.com/office/drawing/2014/main" id="{3E7817FB-E624-37D2-4A7F-752E716444AA}"/>
+                </a:ext>
+              </a:extLst>
+            </p:cNvPr>
+            <p:cNvPicPr>
+              <a:picLocks noChangeAspect="1"/>
+            </p:cNvPicPr>
+            <p:nvPr/>
+          </p:nvPicPr>
+          <p:blipFill>
+            <a:blip r:embed="rId15"/>
+            <a:stretch>
+              <a:fillRect/>
+            </a:stretch>
+          </p:blipFill>
+          <p:spPr>
+            <a:xfrm>
+              <a:off x="10420530" y="3776735"/>
+              <a:ext cx="829022" cy="1075266"/>
+            </a:xfrm>
+            <a:prstGeom prst="rect">
+              <a:avLst/>
+            </a:prstGeom>
+          </p:spPr>
+        </p:pic>
+        <p:sp>
+          <p:nvSpPr>
+            <p:cNvPr id="43" name="TextBox 42">
+              <a:extLst>
+                <a:ext uri="{FF2B5EF4-FFF2-40B4-BE49-F238E27FC236}">
+                  <a16:creationId xmlns:a16="http://schemas.microsoft.com/office/drawing/2014/main" id="{F993DB74-DAD4-A841-44FB-46BB4EF85FD8}"/>
+                </a:ext>
+              </a:extLst>
+            </p:cNvPr>
+            <p:cNvSpPr txBox="1"/>
+            <p:nvPr/>
+          </p:nvSpPr>
+          <p:spPr>
+            <a:xfrm rot="5400000">
+              <a:off x="9973679" y="4330089"/>
+              <a:ext cx="875434" cy="230832"/>
+            </a:xfrm>
+            <a:prstGeom prst="rect">
+              <a:avLst/>
+            </a:prstGeom>
+            <a:noFill/>
+          </p:spPr>
+          <p:txBody>
+            <a:bodyPr wrap="square" rtlCol="0">
+              <a:spAutoFit/>
+            </a:bodyPr>
+            <a:lstStyle/>
+            <a:p>
+              <a:r>
+                <a:rPr lang="en-US" sz="900" b="1" dirty="0"/>
+                <a:t>192.168.0.150</a:t>
+              </a:r>
+            </a:p>
+          </p:txBody>
+        </p:sp>
+        <p:sp>
+          <p:nvSpPr>
+            <p:cNvPr id="46" name="TextBox 45">
+              <a:extLst>
+                <a:ext uri="{FF2B5EF4-FFF2-40B4-BE49-F238E27FC236}">
+                  <a16:creationId xmlns:a16="http://schemas.microsoft.com/office/drawing/2014/main" id="{E006FB42-87B7-4300-B12A-495872D006B4}"/>
+                </a:ext>
+              </a:extLst>
+            </p:cNvPr>
+            <p:cNvSpPr txBox="1"/>
+            <p:nvPr/>
+          </p:nvSpPr>
+          <p:spPr>
+            <a:xfrm>
+              <a:off x="10535634" y="3474525"/>
+              <a:ext cx="765748" cy="415498"/>
+            </a:xfrm>
+            <a:prstGeom prst="rect">
+              <a:avLst/>
+            </a:prstGeom>
+            <a:noFill/>
+          </p:spPr>
+          <p:txBody>
+            <a:bodyPr wrap="square" rtlCol="0">
+              <a:spAutoFit/>
+            </a:bodyPr>
+            <a:lstStyle/>
+            <a:p>
+              <a:pPr algn="ctr"/>
+              <a:r>
+                <a:rPr lang="en-US" sz="1050" b="1" dirty="0"/>
+                <a:t>Mirror</a:t>
+              </a:r>
+            </a:p>
+            <a:p>
+              <a:pPr algn="ctr"/>
+              <a:r>
+                <a:rPr lang="en-US" sz="1050" b="1" dirty="0"/>
+                <a:t>Registry</a:t>
+              </a:r>
+            </a:p>
+          </p:txBody>
+        </p:sp>
+        <p:pic>
+          <p:nvPicPr>
+            <p:cNvPr id="49" name="Picture 48">
+              <a:extLst>
+                <a:ext uri="{FF2B5EF4-FFF2-40B4-BE49-F238E27FC236}">
+                  <a16:creationId xmlns:a16="http://schemas.microsoft.com/office/drawing/2014/main" id="{0CFE108F-EE37-70CB-AF5F-AD12CF1B4673}"/>
+                </a:ext>
+              </a:extLst>
+            </p:cNvPr>
+            <p:cNvPicPr>
+              <a:picLocks noChangeAspect="1"/>
+            </p:cNvPicPr>
+            <p:nvPr/>
+          </p:nvPicPr>
+          <p:blipFill>
+            <a:blip r:embed="rId14"/>
+            <a:stretch>
+              <a:fillRect/>
+            </a:stretch>
+          </p:blipFill>
+          <p:spPr>
+            <a:xfrm>
+              <a:off x="10524843" y="4506471"/>
+              <a:ext cx="148610" cy="208915"/>
+            </a:xfrm>
+            <a:prstGeom prst="rect">
+              <a:avLst/>
+            </a:prstGeom>
+          </p:spPr>
+        </p:pic>
+      </p:grpSp>
+      <p:grpSp>
+        <p:nvGrpSpPr>
+          <p:cNvPr id="56" name="Group 55">
+            <a:extLst>
+              <a:ext uri="{FF2B5EF4-FFF2-40B4-BE49-F238E27FC236}">
+                <a16:creationId xmlns:a16="http://schemas.microsoft.com/office/drawing/2014/main" id="{51616E9F-EB38-2EE9-C53E-E59EDC12C8BD}"/>
+              </a:ext>
+            </a:extLst>
+          </p:cNvPr>
+          <p:cNvGrpSpPr/>
+          <p:nvPr/>
+        </p:nvGrpSpPr>
+        <p:grpSpPr>
+          <a:xfrm>
+            <a:off x="9506188" y="5644713"/>
+            <a:ext cx="1588818" cy="1143508"/>
+            <a:chOff x="8183462" y="4652739"/>
+            <a:chExt cx="2138787" cy="1519665"/>
+          </a:xfrm>
+        </p:grpSpPr>
+        <p:pic>
+          <p:nvPicPr>
+            <p:cNvPr id="57" name="Picture 14" descr="ThinkCentre M710 Tiny | 1L Micro ...">
+              <a:extLst>
+                <a:ext uri="{FF2B5EF4-FFF2-40B4-BE49-F238E27FC236}">
+                  <a16:creationId xmlns:a16="http://schemas.microsoft.com/office/drawing/2014/main" id="{4BA11418-88D0-4C41-3917-9EA60B96E8BE}"/>
+                </a:ext>
+              </a:extLst>
+            </p:cNvPr>
+            <p:cNvPicPr>
+              <a:picLocks noChangeAspect="1" noChangeArrowheads="1"/>
+            </p:cNvPicPr>
+            <p:nvPr/>
+          </p:nvPicPr>
+          <p:blipFill>
+            <a:blip r:embed="rId3">
+              <a:extLst>
+                <a:ext uri="{28A0092B-C50C-407E-A947-70E740481C1C}">
+                  <a14:useLocalDpi xmlns:a14="http://schemas.microsoft.com/office/drawing/2010/main" val="0"/>
+                </a:ext>
+              </a:extLst>
+            </a:blip>
+            <a:srcRect/>
+            <a:stretch>
+              <a:fillRect/>
+            </a:stretch>
+          </p:blipFill>
+          <p:spPr bwMode="auto">
+            <a:xfrm>
+              <a:off x="8183462" y="4652739"/>
+              <a:ext cx="2138787" cy="1519665"/>
+            </a:xfrm>
+            <a:prstGeom prst="rect">
+              <a:avLst/>
+            </a:prstGeom>
+            <a:noFill/>
+            <a:extLst>
+              <a:ext uri="{909E8E84-426E-40DD-AFC4-6F175D3DCCD1}">
+                <a14:hiddenFill xmlns:a14="http://schemas.microsoft.com/office/drawing/2010/main">
+                  <a:solidFill>
+                    <a:srgbClr val="FFFFFF"/>
+                  </a:solidFill>
+                </a14:hiddenFill>
+              </a:ext>
+            </a:extLst>
+          </p:spPr>
+        </p:pic>
+        <p:pic>
+          <p:nvPicPr>
+            <p:cNvPr id="58" name="Picture 57">
+              <a:extLst>
+                <a:ext uri="{FF2B5EF4-FFF2-40B4-BE49-F238E27FC236}">
+                  <a16:creationId xmlns:a16="http://schemas.microsoft.com/office/drawing/2014/main" id="{B9F016D5-234E-144A-3A05-9FD4CFE49031}"/>
+                </a:ext>
+              </a:extLst>
+            </p:cNvPr>
+            <p:cNvPicPr>
+              <a:picLocks noChangeAspect="1"/>
+            </p:cNvPicPr>
+            <p:nvPr/>
+          </p:nvPicPr>
+          <p:blipFill>
+            <a:blip r:embed="rId4"/>
+            <a:stretch>
+              <a:fillRect/>
+            </a:stretch>
+          </p:blipFill>
+          <p:spPr>
+            <a:xfrm>
+              <a:off x="9066015" y="5077977"/>
+              <a:ext cx="430438" cy="415335"/>
+            </a:xfrm>
+            <a:prstGeom prst="rect">
+              <a:avLst/>
+            </a:prstGeom>
+          </p:spPr>
+        </p:pic>
+        <p:pic>
+          <p:nvPicPr>
+            <p:cNvPr id="59" name="Picture 58">
+              <a:extLst>
+                <a:ext uri="{FF2B5EF4-FFF2-40B4-BE49-F238E27FC236}">
+                  <a16:creationId xmlns:a16="http://schemas.microsoft.com/office/drawing/2014/main" id="{F0530CD9-9D91-0AB2-F564-48D5EBE378E6}"/>
+                </a:ext>
+              </a:extLst>
+            </p:cNvPr>
+            <p:cNvPicPr>
+              <a:picLocks noChangeAspect="1"/>
+            </p:cNvPicPr>
+            <p:nvPr/>
+          </p:nvPicPr>
+          <p:blipFill>
+            <a:blip r:embed="rId5"/>
+            <a:stretch>
+              <a:fillRect/>
+            </a:stretch>
+          </p:blipFill>
+          <p:spPr>
+            <a:xfrm>
+              <a:off x="9519741" y="5412570"/>
+              <a:ext cx="296767" cy="263793"/>
+            </a:xfrm>
+            <a:prstGeom prst="rect">
+              <a:avLst/>
+            </a:prstGeom>
+          </p:spPr>
+        </p:pic>
+        <p:sp>
+          <p:nvSpPr>
+            <p:cNvPr id="60" name="TextBox 59">
+              <a:extLst>
+                <a:ext uri="{FF2B5EF4-FFF2-40B4-BE49-F238E27FC236}">
+                  <a16:creationId xmlns:a16="http://schemas.microsoft.com/office/drawing/2014/main" id="{404836AB-2DE8-4FC9-F5A2-315BCE125BDF}"/>
+                </a:ext>
+              </a:extLst>
+            </p:cNvPr>
+            <p:cNvSpPr txBox="1"/>
+            <p:nvPr/>
+          </p:nvSpPr>
+          <p:spPr>
+            <a:xfrm>
+              <a:off x="8466543" y="5699389"/>
+              <a:ext cx="1629384" cy="368118"/>
+            </a:xfrm>
+            <a:prstGeom prst="rect">
+              <a:avLst/>
+            </a:prstGeom>
+            <a:noFill/>
+          </p:spPr>
+          <p:txBody>
+            <a:bodyPr wrap="square" rtlCol="0">
+              <a:spAutoFit/>
+            </a:bodyPr>
+            <a:lstStyle/>
+            <a:p>
+              <a:r>
+                <a:rPr lang="en-US" sz="1200" dirty="0"/>
+                <a:t>192.168.0.161</a:t>
+              </a:r>
+            </a:p>
+          </p:txBody>
+        </p:sp>
+      </p:grpSp>
+      <p:cxnSp>
+        <p:nvCxnSpPr>
+          <p:cNvPr id="61" name="Straight Arrow Connector 60">
+            <a:extLst>
+              <a:ext uri="{FF2B5EF4-FFF2-40B4-BE49-F238E27FC236}">
+                <a16:creationId xmlns:a16="http://schemas.microsoft.com/office/drawing/2014/main" id="{99E98963-333D-E2E5-2419-B0E1608F3300}"/>
+              </a:ext>
+            </a:extLst>
+          </p:cNvPr>
+          <p:cNvCxnSpPr>
+            <a:cxnSpLocks/>
+          </p:cNvCxnSpPr>
+          <p:nvPr/>
+        </p:nvCxnSpPr>
+        <p:spPr>
+          <a:xfrm>
+            <a:off x="9399437" y="5507184"/>
+            <a:ext cx="419518" cy="404410"/>
+          </a:xfrm>
+          <a:prstGeom prst="straightConnector1">
+            <a:avLst/>
+          </a:prstGeom>
+          <a:ln>
+            <a:solidFill>
+              <a:schemeClr val="accent1"/>
+            </a:solidFill>
+            <a:prstDash val="solid"/>
+            <a:headEnd type="triangle"/>
+            <a:tailEnd type="triangle"/>
+          </a:ln>
+        </p:spPr>
+        <p:style>
+          <a:lnRef idx="1">
+            <a:schemeClr val="accent1"/>
+          </a:lnRef>
+          <a:fillRef idx="0">
+            <a:schemeClr val="accent1"/>
+          </a:fillRef>
+          <a:effectRef idx="0">
+            <a:schemeClr val="accent1"/>
+          </a:effectRef>
+          <a:fontRef idx="minor">
+            <a:schemeClr val="tx1"/>
+          </a:fontRef>
+        </p:style>
+      </p:cxnSp>
+      <p:cxnSp>
+        <p:nvCxnSpPr>
+          <p:cNvPr id="62" name="Straight Arrow Connector 61">
+            <a:extLst>
+              <a:ext uri="{FF2B5EF4-FFF2-40B4-BE49-F238E27FC236}">
+                <a16:creationId xmlns:a16="http://schemas.microsoft.com/office/drawing/2014/main" id="{04AD4A05-AF1E-0918-DFA4-3E65DBD911CE}"/>
+              </a:ext>
+            </a:extLst>
+          </p:cNvPr>
+          <p:cNvCxnSpPr>
+            <a:cxnSpLocks/>
+          </p:cNvCxnSpPr>
+          <p:nvPr/>
+        </p:nvCxnSpPr>
+        <p:spPr>
+          <a:xfrm flipH="1">
+            <a:off x="10778793" y="5527144"/>
+            <a:ext cx="358376" cy="433669"/>
+          </a:xfrm>
+          <a:prstGeom prst="straightConnector1">
+            <a:avLst/>
+          </a:prstGeom>
+          <a:ln>
+            <a:prstDash val="dash"/>
+            <a:headEnd type="triangle"/>
+            <a:tailEnd type="triangle"/>
+          </a:ln>
+        </p:spPr>
+        <p:style>
+          <a:lnRef idx="1">
+            <a:schemeClr val="accent1"/>
+          </a:lnRef>
+          <a:fillRef idx="0">
+            <a:schemeClr val="accent1"/>
+          </a:fillRef>
+          <a:effectRef idx="0">
+            <a:schemeClr val="accent1"/>
+          </a:effectRef>
+          <a:fontRef idx="minor">
+            <a:schemeClr val="tx1"/>
+          </a:fontRef>
+        </p:style>
+      </p:cxnSp>
+      <p:pic>
+        <p:nvPicPr>
+          <p:cNvPr id="63" name="Picture 8" descr="Internet - Free signs icons">
+            <a:extLst>
+              <a:ext uri="{FF2B5EF4-FFF2-40B4-BE49-F238E27FC236}">
+                <a16:creationId xmlns:a16="http://schemas.microsoft.com/office/drawing/2014/main" id="{CB6D2A7A-140C-63FC-8DB5-ECB07F0A597F}"/>
+              </a:ext>
+            </a:extLst>
+          </p:cNvPr>
+          <p:cNvPicPr>
+            <a:picLocks noChangeAspect="1" noChangeArrowheads="1"/>
+          </p:cNvPicPr>
+          <p:nvPr/>
+        </p:nvPicPr>
+        <p:blipFill>
+          <a:blip r:embed="rId12">
+            <a:extLst>
+              <a:ext uri="{28A0092B-C50C-407E-A947-70E740481C1C}">
+                <a14:useLocalDpi xmlns:a14="http://schemas.microsoft.com/office/drawing/2010/main" val="0"/>
+              </a:ext>
+            </a:extLst>
+          </a:blip>
+          <a:srcRect/>
+          <a:stretch>
+            <a:fillRect/>
+          </a:stretch>
+        </p:blipFill>
+        <p:spPr bwMode="auto">
+          <a:xfrm flipV="1">
+            <a:off x="9533113" y="5630417"/>
+            <a:ext cx="192876" cy="192876"/>
+          </a:xfrm>
+          <a:prstGeom prst="rect">
+            <a:avLst/>
+          </a:prstGeom>
+          <a:noFill/>
+          <a:extLst>
+            <a:ext uri="{909E8E84-426E-40DD-AFC4-6F175D3DCCD1}">
+              <a14:hiddenFill xmlns:a14="http://schemas.microsoft.com/office/drawing/2010/main">
+                <a:solidFill>
+                  <a:srgbClr val="FFFFFF"/>
+                </a:solidFill>
+              </a14:hiddenFill>
+            </a:ext>
+          </a:extLst>
+        </p:spPr>
+      </p:pic>
+      <p:pic>
+        <p:nvPicPr>
+          <p:cNvPr id="1025" name="Picture 6" descr="Internet logo Images - Free Download on ...">
+            <a:extLst>
+              <a:ext uri="{FF2B5EF4-FFF2-40B4-BE49-F238E27FC236}">
+                <a16:creationId xmlns:a16="http://schemas.microsoft.com/office/drawing/2014/main" id="{440B565D-93AD-CAC1-F9D4-9139E32C6011}"/>
+              </a:ext>
+            </a:extLst>
+          </p:cNvPr>
+          <p:cNvPicPr>
+            <a:picLocks noChangeAspect="1" noChangeArrowheads="1"/>
+          </p:cNvPicPr>
+          <p:nvPr/>
+        </p:nvPicPr>
+        <p:blipFill>
+          <a:blip r:embed="rId13">
+            <a:extLst>
+              <a:ext uri="{28A0092B-C50C-407E-A947-70E740481C1C}">
+                <a14:useLocalDpi xmlns:a14="http://schemas.microsoft.com/office/drawing/2010/main" val="0"/>
+              </a:ext>
+            </a:extLst>
+          </a:blip>
+          <a:srcRect/>
+          <a:stretch>
+            <a:fillRect/>
+          </a:stretch>
+        </p:blipFill>
+        <p:spPr bwMode="auto">
+          <a:xfrm>
+            <a:off x="10843990" y="5665850"/>
+            <a:ext cx="209507" cy="209507"/>
+          </a:xfrm>
+          <a:prstGeom prst="rect">
+            <a:avLst/>
+          </a:prstGeom>
+          <a:noFill/>
+          <a:extLst>
+            <a:ext uri="{909E8E84-426E-40DD-AFC4-6F175D3DCCD1}">
+              <a14:hiddenFill xmlns:a14="http://schemas.microsoft.com/office/drawing/2010/main">
+                <a:solidFill>
+                  <a:srgbClr val="FFFFFF"/>
+                </a:solidFill>
+              </a14:hiddenFill>
+            </a:ext>
+          </a:extLst>
+        </p:spPr>
+      </p:pic>
+      <p:grpSp>
+        <p:nvGrpSpPr>
+          <p:cNvPr id="1039" name="Group 1038">
+            <a:extLst>
+              <a:ext uri="{FF2B5EF4-FFF2-40B4-BE49-F238E27FC236}">
+                <a16:creationId xmlns:a16="http://schemas.microsoft.com/office/drawing/2014/main" id="{05076AE6-8F21-90A5-4223-4C587848415B}"/>
+              </a:ext>
+            </a:extLst>
+          </p:cNvPr>
+          <p:cNvGrpSpPr/>
+          <p:nvPr/>
+        </p:nvGrpSpPr>
+        <p:grpSpPr>
+          <a:xfrm>
+            <a:off x="8679173" y="4567898"/>
+            <a:ext cx="889374" cy="1082261"/>
+            <a:chOff x="10926880" y="4535598"/>
+            <a:chExt cx="889374" cy="1082261"/>
+          </a:xfrm>
+        </p:grpSpPr>
+        <p:sp>
+          <p:nvSpPr>
+            <p:cNvPr id="1024" name="TextBox 1023">
+              <a:extLst>
+                <a:ext uri="{FF2B5EF4-FFF2-40B4-BE49-F238E27FC236}">
+                  <a16:creationId xmlns:a16="http://schemas.microsoft.com/office/drawing/2014/main" id="{9150057B-2B0B-CD5F-2D34-45D6D6535151}"/>
+                </a:ext>
+              </a:extLst>
+            </p:cNvPr>
+            <p:cNvSpPr txBox="1"/>
+            <p:nvPr/>
+          </p:nvSpPr>
+          <p:spPr>
+            <a:xfrm rot="5400000">
+              <a:off x="10578597" y="5038745"/>
+              <a:ext cx="927397" cy="230832"/>
+            </a:xfrm>
+            <a:prstGeom prst="rect">
+              <a:avLst/>
+            </a:prstGeom>
+            <a:noFill/>
+          </p:spPr>
+          <p:txBody>
+            <a:bodyPr wrap="square" rtlCol="0">
+              <a:spAutoFit/>
+            </a:bodyPr>
+            <a:lstStyle/>
+            <a:p>
+              <a:r>
+                <a:rPr lang="en-US" sz="900" b="1" dirty="0"/>
+                <a:t>192.168.0.110</a:t>
+              </a:r>
+            </a:p>
+          </p:txBody>
+        </p:sp>
+        <p:pic>
+          <p:nvPicPr>
+            <p:cNvPr id="1031" name="Picture 1030">
+              <a:extLst>
+                <a:ext uri="{FF2B5EF4-FFF2-40B4-BE49-F238E27FC236}">
+                  <a16:creationId xmlns:a16="http://schemas.microsoft.com/office/drawing/2014/main" id="{81D12108-BC35-B289-2841-0DA9680F8875}"/>
+                </a:ext>
+              </a:extLst>
+            </p:cNvPr>
+            <p:cNvPicPr>
+              <a:picLocks noChangeAspect="1"/>
+            </p:cNvPicPr>
+            <p:nvPr/>
+          </p:nvPicPr>
+          <p:blipFill>
+            <a:blip r:embed="rId7"/>
+            <a:stretch>
+              <a:fillRect/>
+            </a:stretch>
+          </p:blipFill>
+          <p:spPr>
+            <a:xfrm>
+              <a:off x="10999333" y="4632752"/>
+              <a:ext cx="766538" cy="877064"/>
+            </a:xfrm>
+            <a:prstGeom prst="rect">
+              <a:avLst/>
+            </a:prstGeom>
+          </p:spPr>
+        </p:pic>
+        <p:sp>
+          <p:nvSpPr>
+            <p:cNvPr id="1032" name="TextBox 1031">
+              <a:extLst>
+                <a:ext uri="{FF2B5EF4-FFF2-40B4-BE49-F238E27FC236}">
+                  <a16:creationId xmlns:a16="http://schemas.microsoft.com/office/drawing/2014/main" id="{1AB3157D-D9ED-64D2-EA73-C4CE01A14DA3}"/>
+                </a:ext>
+              </a:extLst>
+            </p:cNvPr>
+            <p:cNvSpPr txBox="1"/>
+            <p:nvPr/>
+          </p:nvSpPr>
+          <p:spPr>
+            <a:xfrm>
+              <a:off x="11049717" y="4535598"/>
+              <a:ext cx="766537" cy="230832"/>
+            </a:xfrm>
+            <a:prstGeom prst="rect">
+              <a:avLst/>
+            </a:prstGeom>
+            <a:noFill/>
+          </p:spPr>
+          <p:txBody>
+            <a:bodyPr wrap="square" rtlCol="0">
+              <a:spAutoFit/>
+            </a:bodyPr>
+            <a:lstStyle/>
+            <a:p>
+              <a:r>
+                <a:rPr lang="en-US" sz="900" b="1" dirty="0"/>
+                <a:t>SNO-ZTP</a:t>
+              </a:r>
+            </a:p>
+          </p:txBody>
+        </p:sp>
+        <p:pic>
+          <p:nvPicPr>
+            <p:cNvPr id="1030" name="Picture 1029">
+              <a:extLst>
+                <a:ext uri="{FF2B5EF4-FFF2-40B4-BE49-F238E27FC236}">
+                  <a16:creationId xmlns:a16="http://schemas.microsoft.com/office/drawing/2014/main" id="{825AD19F-FE86-2C0D-0971-0415DE74B20F}"/>
+                </a:ext>
+              </a:extLst>
+            </p:cNvPr>
+            <p:cNvPicPr>
+              <a:picLocks noChangeAspect="1"/>
+            </p:cNvPicPr>
+            <p:nvPr/>
+          </p:nvPicPr>
+          <p:blipFill>
+            <a:blip r:embed="rId14"/>
+            <a:stretch>
+              <a:fillRect/>
+            </a:stretch>
+          </p:blipFill>
+          <p:spPr>
+            <a:xfrm>
+              <a:off x="11169310" y="5227662"/>
+              <a:ext cx="148610" cy="208915"/>
+            </a:xfrm>
+            <a:prstGeom prst="rect">
+              <a:avLst/>
+            </a:prstGeom>
+          </p:spPr>
+        </p:pic>
+      </p:grpSp>
+      <p:grpSp>
+        <p:nvGrpSpPr>
+          <p:cNvPr id="1033" name="Group 1032">
+            <a:extLst>
+              <a:ext uri="{FF2B5EF4-FFF2-40B4-BE49-F238E27FC236}">
+                <a16:creationId xmlns:a16="http://schemas.microsoft.com/office/drawing/2014/main" id="{54706418-1E85-B25A-5167-9CC7954C05F2}"/>
+              </a:ext>
+            </a:extLst>
+          </p:cNvPr>
+          <p:cNvGrpSpPr/>
+          <p:nvPr/>
+        </p:nvGrpSpPr>
+        <p:grpSpPr>
+          <a:xfrm>
+            <a:off x="10931705" y="4246174"/>
+            <a:ext cx="1005402" cy="1408697"/>
+            <a:chOff x="10295980" y="3474525"/>
+            <a:chExt cx="1005402" cy="1408697"/>
+          </a:xfrm>
+        </p:grpSpPr>
+        <p:pic>
+          <p:nvPicPr>
+            <p:cNvPr id="1034" name="Picture 1033">
+              <a:extLst>
+                <a:ext uri="{FF2B5EF4-FFF2-40B4-BE49-F238E27FC236}">
+                  <a16:creationId xmlns:a16="http://schemas.microsoft.com/office/drawing/2014/main" id="{25359188-C7DA-CE80-0289-9A25CFB23FD4}"/>
+                </a:ext>
+              </a:extLst>
+            </p:cNvPr>
+            <p:cNvPicPr>
+              <a:picLocks noChangeAspect="1"/>
+            </p:cNvPicPr>
+            <p:nvPr/>
+          </p:nvPicPr>
+          <p:blipFill>
+            <a:blip r:embed="rId15"/>
+            <a:stretch>
+              <a:fillRect/>
+            </a:stretch>
+          </p:blipFill>
+          <p:spPr>
+            <a:xfrm>
+              <a:off x="10420530" y="3776735"/>
+              <a:ext cx="829022" cy="1075266"/>
+            </a:xfrm>
+            <a:prstGeom prst="rect">
+              <a:avLst/>
+            </a:prstGeom>
+          </p:spPr>
+        </p:pic>
+        <p:sp>
+          <p:nvSpPr>
+            <p:cNvPr id="1035" name="TextBox 1034">
+              <a:extLst>
+                <a:ext uri="{FF2B5EF4-FFF2-40B4-BE49-F238E27FC236}">
+                  <a16:creationId xmlns:a16="http://schemas.microsoft.com/office/drawing/2014/main" id="{905E544D-36B5-E28E-6376-7E585C4C931B}"/>
+                </a:ext>
+              </a:extLst>
+            </p:cNvPr>
+            <p:cNvSpPr txBox="1"/>
+            <p:nvPr/>
+          </p:nvSpPr>
+          <p:spPr>
+            <a:xfrm rot="5400000">
+              <a:off x="9973679" y="4330089"/>
+              <a:ext cx="875434" cy="230832"/>
+            </a:xfrm>
+            <a:prstGeom prst="rect">
+              <a:avLst/>
+            </a:prstGeom>
+            <a:noFill/>
+          </p:spPr>
+          <p:txBody>
+            <a:bodyPr wrap="square" rtlCol="0">
+              <a:spAutoFit/>
+            </a:bodyPr>
+            <a:lstStyle/>
+            <a:p>
+              <a:r>
+                <a:rPr lang="en-US" sz="900" b="1" dirty="0"/>
+                <a:t>192.168.0.149</a:t>
+              </a:r>
+            </a:p>
+          </p:txBody>
+        </p:sp>
+        <p:sp>
+          <p:nvSpPr>
+            <p:cNvPr id="1037" name="TextBox 1036">
+              <a:extLst>
+                <a:ext uri="{FF2B5EF4-FFF2-40B4-BE49-F238E27FC236}">
+                  <a16:creationId xmlns:a16="http://schemas.microsoft.com/office/drawing/2014/main" id="{AD4F71DB-69D5-E874-6619-8BCCD724338F}"/>
+                </a:ext>
+              </a:extLst>
+            </p:cNvPr>
+            <p:cNvSpPr txBox="1"/>
+            <p:nvPr/>
+          </p:nvSpPr>
+          <p:spPr>
+            <a:xfrm>
+              <a:off x="10535634" y="3474525"/>
+              <a:ext cx="765748" cy="415498"/>
+            </a:xfrm>
+            <a:prstGeom prst="rect">
+              <a:avLst/>
+            </a:prstGeom>
+            <a:noFill/>
+          </p:spPr>
+          <p:txBody>
+            <a:bodyPr wrap="square" rtlCol="0">
+              <a:spAutoFit/>
+            </a:bodyPr>
+            <a:lstStyle/>
+            <a:p>
+              <a:pPr algn="ctr"/>
+              <a:r>
+                <a:rPr lang="en-US" sz="1050" b="1" dirty="0"/>
+                <a:t>Mirror</a:t>
+              </a:r>
+            </a:p>
+            <a:p>
+              <a:pPr algn="ctr"/>
+              <a:r>
+                <a:rPr lang="en-US" sz="1050" b="1" dirty="0"/>
+                <a:t>Registry2</a:t>
+              </a:r>
+            </a:p>
+          </p:txBody>
+        </p:sp>
+        <p:pic>
+          <p:nvPicPr>
+            <p:cNvPr id="1038" name="Picture 1037">
+              <a:extLst>
+                <a:ext uri="{FF2B5EF4-FFF2-40B4-BE49-F238E27FC236}">
+                  <a16:creationId xmlns:a16="http://schemas.microsoft.com/office/drawing/2014/main" id="{72BDFF9A-27B9-0E97-18BD-928174C3CF37}"/>
+                </a:ext>
+              </a:extLst>
+            </p:cNvPr>
+            <p:cNvPicPr>
+              <a:picLocks noChangeAspect="1"/>
+            </p:cNvPicPr>
+            <p:nvPr/>
+          </p:nvPicPr>
+          <p:blipFill>
+            <a:blip r:embed="rId14"/>
+            <a:stretch>
+              <a:fillRect/>
+            </a:stretch>
+          </p:blipFill>
+          <p:spPr>
+            <a:xfrm>
+              <a:off x="10524843" y="4506471"/>
+              <a:ext cx="148610" cy="208915"/>
+            </a:xfrm>
+            <a:prstGeom prst="rect">
+              <a:avLst/>
+            </a:prstGeom>
+          </p:spPr>
+        </p:pic>
+      </p:grpSp>
+      <p:cxnSp>
+        <p:nvCxnSpPr>
+          <p:cNvPr id="1042" name="Straight Arrow Connector 1041">
+            <a:extLst>
+              <a:ext uri="{FF2B5EF4-FFF2-40B4-BE49-F238E27FC236}">
+                <a16:creationId xmlns:a16="http://schemas.microsoft.com/office/drawing/2014/main" id="{BADAA52E-ADBF-3C72-58DA-33EE5F8C91F4}"/>
+              </a:ext>
+            </a:extLst>
+          </p:cNvPr>
+          <p:cNvCxnSpPr>
+            <a:cxnSpLocks/>
+          </p:cNvCxnSpPr>
+          <p:nvPr/>
+        </p:nvCxnSpPr>
+        <p:spPr>
+          <a:xfrm>
+            <a:off x="6100644" y="3353207"/>
+            <a:ext cx="2649536" cy="1361638"/>
+          </a:xfrm>
+          <a:prstGeom prst="straightConnector1">
+            <a:avLst/>
+          </a:prstGeom>
+          <a:ln w="28575">
+            <a:solidFill>
+              <a:srgbClr val="0070C0"/>
+            </a:solidFill>
+            <a:tailEnd type="triangle"/>
+          </a:ln>
+        </p:spPr>
+        <p:style>
+          <a:lnRef idx="1">
+            <a:schemeClr val="accent1"/>
+          </a:lnRef>
+          <a:fillRef idx="0">
+            <a:schemeClr val="accent1"/>
+          </a:fillRef>
+          <a:effectRef idx="0">
+            <a:schemeClr val="accent1"/>
+          </a:effectRef>
+          <a:fontRef idx="minor">
+            <a:schemeClr val="tx1"/>
+          </a:fontRef>
+        </p:style>
+      </p:cxnSp>
+      <p:cxnSp>
+        <p:nvCxnSpPr>
+          <p:cNvPr id="29" name="Straight Arrow Connector 28">
+            <a:extLst>
+              <a:ext uri="{FF2B5EF4-FFF2-40B4-BE49-F238E27FC236}">
+                <a16:creationId xmlns:a16="http://schemas.microsoft.com/office/drawing/2014/main" id="{B9B06043-3CA1-83D9-DF53-C2975430D622}"/>
+              </a:ext>
+            </a:extLst>
+          </p:cNvPr>
+          <p:cNvCxnSpPr>
+            <a:cxnSpLocks/>
+            <a:endCxn id="34" idx="3"/>
+          </p:cNvCxnSpPr>
+          <p:nvPr/>
+        </p:nvCxnSpPr>
+        <p:spPr>
+          <a:xfrm flipH="1">
+            <a:off x="3196771" y="3361124"/>
+            <a:ext cx="2929065" cy="1237645"/>
+          </a:xfrm>
+          <a:prstGeom prst="straightConnector1">
+            <a:avLst/>
+          </a:prstGeom>
+          <a:ln w="28575">
+            <a:solidFill>
+              <a:srgbClr val="0070C0"/>
+            </a:solidFill>
+            <a:tailEnd type="triangle"/>
+          </a:ln>
+        </p:spPr>
+        <p:style>
+          <a:lnRef idx="1">
+            <a:schemeClr val="accent1"/>
+          </a:lnRef>
+          <a:fillRef idx="0">
+            <a:schemeClr val="accent1"/>
+          </a:fillRef>
+          <a:effectRef idx="0">
+            <a:schemeClr val="accent1"/>
+          </a:effectRef>
+          <a:fontRef idx="minor">
+            <a:schemeClr val="tx1"/>
+          </a:fontRef>
+        </p:style>
+      </p:cxnSp>
+      <p:cxnSp>
+        <p:nvCxnSpPr>
+          <p:cNvPr id="1045" name="Connector: Elbow 1044">
+            <a:extLst>
+              <a:ext uri="{FF2B5EF4-FFF2-40B4-BE49-F238E27FC236}">
+                <a16:creationId xmlns:a16="http://schemas.microsoft.com/office/drawing/2014/main" id="{03D79EE0-9E3D-55A9-0E81-BE6EC274D91F}"/>
+              </a:ext>
+            </a:extLst>
+          </p:cNvPr>
+          <p:cNvCxnSpPr>
+            <a:cxnSpLocks/>
+          </p:cNvCxnSpPr>
+          <p:nvPr/>
+        </p:nvCxnSpPr>
+        <p:spPr>
+          <a:xfrm rot="5400000" flipH="1" flipV="1">
+            <a:off x="-246357" y="1821532"/>
+            <a:ext cx="3808544" cy="1939252"/>
+          </a:xfrm>
+          <a:prstGeom prst="bentConnector2">
+            <a:avLst/>
+          </a:prstGeom>
+          <a:ln w="19050">
+            <a:solidFill>
+              <a:srgbClr val="FF0000"/>
+            </a:solidFill>
+            <a:prstDash val="dashDot"/>
+            <a:tailEnd type="triangle"/>
+          </a:ln>
+        </p:spPr>
+        <p:style>
+          <a:lnRef idx="1">
+            <a:schemeClr val="accent1"/>
+          </a:lnRef>
+          <a:fillRef idx="0">
+            <a:schemeClr val="accent1"/>
+          </a:fillRef>
+          <a:effectRef idx="0">
+            <a:schemeClr val="accent1"/>
+          </a:effectRef>
+          <a:fontRef idx="minor">
+            <a:schemeClr val="tx1"/>
+          </a:fontRef>
+        </p:style>
+      </p:cxnSp>
+      <p:cxnSp>
+        <p:nvCxnSpPr>
+          <p:cNvPr id="1046" name="Connector: Elbow 1045">
+            <a:extLst>
+              <a:ext uri="{FF2B5EF4-FFF2-40B4-BE49-F238E27FC236}">
+                <a16:creationId xmlns:a16="http://schemas.microsoft.com/office/drawing/2014/main" id="{35BC50CD-6308-8E00-6204-A8D5DBBC9B9F}"/>
+              </a:ext>
+            </a:extLst>
+          </p:cNvPr>
+          <p:cNvCxnSpPr>
+            <a:cxnSpLocks/>
+            <a:endCxn id="1031" idx="2"/>
+          </p:cNvCxnSpPr>
+          <p:nvPr/>
+        </p:nvCxnSpPr>
+        <p:spPr>
+          <a:xfrm>
+            <a:off x="667355" y="5423464"/>
+            <a:ext cx="8467540" cy="118652"/>
+          </a:xfrm>
+          <a:prstGeom prst="bentConnector4">
+            <a:avLst>
+              <a:gd name="adj1" fmla="val 299"/>
+              <a:gd name="adj2" fmla="val 1063321"/>
+            </a:avLst>
+          </a:prstGeom>
+          <a:ln w="19050">
+            <a:solidFill>
+              <a:srgbClr val="FF0000"/>
+            </a:solidFill>
+            <a:prstDash val="dashDot"/>
+            <a:tailEnd type="triangle"/>
+          </a:ln>
+        </p:spPr>
+        <p:style>
+          <a:lnRef idx="1">
+            <a:schemeClr val="accent1"/>
+          </a:lnRef>
+          <a:fillRef idx="0">
+            <a:schemeClr val="accent1"/>
+          </a:fillRef>
+          <a:effectRef idx="0">
+            <a:schemeClr val="accent1"/>
+          </a:effectRef>
+          <a:fontRef idx="minor">
+            <a:schemeClr val="tx1"/>
+          </a:fontRef>
+        </p:style>
+      </p:cxnSp>
+      <p:pic>
+        <p:nvPicPr>
+          <p:cNvPr id="1052" name="Picture 32" descr="Web server icon. colored outline icon ...">
+            <a:extLst>
+              <a:ext uri="{FF2B5EF4-FFF2-40B4-BE49-F238E27FC236}">
+                <a16:creationId xmlns:a16="http://schemas.microsoft.com/office/drawing/2014/main" id="{89268E5F-DD7A-AC8F-38CD-CF185C2A71BA}"/>
+              </a:ext>
+            </a:extLst>
+          </p:cNvPr>
+          <p:cNvPicPr>
+            <a:picLocks noChangeAspect="1" noChangeArrowheads="1"/>
+          </p:cNvPicPr>
+          <p:nvPr/>
+        </p:nvPicPr>
+        <p:blipFill>
+          <a:blip r:embed="rId16">
+            <a:extLst>
+              <a:ext uri="{28A0092B-C50C-407E-A947-70E740481C1C}">
+                <a14:useLocalDpi xmlns:a14="http://schemas.microsoft.com/office/drawing/2010/main" val="0"/>
+              </a:ext>
+            </a:extLst>
+          </a:blip>
+          <a:srcRect/>
+          <a:stretch>
+            <a:fillRect/>
+          </a:stretch>
+        </p:blipFill>
+        <p:spPr bwMode="auto">
+          <a:xfrm>
+            <a:off x="313956" y="4545916"/>
+            <a:ext cx="379911" cy="252814"/>
+          </a:xfrm>
+          <a:prstGeom prst="rect">
+            <a:avLst/>
+          </a:prstGeom>
+          <a:noFill/>
+          <a:extLst>
+            <a:ext uri="{909E8E84-426E-40DD-AFC4-6F175D3DCCD1}">
+              <a14:hiddenFill xmlns:a14="http://schemas.microsoft.com/office/drawing/2010/main">
+                <a:solidFill>
+                  <a:srgbClr val="FFFFFF"/>
+                </a:solidFill>
+              </a14:hiddenFill>
+            </a:ext>
+          </a:extLst>
+        </p:spPr>
+      </p:pic>
+      <p:pic>
+        <p:nvPicPr>
+          <p:cNvPr id="1053" name="Picture 32" descr="Web server icon. colored outline icon ...">
+            <a:extLst>
+              <a:ext uri="{FF2B5EF4-FFF2-40B4-BE49-F238E27FC236}">
+                <a16:creationId xmlns:a16="http://schemas.microsoft.com/office/drawing/2014/main" id="{3F0093E3-93E9-F095-247A-A9C0B24274EA}"/>
+              </a:ext>
+            </a:extLst>
+          </p:cNvPr>
+          <p:cNvPicPr>
+            <a:picLocks noChangeAspect="1" noChangeArrowheads="1"/>
+          </p:cNvPicPr>
+          <p:nvPr/>
+        </p:nvPicPr>
+        <p:blipFill>
+          <a:blip r:embed="rId16">
+            <a:extLst>
+              <a:ext uri="{28A0092B-C50C-407E-A947-70E740481C1C}">
+                <a14:useLocalDpi xmlns:a14="http://schemas.microsoft.com/office/drawing/2010/main" val="0"/>
+              </a:ext>
+            </a:extLst>
+          </a:blip>
+          <a:srcRect/>
+          <a:stretch>
+            <a:fillRect/>
+          </a:stretch>
+        </p:blipFill>
+        <p:spPr bwMode="auto">
+          <a:xfrm>
+            <a:off x="10982088" y="4598769"/>
+            <a:ext cx="379911" cy="252814"/>
+          </a:xfrm>
+          <a:prstGeom prst="rect">
+            <a:avLst/>
+          </a:prstGeom>
+          <a:noFill/>
+          <a:extLst>
+            <a:ext uri="{909E8E84-426E-40DD-AFC4-6F175D3DCCD1}">
+              <a14:hiddenFill xmlns:a14="http://schemas.microsoft.com/office/drawing/2010/main">
+                <a:solidFill>
+                  <a:srgbClr val="FFFFFF"/>
+                </a:solidFill>
+              </a14:hiddenFill>
+            </a:ext>
+          </a:extLst>
+        </p:spPr>
+      </p:pic>
+      <p:grpSp>
+        <p:nvGrpSpPr>
+          <p:cNvPr id="1085" name="Group 1084">
+            <a:extLst>
+              <a:ext uri="{FF2B5EF4-FFF2-40B4-BE49-F238E27FC236}">
+                <a16:creationId xmlns:a16="http://schemas.microsoft.com/office/drawing/2014/main" id="{6F43F47B-EA06-0171-BDE0-3B85E9791AEF}"/>
+              </a:ext>
+            </a:extLst>
+          </p:cNvPr>
+          <p:cNvGrpSpPr/>
+          <p:nvPr/>
+        </p:nvGrpSpPr>
+        <p:grpSpPr>
+          <a:xfrm>
+            <a:off x="3356580" y="5763742"/>
+            <a:ext cx="970230" cy="743597"/>
+            <a:chOff x="3356580" y="5861716"/>
+            <a:chExt cx="970230" cy="743597"/>
+          </a:xfrm>
+        </p:grpSpPr>
+        <p:sp>
+          <p:nvSpPr>
+            <p:cNvPr id="1064" name="Oval 1063">
+              <a:extLst>
+                <a:ext uri="{FF2B5EF4-FFF2-40B4-BE49-F238E27FC236}">
+                  <a16:creationId xmlns:a16="http://schemas.microsoft.com/office/drawing/2014/main" id="{CD937F85-ACD5-6399-F078-3CFF4201898A}"/>
+                </a:ext>
+              </a:extLst>
+            </p:cNvPr>
+            <p:cNvSpPr/>
+            <p:nvPr/>
+          </p:nvSpPr>
+          <p:spPr>
+            <a:xfrm>
+              <a:off x="3419330" y="6013329"/>
+              <a:ext cx="772029" cy="427552"/>
+            </a:xfrm>
+            <a:prstGeom prst="ellipse">
+              <a:avLst/>
+            </a:prstGeom>
+            <a:solidFill>
+              <a:schemeClr val="bg1"/>
+            </a:solidFill>
+          </p:spPr>
+          <p:style>
+            <a:lnRef idx="1">
+              <a:schemeClr val="accent1"/>
+            </a:lnRef>
+            <a:fillRef idx="2">
+              <a:schemeClr val="accent1"/>
+            </a:fillRef>
+            <a:effectRef idx="1">
+              <a:schemeClr val="accent1"/>
+            </a:effectRef>
+            <a:fontRef idx="minor">
+              <a:schemeClr val="dk1"/>
+            </a:fontRef>
+          </p:style>
+          <p:txBody>
+            <a:bodyPr rtlCol="0" anchor="ctr"/>
+            <a:lstStyle/>
+            <a:p>
+              <a:pPr algn="ctr"/>
+              <a:endParaRPr lang="en-US" sz="1600" b="1" dirty="0"/>
+            </a:p>
+          </p:txBody>
+        </p:sp>
+        <p:pic>
+          <p:nvPicPr>
+            <p:cNvPr id="1065" name="Picture 26" descr="Docker full logo transparent PNG - StickPNG">
+              <a:extLst>
+                <a:ext uri="{FF2B5EF4-FFF2-40B4-BE49-F238E27FC236}">
+                  <a16:creationId xmlns:a16="http://schemas.microsoft.com/office/drawing/2014/main" id="{A15105F3-2671-CF97-BEF7-96A3F3333603}"/>
+                </a:ext>
+              </a:extLst>
+            </p:cNvPr>
+            <p:cNvPicPr>
+              <a:picLocks noChangeAspect="1" noChangeArrowheads="1"/>
+            </p:cNvPicPr>
+            <p:nvPr/>
+          </p:nvPicPr>
+          <p:blipFill>
+            <a:blip r:embed="rId17">
+              <a:extLst>
+                <a:ext uri="{28A0092B-C50C-407E-A947-70E740481C1C}">
+                  <a14:useLocalDpi xmlns:a14="http://schemas.microsoft.com/office/drawing/2010/main" val="0"/>
+                </a:ext>
+              </a:extLst>
+            </a:blip>
+            <a:srcRect/>
+            <a:stretch>
+              <a:fillRect/>
+            </a:stretch>
+          </p:blipFill>
+          <p:spPr bwMode="auto">
+            <a:xfrm>
+              <a:off x="3671401" y="6067537"/>
+              <a:ext cx="296717" cy="345808"/>
+            </a:xfrm>
+            <a:prstGeom prst="rect">
+              <a:avLst/>
+            </a:prstGeom>
+            <a:noFill/>
+            <a:extLst>
+              <a:ext uri="{909E8E84-426E-40DD-AFC4-6F175D3DCCD1}">
+                <a14:hiddenFill xmlns:a14="http://schemas.microsoft.com/office/drawing/2010/main">
+                  <a:solidFill>
+                    <a:srgbClr val="FFFFFF"/>
+                  </a:solidFill>
+                </a14:hiddenFill>
+              </a:ext>
+            </a:extLst>
+          </p:spPr>
+        </p:pic>
+        <p:sp>
+          <p:nvSpPr>
+            <p:cNvPr id="1066" name="TextBox 1065">
+              <a:extLst>
+                <a:ext uri="{FF2B5EF4-FFF2-40B4-BE49-F238E27FC236}">
+                  <a16:creationId xmlns:a16="http://schemas.microsoft.com/office/drawing/2014/main" id="{2BB56356-D596-EA25-7BFE-B07AFE4BB3AE}"/>
+                </a:ext>
+              </a:extLst>
+            </p:cNvPr>
+            <p:cNvSpPr txBox="1"/>
+            <p:nvPr/>
+          </p:nvSpPr>
+          <p:spPr>
+            <a:xfrm rot="2080869">
+              <a:off x="3900358" y="6117399"/>
+              <a:ext cx="370481" cy="215444"/>
+            </a:xfrm>
+            <a:prstGeom prst="rect">
+              <a:avLst/>
+            </a:prstGeom>
+            <a:noFill/>
+          </p:spPr>
+          <p:txBody>
+            <a:bodyPr wrap="square" rtlCol="0">
+              <a:spAutoFit/>
+            </a:bodyPr>
+            <a:lstStyle/>
+            <a:p>
+              <a:r>
+                <a:rPr lang="en-US" sz="800" b="1" dirty="0"/>
+                <a:t>Tool</a:t>
+              </a:r>
+            </a:p>
+          </p:txBody>
+        </p:sp>
+        <p:sp>
+          <p:nvSpPr>
+            <p:cNvPr id="1067" name="TextBox 1066">
+              <a:extLst>
+                <a:ext uri="{FF2B5EF4-FFF2-40B4-BE49-F238E27FC236}">
+                  <a16:creationId xmlns:a16="http://schemas.microsoft.com/office/drawing/2014/main" id="{21C408B9-5C2F-B1A4-4EB8-8BE8A0517888}"/>
+                </a:ext>
+              </a:extLst>
+            </p:cNvPr>
+            <p:cNvSpPr txBox="1"/>
+            <p:nvPr/>
+          </p:nvSpPr>
+          <p:spPr>
+            <a:xfrm rot="19537392">
+              <a:off x="3356580" y="6086223"/>
+              <a:ext cx="454571" cy="215444"/>
+            </a:xfrm>
+            <a:prstGeom prst="rect">
+              <a:avLst/>
+            </a:prstGeom>
+            <a:noFill/>
+          </p:spPr>
+          <p:txBody>
+            <a:bodyPr wrap="square" rtlCol="0">
+              <a:spAutoFit/>
+            </a:bodyPr>
+            <a:lstStyle/>
+            <a:p>
+              <a:r>
+                <a:rPr lang="en-US" sz="800" b="1" dirty="0"/>
+                <a:t>Sushy</a:t>
+              </a:r>
+            </a:p>
+          </p:txBody>
+        </p:sp>
+        <p:sp>
+          <p:nvSpPr>
+            <p:cNvPr id="1068" name="TextBox 1067">
+              <a:extLst>
+                <a:ext uri="{FF2B5EF4-FFF2-40B4-BE49-F238E27FC236}">
+                  <a16:creationId xmlns:a16="http://schemas.microsoft.com/office/drawing/2014/main" id="{69D7CBA9-279A-A00D-28D7-E4C78458F2F0}"/>
+                </a:ext>
+              </a:extLst>
+            </p:cNvPr>
+            <p:cNvSpPr txBox="1"/>
+            <p:nvPr/>
+          </p:nvSpPr>
+          <p:spPr>
+            <a:xfrm>
+              <a:off x="3372433" y="6405258"/>
+              <a:ext cx="954377" cy="200055"/>
+            </a:xfrm>
+            <a:prstGeom prst="rect">
+              <a:avLst/>
+            </a:prstGeom>
+            <a:noFill/>
+          </p:spPr>
+          <p:txBody>
+            <a:bodyPr wrap="square" rtlCol="0">
+              <a:spAutoFit/>
+            </a:bodyPr>
+            <a:lstStyle/>
+            <a:p>
+              <a:r>
+                <a:rPr lang="en-US" sz="700" b="1" dirty="0"/>
+                <a:t>Virtual Redfish BMC</a:t>
+              </a:r>
+            </a:p>
+          </p:txBody>
+        </p:sp>
+        <p:sp>
+          <p:nvSpPr>
+            <p:cNvPr id="1069" name="TextBox 1068">
+              <a:extLst>
+                <a:ext uri="{FF2B5EF4-FFF2-40B4-BE49-F238E27FC236}">
+                  <a16:creationId xmlns:a16="http://schemas.microsoft.com/office/drawing/2014/main" id="{B3C6B850-33AD-477C-3B77-23C650456488}"/>
+                </a:ext>
+              </a:extLst>
+            </p:cNvPr>
+            <p:cNvSpPr txBox="1"/>
+            <p:nvPr/>
+          </p:nvSpPr>
+          <p:spPr>
+            <a:xfrm>
+              <a:off x="3645842" y="5861716"/>
+              <a:ext cx="354917" cy="184666"/>
+            </a:xfrm>
+            <a:prstGeom prst="rect">
+              <a:avLst/>
+            </a:prstGeom>
+            <a:noFill/>
+          </p:spPr>
+          <p:txBody>
+            <a:bodyPr wrap="square" rtlCol="0">
+              <a:spAutoFit/>
+            </a:bodyPr>
+            <a:lstStyle/>
+            <a:p>
+              <a:r>
+                <a:rPr lang="en-US" sz="600" b="1" dirty="0"/>
+                <a:t>8000</a:t>
+              </a:r>
+            </a:p>
+          </p:txBody>
+        </p:sp>
+      </p:grpSp>
+      <p:cxnSp>
+        <p:nvCxnSpPr>
+          <p:cNvPr id="1080" name="Connector: Elbow 1079">
+            <a:extLst>
+              <a:ext uri="{FF2B5EF4-FFF2-40B4-BE49-F238E27FC236}">
+                <a16:creationId xmlns:a16="http://schemas.microsoft.com/office/drawing/2014/main" id="{9BF08487-5F1B-FAC6-3D68-0AF3378B6A17}"/>
+              </a:ext>
+            </a:extLst>
+          </p:cNvPr>
+          <p:cNvCxnSpPr>
+            <a:cxnSpLocks/>
+          </p:cNvCxnSpPr>
+          <p:nvPr/>
+        </p:nvCxnSpPr>
+        <p:spPr>
+          <a:xfrm>
+            <a:off x="2776516" y="5422956"/>
+            <a:ext cx="8467540" cy="118652"/>
+          </a:xfrm>
+          <a:prstGeom prst="bentConnector4">
+            <a:avLst>
+              <a:gd name="adj1" fmla="val 299"/>
+              <a:gd name="adj2" fmla="val 1063321"/>
+            </a:avLst>
+          </a:prstGeom>
+          <a:ln w="19050">
+            <a:solidFill>
+              <a:srgbClr val="FF0000"/>
+            </a:solidFill>
+            <a:prstDash val="dashDot"/>
+            <a:tailEnd type="triangle"/>
+          </a:ln>
+        </p:spPr>
+        <p:style>
+          <a:lnRef idx="1">
+            <a:schemeClr val="accent1"/>
+          </a:lnRef>
+          <a:fillRef idx="0">
+            <a:schemeClr val="accent1"/>
+          </a:fillRef>
+          <a:effectRef idx="0">
+            <a:schemeClr val="accent1"/>
+          </a:effectRef>
+          <a:fontRef idx="minor">
+            <a:schemeClr val="tx1"/>
+          </a:fontRef>
+        </p:style>
+      </p:cxnSp>
+      <p:pic>
+        <p:nvPicPr>
+          <p:cNvPr id="1082" name="Picture 1081">
+            <a:extLst>
+              <a:ext uri="{FF2B5EF4-FFF2-40B4-BE49-F238E27FC236}">
+                <a16:creationId xmlns:a16="http://schemas.microsoft.com/office/drawing/2014/main" id="{0BCCB43F-9F51-2E3B-9C91-C5C46996461D}"/>
+              </a:ext>
+            </a:extLst>
+          </p:cNvPr>
+          <p:cNvPicPr>
+            <a:picLocks noChangeAspect="1"/>
+          </p:cNvPicPr>
+          <p:nvPr/>
+        </p:nvPicPr>
+        <p:blipFill>
+          <a:blip r:embed="rId18"/>
+          <a:stretch>
+            <a:fillRect/>
+          </a:stretch>
+        </p:blipFill>
+        <p:spPr>
+          <a:xfrm>
+            <a:off x="7774604" y="814179"/>
+            <a:ext cx="468299" cy="321382"/>
+          </a:xfrm>
+          <a:prstGeom prst="rect">
+            <a:avLst/>
+          </a:prstGeom>
+        </p:spPr>
+      </p:pic>
+      <p:pic>
+        <p:nvPicPr>
+          <p:cNvPr id="1083" name="Picture 1082">
+            <a:extLst>
+              <a:ext uri="{FF2B5EF4-FFF2-40B4-BE49-F238E27FC236}">
+                <a16:creationId xmlns:a16="http://schemas.microsoft.com/office/drawing/2014/main" id="{8F4B9937-53FF-211B-8F33-1B4E6C341D13}"/>
+              </a:ext>
+            </a:extLst>
+          </p:cNvPr>
+          <p:cNvPicPr>
+            <a:picLocks noChangeAspect="1"/>
+          </p:cNvPicPr>
+          <p:nvPr/>
+        </p:nvPicPr>
+        <p:blipFill>
+          <a:blip r:embed="rId14"/>
+          <a:stretch>
+            <a:fillRect/>
+          </a:stretch>
+        </p:blipFill>
+        <p:spPr>
+          <a:xfrm>
+            <a:off x="2820740" y="888262"/>
+            <a:ext cx="148610" cy="208915"/>
+          </a:xfrm>
+          <a:prstGeom prst="rect">
+            <a:avLst/>
+          </a:prstGeom>
+        </p:spPr>
+      </p:pic>
+      <p:grpSp>
+        <p:nvGrpSpPr>
+          <p:cNvPr id="1086" name="Group 1085">
+            <a:extLst>
+              <a:ext uri="{FF2B5EF4-FFF2-40B4-BE49-F238E27FC236}">
+                <a16:creationId xmlns:a16="http://schemas.microsoft.com/office/drawing/2014/main" id="{20272011-A34A-58BE-0E28-FAC989F305E9}"/>
+              </a:ext>
+            </a:extLst>
+          </p:cNvPr>
+          <p:cNvGrpSpPr/>
+          <p:nvPr/>
+        </p:nvGrpSpPr>
+        <p:grpSpPr>
+          <a:xfrm>
+            <a:off x="7731459" y="5776284"/>
+            <a:ext cx="970230" cy="743597"/>
+            <a:chOff x="3356580" y="5861716"/>
+            <a:chExt cx="970230" cy="743597"/>
+          </a:xfrm>
+        </p:grpSpPr>
+        <p:sp>
+          <p:nvSpPr>
+            <p:cNvPr id="1087" name="Oval 1086">
+              <a:extLst>
+                <a:ext uri="{FF2B5EF4-FFF2-40B4-BE49-F238E27FC236}">
+                  <a16:creationId xmlns:a16="http://schemas.microsoft.com/office/drawing/2014/main" id="{34B10FC2-1FA8-19C6-44C9-1A8EFD7800FC}"/>
+                </a:ext>
+              </a:extLst>
+            </p:cNvPr>
+            <p:cNvSpPr/>
+            <p:nvPr/>
+          </p:nvSpPr>
+          <p:spPr>
+            <a:xfrm>
+              <a:off x="3419330" y="6013329"/>
+              <a:ext cx="772029" cy="427552"/>
+            </a:xfrm>
+            <a:prstGeom prst="ellipse">
+              <a:avLst/>
+            </a:prstGeom>
+            <a:solidFill>
+              <a:schemeClr val="bg1"/>
+            </a:solidFill>
+          </p:spPr>
+          <p:style>
+            <a:lnRef idx="1">
+              <a:schemeClr val="accent1"/>
+            </a:lnRef>
+            <a:fillRef idx="2">
+              <a:schemeClr val="accent1"/>
+            </a:fillRef>
+            <a:effectRef idx="1">
+              <a:schemeClr val="accent1"/>
+            </a:effectRef>
+            <a:fontRef idx="minor">
+              <a:schemeClr val="dk1"/>
+            </a:fontRef>
+          </p:style>
+          <p:txBody>
+            <a:bodyPr rtlCol="0" anchor="ctr"/>
+            <a:lstStyle/>
+            <a:p>
+              <a:pPr algn="ctr"/>
+              <a:endParaRPr lang="en-US" sz="1600" b="1" dirty="0"/>
+            </a:p>
+          </p:txBody>
+        </p:sp>
+        <p:pic>
+          <p:nvPicPr>
+            <p:cNvPr id="1088" name="Picture 26" descr="Docker full logo transparent PNG - StickPNG">
+              <a:extLst>
+                <a:ext uri="{FF2B5EF4-FFF2-40B4-BE49-F238E27FC236}">
+                  <a16:creationId xmlns:a16="http://schemas.microsoft.com/office/drawing/2014/main" id="{1BD1CD42-2868-622C-7E88-FF663DDCAC1E}"/>
+                </a:ext>
+              </a:extLst>
+            </p:cNvPr>
+            <p:cNvPicPr>
+              <a:picLocks noChangeAspect="1" noChangeArrowheads="1"/>
+            </p:cNvPicPr>
+            <p:nvPr/>
+          </p:nvPicPr>
+          <p:blipFill>
+            <a:blip r:embed="rId17">
+              <a:extLst>
+                <a:ext uri="{28A0092B-C50C-407E-A947-70E740481C1C}">
+                  <a14:useLocalDpi xmlns:a14="http://schemas.microsoft.com/office/drawing/2010/main" val="0"/>
+                </a:ext>
+              </a:extLst>
+            </a:blip>
+            <a:srcRect/>
+            <a:stretch>
+              <a:fillRect/>
+            </a:stretch>
+          </p:blipFill>
+          <p:spPr bwMode="auto">
+            <a:xfrm>
+              <a:off x="3671401" y="6067537"/>
+              <a:ext cx="296717" cy="345808"/>
+            </a:xfrm>
+            <a:prstGeom prst="rect">
+              <a:avLst/>
+            </a:prstGeom>
+            <a:noFill/>
+            <a:extLst>
+              <a:ext uri="{909E8E84-426E-40DD-AFC4-6F175D3DCCD1}">
+                <a14:hiddenFill xmlns:a14="http://schemas.microsoft.com/office/drawing/2010/main">
+                  <a:solidFill>
+                    <a:srgbClr val="FFFFFF"/>
+                  </a:solidFill>
+                </a14:hiddenFill>
+              </a:ext>
+            </a:extLst>
+          </p:spPr>
+        </p:pic>
+        <p:sp>
+          <p:nvSpPr>
+            <p:cNvPr id="1089" name="TextBox 1088">
+              <a:extLst>
+                <a:ext uri="{FF2B5EF4-FFF2-40B4-BE49-F238E27FC236}">
+                  <a16:creationId xmlns:a16="http://schemas.microsoft.com/office/drawing/2014/main" id="{27545C55-AE6F-FA66-9E9F-A7827645E200}"/>
+                </a:ext>
+              </a:extLst>
+            </p:cNvPr>
+            <p:cNvSpPr txBox="1"/>
+            <p:nvPr/>
+          </p:nvSpPr>
+          <p:spPr>
+            <a:xfrm rot="2080869">
+              <a:off x="3900358" y="6117399"/>
+              <a:ext cx="370481" cy="215444"/>
+            </a:xfrm>
+            <a:prstGeom prst="rect">
+              <a:avLst/>
+            </a:prstGeom>
+            <a:noFill/>
+          </p:spPr>
+          <p:txBody>
+            <a:bodyPr wrap="square" rtlCol="0">
+              <a:spAutoFit/>
+            </a:bodyPr>
+            <a:lstStyle/>
+            <a:p>
+              <a:r>
+                <a:rPr lang="en-US" sz="800" b="1" dirty="0"/>
+                <a:t>Tool</a:t>
+              </a:r>
+            </a:p>
+          </p:txBody>
+        </p:sp>
+        <p:sp>
+          <p:nvSpPr>
+            <p:cNvPr id="1090" name="TextBox 1089">
+              <a:extLst>
+                <a:ext uri="{FF2B5EF4-FFF2-40B4-BE49-F238E27FC236}">
+                  <a16:creationId xmlns:a16="http://schemas.microsoft.com/office/drawing/2014/main" id="{5EC99E49-9F1E-062B-4496-6E126FE65EDB}"/>
+                </a:ext>
+              </a:extLst>
+            </p:cNvPr>
+            <p:cNvSpPr txBox="1"/>
+            <p:nvPr/>
+          </p:nvSpPr>
+          <p:spPr>
+            <a:xfrm rot="19537392">
+              <a:off x="3356580" y="6086223"/>
+              <a:ext cx="454571" cy="215444"/>
+            </a:xfrm>
+            <a:prstGeom prst="rect">
+              <a:avLst/>
+            </a:prstGeom>
+            <a:noFill/>
+          </p:spPr>
+          <p:txBody>
+            <a:bodyPr wrap="square" rtlCol="0">
+              <a:spAutoFit/>
+            </a:bodyPr>
+            <a:lstStyle/>
+            <a:p>
+              <a:r>
+                <a:rPr lang="en-US" sz="800" b="1" dirty="0"/>
+                <a:t>Sushy</a:t>
+              </a:r>
+            </a:p>
+          </p:txBody>
+        </p:sp>
+        <p:sp>
+          <p:nvSpPr>
+            <p:cNvPr id="1091" name="TextBox 1090">
+              <a:extLst>
+                <a:ext uri="{FF2B5EF4-FFF2-40B4-BE49-F238E27FC236}">
+                  <a16:creationId xmlns:a16="http://schemas.microsoft.com/office/drawing/2014/main" id="{C6FA0782-9D9F-3C14-97DC-2C3E32C79F81}"/>
+                </a:ext>
+              </a:extLst>
+            </p:cNvPr>
+            <p:cNvSpPr txBox="1"/>
+            <p:nvPr/>
+          </p:nvSpPr>
+          <p:spPr>
+            <a:xfrm>
+              <a:off x="3372433" y="6405258"/>
+              <a:ext cx="954377" cy="200055"/>
+            </a:xfrm>
+            <a:prstGeom prst="rect">
+              <a:avLst/>
+            </a:prstGeom>
+            <a:noFill/>
+          </p:spPr>
+          <p:txBody>
+            <a:bodyPr wrap="square" rtlCol="0">
+              <a:spAutoFit/>
+            </a:bodyPr>
+            <a:lstStyle/>
+            <a:p>
+              <a:r>
+                <a:rPr lang="en-US" sz="700" b="1" dirty="0"/>
+                <a:t>Virtual Redfish BMC</a:t>
+              </a:r>
+            </a:p>
+          </p:txBody>
+        </p:sp>
+        <p:sp>
+          <p:nvSpPr>
+            <p:cNvPr id="1092" name="TextBox 1091">
+              <a:extLst>
+                <a:ext uri="{FF2B5EF4-FFF2-40B4-BE49-F238E27FC236}">
+                  <a16:creationId xmlns:a16="http://schemas.microsoft.com/office/drawing/2014/main" id="{5B5614BC-E28D-C922-6EE4-DB4D43605EB0}"/>
+                </a:ext>
+              </a:extLst>
+            </p:cNvPr>
+            <p:cNvSpPr txBox="1"/>
+            <p:nvPr/>
+          </p:nvSpPr>
+          <p:spPr>
+            <a:xfrm>
+              <a:off x="3645842" y="5861716"/>
+              <a:ext cx="354917" cy="184666"/>
+            </a:xfrm>
+            <a:prstGeom prst="rect">
+              <a:avLst/>
+            </a:prstGeom>
+            <a:noFill/>
+          </p:spPr>
+          <p:txBody>
+            <a:bodyPr wrap="square" rtlCol="0">
+              <a:spAutoFit/>
+            </a:bodyPr>
+            <a:lstStyle/>
+            <a:p>
+              <a:r>
+                <a:rPr lang="en-US" sz="600" b="1" dirty="0"/>
+                <a:t>8000</a:t>
+              </a:r>
+            </a:p>
+          </p:txBody>
+        </p:sp>
+      </p:grpSp>
+    </p:spTree>
+    <p:extLst>
+      <p:ext uri="{BB962C8B-B14F-4D97-AF65-F5344CB8AC3E}">
+        <p14:creationId xmlns:p14="http://schemas.microsoft.com/office/powerpoint/2010/main" val="2965300541"/>
+      </p:ext>
+    </p:extLst>
+  </p:cSld>
+  <p:clrMapOvr>
+    <a:masterClrMapping/>
+  </p:clrMapOvr>
+</p:sld>
+</file>
+
+<file path=ppt/slides/slide3.xml><?xml version="1.0" encoding="utf-8"?>
 <p:sld xmlns:a="http://schemas.openxmlformats.org/drawingml/2006/main" xmlns:r="http://schemas.openxmlformats.org/officeDocument/2006/relationships" xmlns:p="http://schemas.openxmlformats.org/presentationml/2006/main">
   <p:cSld>
     <p:spTree>
@@ -7461,8 +11776,8 @@
         </p:nvSpPr>
         <p:spPr>
           <a:xfrm>
-            <a:off x="5604106" y="148324"/>
-            <a:ext cx="1664768" cy="400110"/>
+            <a:off x="4080679" y="148324"/>
+            <a:ext cx="4736749" cy="400110"/>
           </a:xfrm>
           <a:prstGeom prst="rect">
             <a:avLst/>
@@ -7477,7 +11792,15 @@
           <a:p>
             <a:r>
               <a:rPr lang="en-US" sz="2000" b="1" dirty="0"/>
-              <a:t>ZTP Workflow</a:t>
+              <a:t>ZTP (</a:t>
+            </a:r>
+            <a:r>
+              <a:rPr lang="en-US" sz="2000" dirty="0"/>
+              <a:t>Zero Touch Provisioning</a:t>
+            </a:r>
+            <a:r>
+              <a:rPr lang="en-US" sz="2000" b="1" dirty="0"/>
+              <a:t>) Workflow</a:t>
             </a:r>
           </a:p>
         </p:txBody>
@@ -9099,6 +13422,42 @@
           </a:fontRef>
         </p:style>
       </p:cxnSp>
+      <p:sp>
+        <p:nvSpPr>
+          <p:cNvPr id="2" name="TextBox 1">
+            <a:extLst>
+              <a:ext uri="{FF2B5EF4-FFF2-40B4-BE49-F238E27FC236}">
+                <a16:creationId xmlns:a16="http://schemas.microsoft.com/office/drawing/2014/main" id="{0ECAAE63-E528-BF2C-B98E-A923D4CA60AA}"/>
+              </a:ext>
+            </a:extLst>
+          </p:cNvPr>
+          <p:cNvSpPr txBox="1"/>
+          <p:nvPr/>
+        </p:nvSpPr>
+        <p:spPr>
+          <a:xfrm>
+            <a:off x="4844143" y="2620258"/>
+            <a:ext cx="912242" cy="307777"/>
+          </a:xfrm>
+          <a:prstGeom prst="rect">
+            <a:avLst/>
+          </a:prstGeom>
+          <a:noFill/>
+        </p:spPr>
+        <p:txBody>
+          <a:bodyPr wrap="square" rtlCol="0">
+            <a:spAutoFit/>
+          </a:bodyPr>
+          <a:lstStyle/>
+          <a:p>
+            <a:pPr algn="ctr"/>
+            <a:r>
+              <a:rPr lang="en-US" sz="1400" b="1" dirty="0"/>
+              <a:t>SYNC</a:t>
+            </a:r>
+          </a:p>
+        </p:txBody>
+      </p:sp>
     </p:spTree>
     <p:extLst>
       <p:ext uri="{BB962C8B-B14F-4D97-AF65-F5344CB8AC3E}">
@@ -9390,60 +13749,15 @@
                                   </p:childTnLst>
                                 </p:cTn>
                               </p:par>
-                            </p:childTnLst>
-                          </p:cTn>
-                        </p:par>
-                      </p:childTnLst>
-                    </p:cTn>
-                  </p:par>
-                  <p:par>
-                    <p:cTn id="26" fill="hold">
-                      <p:stCondLst>
-                        <p:cond delay="indefinite"/>
-                      </p:stCondLst>
-                      <p:childTnLst>
-                        <p:par>
-                          <p:cTn id="27" fill="hold">
-                            <p:stCondLst>
-                              <p:cond delay="0"/>
-                            </p:stCondLst>
-                            <p:childTnLst>
                               <p:par>
-                                <p:cTn id="28" presetID="1" presetClass="entr" presetSubtype="0" fill="hold" nodeType="clickEffect">
+                                <p:cTn id="26" presetID="1" presetClass="exit" presetSubtype="0" fill="hold" grpId="1" nodeType="withEffect">
                                   <p:stCondLst>
                                     <p:cond delay="500"/>
                                   </p:stCondLst>
                                   <p:childTnLst>
                                     <p:set>
                                       <p:cBhvr>
-                                        <p:cTn id="29" dur="1" fill="hold">
-                                          <p:stCondLst>
-                                            <p:cond delay="0"/>
-                                          </p:stCondLst>
-                                        </p:cTn>
-                                        <p:tgtEl>
-                                          <p:spTgt spid="1061"/>
-                                        </p:tgtEl>
-                                        <p:attrNameLst>
-                                          <p:attrName>style.visibility</p:attrName>
-                                        </p:attrNameLst>
-                                      </p:cBhvr>
-                                      <p:to>
-                                        <p:strVal val="visible"/>
-                                      </p:to>
-                                    </p:set>
-                                  </p:childTnLst>
-                                </p:cTn>
-                              </p:par>
-                              <p:par>
-                                <p:cTn id="30" presetID="1" presetClass="exit" presetSubtype="0" fill="hold" grpId="1" nodeType="withEffect">
-                                  <p:stCondLst>
-                                    <p:cond delay="500"/>
-                                  </p:stCondLst>
-                                  <p:childTnLst>
-                                    <p:set>
-                                      <p:cBhvr>
-                                        <p:cTn id="31" dur="1" fill="hold">
+                                        <p:cTn id="27" dur="1" fill="hold">
                                           <p:stCondLst>
                                             <p:cond delay="0"/>
                                           </p:stCondLst>
@@ -9463,14 +13777,14 @@
                                 </p:cTn>
                               </p:par>
                               <p:par>
-                                <p:cTn id="32" presetID="1" presetClass="exit" presetSubtype="0" fill="hold" nodeType="withEffect">
+                                <p:cTn id="28" presetID="1" presetClass="exit" presetSubtype="0" fill="hold" nodeType="withEffect">
                                   <p:stCondLst>
                                     <p:cond delay="500"/>
                                   </p:stCondLst>
                                   <p:childTnLst>
                                     <p:set>
                                       <p:cBhvr>
-                                        <p:cTn id="33" dur="1" fill="hold">
+                                        <p:cTn id="29" dur="1" fill="hold">
                                           <p:stCondLst>
                                             <p:cond delay="0"/>
                                           </p:stCondLst>
@@ -9484,6 +13798,51 @@
                                       </p:cBhvr>
                                       <p:to>
                                         <p:strVal val="hidden"/>
+                                      </p:to>
+                                    </p:set>
+                                  </p:childTnLst>
+                                </p:cTn>
+                              </p:par>
+                            </p:childTnLst>
+                          </p:cTn>
+                        </p:par>
+                      </p:childTnLst>
+                    </p:cTn>
+                  </p:par>
+                  <p:par>
+                    <p:cTn id="30" fill="hold">
+                      <p:stCondLst>
+                        <p:cond delay="indefinite"/>
+                      </p:stCondLst>
+                      <p:childTnLst>
+                        <p:par>
+                          <p:cTn id="31" fill="hold">
+                            <p:stCondLst>
+                              <p:cond delay="0"/>
+                            </p:stCondLst>
+                            <p:childTnLst>
+                              <p:par>
+                                <p:cTn id="32" presetID="1" presetClass="entr" presetSubtype="0" fill="hold" nodeType="clickEffect">
+                                  <p:stCondLst>
+                                    <p:cond delay="500"/>
+                                  </p:stCondLst>
+                                  <p:childTnLst>
+                                    <p:set>
+                                      <p:cBhvr>
+                                        <p:cTn id="33" dur="1" fill="hold">
+                                          <p:stCondLst>
+                                            <p:cond delay="0"/>
+                                          </p:stCondLst>
+                                        </p:cTn>
+                                        <p:tgtEl>
+                                          <p:spTgt spid="1061"/>
+                                        </p:tgtEl>
+                                        <p:attrNameLst>
+                                          <p:attrName>style.visibility</p:attrName>
+                                        </p:attrNameLst>
+                                      </p:cBhvr>
+                                      <p:to>
+                                        <p:strVal val="visible"/>
                                       </p:to>
                                     </p:set>
                                   </p:childTnLst>
@@ -9700,14 +14059,14 @@
                               <p:par>
                                 <p:cTn id="49" presetID="1" presetClass="entr" presetSubtype="0" fill="hold" nodeType="clickEffect">
                                   <p:stCondLst>
-                                    <p:cond delay="500"/>
+                                    <p:cond delay="1000"/>
                                   </p:stCondLst>
                                   <p:childTnLst>
                                     <p:set>
                                       <p:cBhvr>
                                         <p:cTn id="50" dur="1" fill="hold">
                                           <p:stCondLst>
-                                            <p:cond delay="0"/>
+                                            <p:cond delay="249"/>
                                           </p:stCondLst>
                                         </p:cTn>
                                         <p:tgtEl>
@@ -9745,14 +14104,14 @@
                               <p:par>
                                 <p:cTn id="53" presetID="1" presetClass="exit" presetSubtype="0" fill="hold" nodeType="clickEffect">
                                   <p:stCondLst>
-                                    <p:cond delay="500"/>
+                                    <p:cond delay="1000"/>
                                   </p:stCondLst>
                                   <p:childTnLst>
                                     <p:set>
                                       <p:cBhvr>
                                         <p:cTn id="54" dur="1" fill="hold">
                                           <p:stCondLst>
-                                            <p:cond delay="0"/>
+                                            <p:cond delay="249"/>
                                           </p:stCondLst>
                                         </p:cTn>
                                         <p:tgtEl>
@@ -10121,14 +14480,67 @@
                             </p:stCondLst>
                             <p:childTnLst>
                               <p:par>
-                                <p:cTn id="83" presetID="1" presetClass="exit" presetSubtype="0" fill="hold" grpId="1" nodeType="clickEffect">
+                                <p:cTn id="83" presetID="6" presetClass="exit" presetSubtype="32" fill="hold" nodeType="clickEffect">
+                                  <p:stCondLst>
+                                    <p:cond delay="500"/>
+                                  </p:stCondLst>
+                                  <p:childTnLst>
+                                    <p:animEffect transition="out" filter="circle(out)">
+                                      <p:cBhvr>
+                                        <p:cTn id="84" dur="2000"/>
+                                        <p:tgtEl>
+                                          <p:spTgt spid="1061"/>
+                                        </p:tgtEl>
+                                      </p:cBhvr>
+                                    </p:animEffect>
+                                    <p:set>
+                                      <p:cBhvr>
+                                        <p:cTn id="85" dur="1" fill="hold">
+                                          <p:stCondLst>
+                                            <p:cond delay="1999"/>
+                                          </p:stCondLst>
+                                        </p:cTn>
+                                        <p:tgtEl>
+                                          <p:spTgt spid="1061"/>
+                                        </p:tgtEl>
+                                        <p:attrNameLst>
+                                          <p:attrName>style.visibility</p:attrName>
+                                        </p:attrNameLst>
+                                      </p:cBhvr>
+                                      <p:to>
+                                        <p:strVal val="hidden"/>
+                                      </p:to>
+                                    </p:set>
+                                  </p:childTnLst>
+                                </p:cTn>
+                              </p:par>
+                            </p:childTnLst>
+                          </p:cTn>
+                        </p:par>
+                      </p:childTnLst>
+                    </p:cTn>
+                  </p:par>
+                  <p:par>
+                    <p:cTn id="86" fill="hold">
+                      <p:stCondLst>
+                        <p:cond delay="indefinite"/>
+                      </p:stCondLst>
+                      <p:childTnLst>
+                        <p:par>
+                          <p:cTn id="87" fill="hold">
+                            <p:stCondLst>
+                              <p:cond delay="0"/>
+                            </p:stCondLst>
+                            <p:childTnLst>
+                              <p:par>
+                                <p:cTn id="88" presetID="1" presetClass="exit" presetSubtype="0" fill="hold" grpId="1" nodeType="clickEffect">
                                   <p:stCondLst>
                                     <p:cond delay="500"/>
                                   </p:stCondLst>
                                   <p:childTnLst>
                                     <p:set>
                                       <p:cBhvr>
-                                        <p:cTn id="84" dur="1" fill="hold">
+                                        <p:cTn id="89" dur="1" fill="hold">
                                           <p:stCondLst>
                                             <p:cond delay="0"/>
                                           </p:stCondLst>
@@ -10154,26 +14566,26 @@
                     </p:cTn>
                   </p:par>
                   <p:par>
-                    <p:cTn id="85" fill="hold">
+                    <p:cTn id="90" fill="hold">
                       <p:stCondLst>
                         <p:cond delay="indefinite"/>
                       </p:stCondLst>
                       <p:childTnLst>
                         <p:par>
-                          <p:cTn id="86" fill="hold">
+                          <p:cTn id="91" fill="hold">
                             <p:stCondLst>
                               <p:cond delay="0"/>
                             </p:stCondLst>
                             <p:childTnLst>
                               <p:par>
-                                <p:cTn id="87" presetID="1" presetClass="entr" presetSubtype="0" fill="hold" grpId="0" nodeType="clickEffect">
+                                <p:cTn id="92" presetID="1" presetClass="entr" presetSubtype="0" fill="hold" grpId="0" nodeType="clickEffect">
                                   <p:stCondLst>
                                     <p:cond delay="500"/>
                                   </p:stCondLst>
                                   <p:childTnLst>
                                     <p:set>
                                       <p:cBhvr>
-                                        <p:cTn id="88" dur="1" fill="hold">
+                                        <p:cTn id="93" dur="1" fill="hold">
                                           <p:stCondLst>
                                             <p:cond delay="0"/>
                                           </p:stCondLst>
@@ -10199,26 +14611,26 @@
                     </p:cTn>
                   </p:par>
                   <p:par>
-                    <p:cTn id="89" fill="hold">
+                    <p:cTn id="94" fill="hold">
                       <p:stCondLst>
                         <p:cond delay="indefinite"/>
                       </p:stCondLst>
                       <p:childTnLst>
                         <p:par>
-                          <p:cTn id="90" fill="hold">
+                          <p:cTn id="95" fill="hold">
                             <p:stCondLst>
                               <p:cond delay="0"/>
                             </p:stCondLst>
                             <p:childTnLst>
                               <p:par>
-                                <p:cTn id="91" presetID="2" presetClass="entr" presetSubtype="4" fill="hold" grpId="0" nodeType="clickEffect">
+                                <p:cTn id="96" presetID="2" presetClass="entr" presetSubtype="4" fill="hold" grpId="0" nodeType="clickEffect">
                                   <p:stCondLst>
                                     <p:cond delay="500"/>
                                   </p:stCondLst>
                                   <p:childTnLst>
                                     <p:set>
                                       <p:cBhvr>
-                                        <p:cTn id="92" dur="1" fill="hold">
+                                        <p:cTn id="97" dur="1" fill="hold">
                                           <p:stCondLst>
                                             <p:cond delay="0"/>
                                           </p:stCondLst>
@@ -10236,7 +14648,7 @@
                                     </p:set>
                                     <p:anim calcmode="lin" valueType="num">
                                       <p:cBhvr additive="base">
-                                        <p:cTn id="93" dur="500" fill="hold"/>
+                                        <p:cTn id="98" dur="500" fill="hold"/>
                                         <p:tgtEl>
                                           <p:spTgt spid="61"/>
                                         </p:tgtEl>
@@ -10259,7 +14671,7 @@
                                     </p:anim>
                                     <p:anim calcmode="lin" valueType="num">
                                       <p:cBhvr additive="base">
-                                        <p:cTn id="94" dur="500" fill="hold"/>
+                                        <p:cTn id="99" dur="500" fill="hold"/>
                                         <p:tgtEl>
                                           <p:spTgt spid="61"/>
                                         </p:tgtEl>
@@ -10280,59 +14692,6 @@
                                         </p:tav>
                                       </p:tavLst>
                                     </p:anim>
-                                  </p:childTnLst>
-                                </p:cTn>
-                              </p:par>
-                            </p:childTnLst>
-                          </p:cTn>
-                        </p:par>
-                      </p:childTnLst>
-                    </p:cTn>
-                  </p:par>
-                  <p:par>
-                    <p:cTn id="95" fill="hold">
-                      <p:stCondLst>
-                        <p:cond delay="indefinite"/>
-                      </p:stCondLst>
-                      <p:childTnLst>
-                        <p:par>
-                          <p:cTn id="96" fill="hold">
-                            <p:stCondLst>
-                              <p:cond delay="0"/>
-                            </p:stCondLst>
-                            <p:childTnLst>
-                              <p:par>
-                                <p:cTn id="97" presetID="6" presetClass="exit" presetSubtype="32" fill="hold" nodeType="clickEffect">
-                                  <p:stCondLst>
-                                    <p:cond delay="500"/>
-                                  </p:stCondLst>
-                                  <p:childTnLst>
-                                    <p:animEffect transition="out" filter="circle(out)">
-                                      <p:cBhvr>
-                                        <p:cTn id="98" dur="2000"/>
-                                        <p:tgtEl>
-                                          <p:spTgt spid="1061"/>
-                                        </p:tgtEl>
-                                      </p:cBhvr>
-                                    </p:animEffect>
-                                    <p:set>
-                                      <p:cBhvr>
-                                        <p:cTn id="99" dur="1" fill="hold">
-                                          <p:stCondLst>
-                                            <p:cond delay="1999"/>
-                                          </p:stCondLst>
-                                        </p:cTn>
-                                        <p:tgtEl>
-                                          <p:spTgt spid="1061"/>
-                                        </p:tgtEl>
-                                        <p:attrNameLst>
-                                          <p:attrName>style.visibility</p:attrName>
-                                        </p:attrNameLst>
-                                      </p:cBhvr>
-                                      <p:to>
-                                        <p:strVal val="hidden"/>
-                                      </p:to>
-                                    </p:set>
                                   </p:childTnLst>
                                 </p:cTn>
                               </p:par>
@@ -11135,6 +15494,59 @@
                       </p:childTnLst>
                     </p:cTn>
                   </p:par>
+                  <p:par>
+                    <p:cTn id="163" fill="hold">
+                      <p:stCondLst>
+                        <p:cond delay="indefinite"/>
+                      </p:stCondLst>
+                      <p:childTnLst>
+                        <p:par>
+                          <p:cTn id="164" fill="hold">
+                            <p:stCondLst>
+                              <p:cond delay="0"/>
+                            </p:stCondLst>
+                            <p:childTnLst>
+                              <p:par>
+                                <p:cTn id="165" presetID="6" presetClass="entr" presetSubtype="16" fill="hold" grpId="0" nodeType="clickEffect">
+                                  <p:stCondLst>
+                                    <p:cond delay="1000"/>
+                                  </p:stCondLst>
+                                  <p:childTnLst>
+                                    <p:set>
+                                      <p:cBhvr>
+                                        <p:cTn id="166" dur="1" fill="hold">
+                                          <p:stCondLst>
+                                            <p:cond delay="0"/>
+                                          </p:stCondLst>
+                                        </p:cTn>
+                                        <p:tgtEl>
+                                          <p:spTgt spid="2"/>
+                                        </p:tgtEl>
+                                        <p:attrNameLst>
+                                          <p:attrName>style.visibility</p:attrName>
+                                        </p:attrNameLst>
+                                      </p:cBhvr>
+                                      <p:to>
+                                        <p:strVal val="visible"/>
+                                      </p:to>
+                                    </p:set>
+                                    <p:animEffect transition="in" filter="circle(in)">
+                                      <p:cBhvr>
+                                        <p:cTn id="167" dur="2000"/>
+                                        <p:tgtEl>
+                                          <p:spTgt spid="2"/>
+                                        </p:tgtEl>
+                                      </p:cBhvr>
+                                    </p:animEffect>
+                                  </p:childTnLst>
+                                </p:cTn>
+                              </p:par>
+                            </p:childTnLst>
+                          </p:cTn>
+                        </p:par>
+                      </p:childTnLst>
+                    </p:cTn>
+                  </p:par>
                 </p:childTnLst>
               </p:cTn>
               <p:prevCondLst>
@@ -11174,12 +15586,13 @@
       <p:bldP spid="45" grpId="0" animBg="1"/>
       <p:bldP spid="46" grpId="0" animBg="1"/>
       <p:bldP spid="1097" grpId="0"/>
+      <p:bldP spid="2" grpId="0"/>
     </p:bldLst>
   </p:timing>
 </p:sld>
 </file>
 
-<file path=ppt/slides/slide3.xml><?xml version="1.0" encoding="utf-8"?>
+<file path=ppt/slides/slide4.xml><?xml version="1.0" encoding="utf-8"?>
 <p:sld xmlns:a="http://schemas.openxmlformats.org/drawingml/2006/main" xmlns:r="http://schemas.openxmlformats.org/officeDocument/2006/relationships" xmlns:p="http://schemas.openxmlformats.org/presentationml/2006/main" show="0">
   <p:cSld>
     <p:spTree>
@@ -11419,7 +15832,7 @@
         </p:blipFill>
         <p:spPr bwMode="auto">
           <a:xfrm>
-            <a:off x="4605480" y="2894072"/>
+            <a:off x="3738488" y="2258599"/>
             <a:ext cx="439859" cy="439859"/>
           </a:xfrm>
           <a:prstGeom prst="rect">
@@ -11898,8 +16311,8 @@
         </p:blipFill>
         <p:spPr bwMode="auto">
           <a:xfrm>
-            <a:off x="3717359" y="4652190"/>
-            <a:ext cx="776909" cy="516998"/>
+            <a:off x="3717359" y="4916374"/>
+            <a:ext cx="379911" cy="252814"/>
           </a:xfrm>
           <a:prstGeom prst="rect">
             <a:avLst/>
@@ -12115,6 +16528,83 @@
               </a14:hiddenFill>
             </a:ext>
           </a:extLst>
+        </p:spPr>
+      </p:pic>
+      <p:pic>
+        <p:nvPicPr>
+          <p:cNvPr id="3" name="Picture 26" descr="Docker full logo transparent PNG - StickPNG">
+            <a:extLst>
+              <a:ext uri="{FF2B5EF4-FFF2-40B4-BE49-F238E27FC236}">
+                <a16:creationId xmlns:a16="http://schemas.microsoft.com/office/drawing/2014/main" id="{9B19E7D8-4964-8497-1F58-207B886E2CF4}"/>
+              </a:ext>
+            </a:extLst>
+          </p:cNvPr>
+          <p:cNvPicPr>
+            <a:picLocks noChangeAspect="1" noChangeArrowheads="1"/>
+          </p:cNvPicPr>
+          <p:nvPr/>
+        </p:nvPicPr>
+        <p:blipFill>
+          <a:blip r:embed="rId8">
+            <a:extLst>
+              <a:ext uri="{28A0092B-C50C-407E-A947-70E740481C1C}">
+                <a14:useLocalDpi xmlns:a14="http://schemas.microsoft.com/office/drawing/2010/main" val="0"/>
+              </a:ext>
+            </a:extLst>
+          </a:blip>
+          <a:srcRect/>
+          <a:stretch>
+            <a:fillRect/>
+          </a:stretch>
+        </p:blipFill>
+        <p:spPr bwMode="auto">
+          <a:xfrm>
+            <a:off x="6281991" y="3350802"/>
+            <a:ext cx="736485" cy="736485"/>
+          </a:xfrm>
+          <a:prstGeom prst="rect">
+            <a:avLst/>
+          </a:prstGeom>
+          <a:noFill/>
+          <a:extLst>
+            <a:ext uri="{909E8E84-426E-40DD-AFC4-6F175D3DCCD1}">
+              <a14:hiddenFill xmlns:a14="http://schemas.microsoft.com/office/drawing/2010/main">
+                <a:solidFill>
+                  <a:srgbClr val="FFFFFF"/>
+                </a:solidFill>
+              </a14:hiddenFill>
+            </a:ext>
+          </a:extLst>
+        </p:spPr>
+      </p:pic>
+      <p:pic>
+        <p:nvPicPr>
+          <p:cNvPr id="8" name="Picture 7">
+            <a:extLst>
+              <a:ext uri="{FF2B5EF4-FFF2-40B4-BE49-F238E27FC236}">
+                <a16:creationId xmlns:a16="http://schemas.microsoft.com/office/drawing/2014/main" id="{DA9FBFB3-BF57-D122-A87E-3AE98C4E2343}"/>
+              </a:ext>
+            </a:extLst>
+          </p:cNvPr>
+          <p:cNvPicPr>
+            <a:picLocks noChangeAspect="1"/>
+          </p:cNvPicPr>
+          <p:nvPr/>
+        </p:nvPicPr>
+        <p:blipFill>
+          <a:blip r:embed="rId21"/>
+          <a:stretch>
+            <a:fillRect/>
+          </a:stretch>
+        </p:blipFill>
+        <p:spPr>
+          <a:xfrm>
+            <a:off x="3379235" y="5344468"/>
+            <a:ext cx="777849" cy="533818"/>
+          </a:xfrm>
+          <a:prstGeom prst="rect">
+            <a:avLst/>
+          </a:prstGeom>
         </p:spPr>
       </p:pic>
     </p:spTree>
@@ -12423,4 +16913,299 @@
     </a:ext>
   </a:extLst>
 </a:theme>
+</file>
+
+<file path=ppt/theme/theme2.xml><?xml version="1.0" encoding="utf-8"?>
+<a:theme xmlns:a="http://schemas.openxmlformats.org/drawingml/2006/main" name="Office Theme">
+  <a:themeElements>
+    <a:clrScheme name="Office">
+      <a:dk1>
+        <a:sysClr val="windowText" lastClr="000000"/>
+      </a:dk1>
+      <a:lt1>
+        <a:sysClr val="window" lastClr="FFFFFF"/>
+      </a:lt1>
+      <a:dk2>
+        <a:srgbClr val="44546A"/>
+      </a:dk2>
+      <a:lt2>
+        <a:srgbClr val="E7E6E6"/>
+      </a:lt2>
+      <a:accent1>
+        <a:srgbClr val="4472C4"/>
+      </a:accent1>
+      <a:accent2>
+        <a:srgbClr val="ED7D31"/>
+      </a:accent2>
+      <a:accent3>
+        <a:srgbClr val="A5A5A5"/>
+      </a:accent3>
+      <a:accent4>
+        <a:srgbClr val="FFC000"/>
+      </a:accent4>
+      <a:accent5>
+        <a:srgbClr val="5B9BD5"/>
+      </a:accent5>
+      <a:accent6>
+        <a:srgbClr val="70AD47"/>
+      </a:accent6>
+      <a:hlink>
+        <a:srgbClr val="0563C1"/>
+      </a:hlink>
+      <a:folHlink>
+        <a:srgbClr val="954F72"/>
+      </a:folHlink>
+    </a:clrScheme>
+    <a:fontScheme name="Office">
+      <a:majorFont>
+        <a:latin typeface="Calibri Light" panose="020F0302020204030204"/>
+        <a:ea typeface=""/>
+        <a:cs typeface=""/>
+        <a:font script="Jpan" typeface="游ゴシック Light"/>
+        <a:font script="Hang" typeface="맑은 고딕"/>
+        <a:font script="Hans" typeface="等线 Light"/>
+        <a:font script="Hant" typeface="新細明體"/>
+        <a:font script="Arab" typeface="Times New Roman"/>
+        <a:font script="Hebr" typeface="Times New Roman"/>
+        <a:font script="Thai" typeface="Angsana New"/>
+        <a:font script="Ethi" typeface="Nyala"/>
+        <a:font script="Beng" typeface="Vrinda"/>
+        <a:font script="Gujr" typeface="Shruti"/>
+        <a:font script="Khmr" typeface="MoolBoran"/>
+        <a:font script="Knda" typeface="Tunga"/>
+        <a:font script="Guru" typeface="Raavi"/>
+        <a:font script="Cans" typeface="Euphemia"/>
+        <a:font script="Cher" typeface="Plantagenet Cherokee"/>
+        <a:font script="Yiii" typeface="Microsoft Yi Baiti"/>
+        <a:font script="Tibt" typeface="Microsoft Himalaya"/>
+        <a:font script="Thaa" typeface="MV Boli"/>
+        <a:font script="Deva" typeface="Mangal"/>
+        <a:font script="Telu" typeface="Gautami"/>
+        <a:font script="Taml" typeface="Latha"/>
+        <a:font script="Syrc" typeface="Estrangelo Edessa"/>
+        <a:font script="Orya" typeface="Kalinga"/>
+        <a:font script="Mlym" typeface="Kartika"/>
+        <a:font script="Laoo" typeface="DokChampa"/>
+        <a:font script="Sinh" typeface="Iskoola Pota"/>
+        <a:font script="Mong" typeface="Mongolian Baiti"/>
+        <a:font script="Viet" typeface="Times New Roman"/>
+        <a:font script="Uigh" typeface="Microsoft Uighur"/>
+        <a:font script="Geor" typeface="Sylfaen"/>
+        <a:font script="Armn" typeface="Arial"/>
+        <a:font script="Bugi" typeface="Leelawadee UI"/>
+        <a:font script="Bopo" typeface="Microsoft JhengHei"/>
+        <a:font script="Java" typeface="Javanese Text"/>
+        <a:font script="Lisu" typeface="Segoe UI"/>
+        <a:font script="Mymr" typeface="Myanmar Text"/>
+        <a:font script="Nkoo" typeface="Ebrima"/>
+        <a:font script="Olck" typeface="Nirmala UI"/>
+        <a:font script="Osma" typeface="Ebrima"/>
+        <a:font script="Phag" typeface="Phagspa"/>
+        <a:font script="Syrn" typeface="Estrangelo Edessa"/>
+        <a:font script="Syrj" typeface="Estrangelo Edessa"/>
+        <a:font script="Syre" typeface="Estrangelo Edessa"/>
+        <a:font script="Sora" typeface="Nirmala UI"/>
+        <a:font script="Tale" typeface="Microsoft Tai Le"/>
+        <a:font script="Talu" typeface="Microsoft New Tai Lue"/>
+        <a:font script="Tfng" typeface="Ebrima"/>
+      </a:majorFont>
+      <a:minorFont>
+        <a:latin typeface="Calibri" panose="020F0502020204030204"/>
+        <a:ea typeface=""/>
+        <a:cs typeface=""/>
+        <a:font script="Jpan" typeface="游ゴシック"/>
+        <a:font script="Hang" typeface="맑은 고딕"/>
+        <a:font script="Hans" typeface="等线"/>
+        <a:font script="Hant" typeface="新細明體"/>
+        <a:font script="Arab" typeface="Arial"/>
+        <a:font script="Hebr" typeface="Arial"/>
+        <a:font script="Thai" typeface="Cordia New"/>
+        <a:font script="Ethi" typeface="Nyala"/>
+        <a:font script="Beng" typeface="Vrinda"/>
+        <a:font script="Gujr" typeface="Shruti"/>
+        <a:font script="Khmr" typeface="DaunPenh"/>
+        <a:font script="Knda" typeface="Tunga"/>
+        <a:font script="Guru" typeface="Raavi"/>
+        <a:font script="Cans" typeface="Euphemia"/>
+        <a:font script="Cher" typeface="Plantagenet Cherokee"/>
+        <a:font script="Yiii" typeface="Microsoft Yi Baiti"/>
+        <a:font script="Tibt" typeface="Microsoft Himalaya"/>
+        <a:font script="Thaa" typeface="MV Boli"/>
+        <a:font script="Deva" typeface="Mangal"/>
+        <a:font script="Telu" typeface="Gautami"/>
+        <a:font script="Taml" typeface="Latha"/>
+        <a:font script="Syrc" typeface="Estrangelo Edessa"/>
+        <a:font script="Orya" typeface="Kalinga"/>
+        <a:font script="Mlym" typeface="Kartika"/>
+        <a:font script="Laoo" typeface="DokChampa"/>
+        <a:font script="Sinh" typeface="Iskoola Pota"/>
+        <a:font script="Mong" typeface="Mongolian Baiti"/>
+        <a:font script="Viet" typeface="Arial"/>
+        <a:font script="Uigh" typeface="Microsoft Uighur"/>
+        <a:font script="Geor" typeface="Sylfaen"/>
+        <a:font script="Armn" typeface="Arial"/>
+        <a:font script="Bugi" typeface="Leelawadee UI"/>
+        <a:font script="Bopo" typeface="Microsoft JhengHei"/>
+        <a:font script="Java" typeface="Javanese Text"/>
+        <a:font script="Lisu" typeface="Segoe UI"/>
+        <a:font script="Mymr" typeface="Myanmar Text"/>
+        <a:font script="Nkoo" typeface="Ebrima"/>
+        <a:font script="Olck" typeface="Nirmala UI"/>
+        <a:font script="Osma" typeface="Ebrima"/>
+        <a:font script="Phag" typeface="Phagspa"/>
+        <a:font script="Syrn" typeface="Estrangelo Edessa"/>
+        <a:font script="Syrj" typeface="Estrangelo Edessa"/>
+        <a:font script="Syre" typeface="Estrangelo Edessa"/>
+        <a:font script="Sora" typeface="Nirmala UI"/>
+        <a:font script="Tale" typeface="Microsoft Tai Le"/>
+        <a:font script="Talu" typeface="Microsoft New Tai Lue"/>
+        <a:font script="Tfng" typeface="Ebrima"/>
+      </a:minorFont>
+    </a:fontScheme>
+    <a:fmtScheme name="Office">
+      <a:fillStyleLst>
+        <a:solidFill>
+          <a:schemeClr val="phClr"/>
+        </a:solidFill>
+        <a:gradFill rotWithShape="1">
+          <a:gsLst>
+            <a:gs pos="0">
+              <a:schemeClr val="phClr">
+                <a:lumMod val="110000"/>
+                <a:satMod val="105000"/>
+                <a:tint val="67000"/>
+              </a:schemeClr>
+            </a:gs>
+            <a:gs pos="50000">
+              <a:schemeClr val="phClr">
+                <a:lumMod val="105000"/>
+                <a:satMod val="103000"/>
+                <a:tint val="73000"/>
+              </a:schemeClr>
+            </a:gs>
+            <a:gs pos="100000">
+              <a:schemeClr val="phClr">
+                <a:lumMod val="105000"/>
+                <a:satMod val="109000"/>
+                <a:tint val="81000"/>
+              </a:schemeClr>
+            </a:gs>
+          </a:gsLst>
+          <a:lin ang="5400000" scaled="0"/>
+        </a:gradFill>
+        <a:gradFill rotWithShape="1">
+          <a:gsLst>
+            <a:gs pos="0">
+              <a:schemeClr val="phClr">
+                <a:satMod val="103000"/>
+                <a:lumMod val="102000"/>
+                <a:tint val="94000"/>
+              </a:schemeClr>
+            </a:gs>
+            <a:gs pos="50000">
+              <a:schemeClr val="phClr">
+                <a:satMod val="110000"/>
+                <a:lumMod val="100000"/>
+                <a:shade val="100000"/>
+              </a:schemeClr>
+            </a:gs>
+            <a:gs pos="100000">
+              <a:schemeClr val="phClr">
+                <a:lumMod val="99000"/>
+                <a:satMod val="120000"/>
+                <a:shade val="78000"/>
+              </a:schemeClr>
+            </a:gs>
+          </a:gsLst>
+          <a:lin ang="5400000" scaled="0"/>
+        </a:gradFill>
+      </a:fillStyleLst>
+      <a:lnStyleLst>
+        <a:ln w="6350" cap="flat" cmpd="sng" algn="ctr">
+          <a:solidFill>
+            <a:schemeClr val="phClr"/>
+          </a:solidFill>
+          <a:prstDash val="solid"/>
+          <a:miter lim="800000"/>
+        </a:ln>
+        <a:ln w="12700" cap="flat" cmpd="sng" algn="ctr">
+          <a:solidFill>
+            <a:schemeClr val="phClr"/>
+          </a:solidFill>
+          <a:prstDash val="solid"/>
+          <a:miter lim="800000"/>
+        </a:ln>
+        <a:ln w="19050" cap="flat" cmpd="sng" algn="ctr">
+          <a:solidFill>
+            <a:schemeClr val="phClr"/>
+          </a:solidFill>
+          <a:prstDash val="solid"/>
+          <a:miter lim="800000"/>
+        </a:ln>
+      </a:lnStyleLst>
+      <a:effectStyleLst>
+        <a:effectStyle>
+          <a:effectLst/>
+        </a:effectStyle>
+        <a:effectStyle>
+          <a:effectLst/>
+        </a:effectStyle>
+        <a:effectStyle>
+          <a:effectLst>
+            <a:outerShdw blurRad="57150" dist="19050" dir="5400000" algn="ctr" rotWithShape="0">
+              <a:srgbClr val="000000">
+                <a:alpha val="63000"/>
+              </a:srgbClr>
+            </a:outerShdw>
+          </a:effectLst>
+        </a:effectStyle>
+      </a:effectStyleLst>
+      <a:bgFillStyleLst>
+        <a:solidFill>
+          <a:schemeClr val="phClr"/>
+        </a:solidFill>
+        <a:solidFill>
+          <a:schemeClr val="phClr">
+            <a:tint val="95000"/>
+            <a:satMod val="170000"/>
+          </a:schemeClr>
+        </a:solidFill>
+        <a:gradFill rotWithShape="1">
+          <a:gsLst>
+            <a:gs pos="0">
+              <a:schemeClr val="phClr">
+                <a:tint val="93000"/>
+                <a:satMod val="150000"/>
+                <a:shade val="98000"/>
+                <a:lumMod val="102000"/>
+              </a:schemeClr>
+            </a:gs>
+            <a:gs pos="50000">
+              <a:schemeClr val="phClr">
+                <a:tint val="98000"/>
+                <a:satMod val="130000"/>
+                <a:shade val="90000"/>
+                <a:lumMod val="103000"/>
+              </a:schemeClr>
+            </a:gs>
+            <a:gs pos="100000">
+              <a:schemeClr val="phClr">
+                <a:shade val="63000"/>
+                <a:satMod val="120000"/>
+              </a:schemeClr>
+            </a:gs>
+          </a:gsLst>
+          <a:lin ang="5400000" scaled="0"/>
+        </a:gradFill>
+      </a:bgFillStyleLst>
+    </a:fmtScheme>
+  </a:themeElements>
+  <a:objectDefaults/>
+  <a:extraClrSchemeLst/>
+  <a:extLst>
+    <a:ext uri="{05A4C25C-085E-4340-85A3-A5531E510DB2}">
+      <thm15:themeFamily xmlns:thm15="http://schemas.microsoft.com/office/thememl/2012/main" name="Office Theme" id="{62F939B6-93AF-4DB8-9C6B-D6C7DFDC589F}" vid="{4A3C46E8-61CC-4603-A589-7422A47A8E4A}"/>
+    </a:ext>
+  </a:extLst>
+</a:theme>
 </file>
--- a/ocp/ztp-work-flow.pptx
+++ b/ocp/ztp-work-flow.pptx
@@ -200,7 +200,7 @@
           <a:p>
             <a:fld id="{5DB70C7A-BF7A-4A31-8523-E2CAE6345113}" type="datetimeFigureOut">
               <a:rPr lang="en-US" smtClean="0"/>
-              <a:t>01-Mar-26</a:t>
+              <a:t>03-Mar-26</a:t>
             </a:fld>
             <a:endParaRPr lang="en-US"/>
           </a:p>
@@ -495,6 +495,13 @@
           </p:nvPr>
         </p:nvSpPr>
         <p:spPr/>
+        <p:txBody>
+          <a:bodyPr/>
+          <a:lstStyle/>
+          <a:p>
+            <a:endParaRPr lang="en-US"/>
+          </a:p>
+        </p:txBody>
       </p:sp>
       <p:sp>
         <p:nvSpPr>
@@ -698,7 +705,7 @@
           <a:p>
             <a:fld id="{EB3DC7E2-BD84-4B87-A2A2-E22DB4B76BFE}" type="datetimeFigureOut">
               <a:rPr lang="en-US" smtClean="0"/>
-              <a:t>01-Mar-26</a:t>
+              <a:t>03-Mar-26</a:t>
             </a:fld>
             <a:endParaRPr lang="en-US"/>
           </a:p>
@@ -896,7 +903,7 @@
           <a:p>
             <a:fld id="{EB3DC7E2-BD84-4B87-A2A2-E22DB4B76BFE}" type="datetimeFigureOut">
               <a:rPr lang="en-US" smtClean="0"/>
-              <a:t>01-Mar-26</a:t>
+              <a:t>03-Mar-26</a:t>
             </a:fld>
             <a:endParaRPr lang="en-US"/>
           </a:p>
@@ -1104,7 +1111,7 @@
           <a:p>
             <a:fld id="{EB3DC7E2-BD84-4B87-A2A2-E22DB4B76BFE}" type="datetimeFigureOut">
               <a:rPr lang="en-US" smtClean="0"/>
-              <a:t>01-Mar-26</a:t>
+              <a:t>03-Mar-26</a:t>
             </a:fld>
             <a:endParaRPr lang="en-US"/>
           </a:p>
@@ -1302,7 +1309,7 @@
           <a:p>
             <a:fld id="{EB3DC7E2-BD84-4B87-A2A2-E22DB4B76BFE}" type="datetimeFigureOut">
               <a:rPr lang="en-US" smtClean="0"/>
-              <a:t>01-Mar-26</a:t>
+              <a:t>03-Mar-26</a:t>
             </a:fld>
             <a:endParaRPr lang="en-US"/>
           </a:p>
@@ -1577,7 +1584,7 @@
           <a:p>
             <a:fld id="{EB3DC7E2-BD84-4B87-A2A2-E22DB4B76BFE}" type="datetimeFigureOut">
               <a:rPr lang="en-US" smtClean="0"/>
-              <a:t>01-Mar-26</a:t>
+              <a:t>03-Mar-26</a:t>
             </a:fld>
             <a:endParaRPr lang="en-US"/>
           </a:p>
@@ -1842,7 +1849,7 @@
           <a:p>
             <a:fld id="{EB3DC7E2-BD84-4B87-A2A2-E22DB4B76BFE}" type="datetimeFigureOut">
               <a:rPr lang="en-US" smtClean="0"/>
-              <a:t>01-Mar-26</a:t>
+              <a:t>03-Mar-26</a:t>
             </a:fld>
             <a:endParaRPr lang="en-US"/>
           </a:p>
@@ -2254,7 +2261,7 @@
           <a:p>
             <a:fld id="{EB3DC7E2-BD84-4B87-A2A2-E22DB4B76BFE}" type="datetimeFigureOut">
               <a:rPr lang="en-US" smtClean="0"/>
-              <a:t>01-Mar-26</a:t>
+              <a:t>03-Mar-26</a:t>
             </a:fld>
             <a:endParaRPr lang="en-US"/>
           </a:p>
@@ -2395,7 +2402,7 @@
           <a:p>
             <a:fld id="{EB3DC7E2-BD84-4B87-A2A2-E22DB4B76BFE}" type="datetimeFigureOut">
               <a:rPr lang="en-US" smtClean="0"/>
-              <a:t>01-Mar-26</a:t>
+              <a:t>03-Mar-26</a:t>
             </a:fld>
             <a:endParaRPr lang="en-US"/>
           </a:p>
@@ -2508,7 +2515,7 @@
           <a:p>
             <a:fld id="{EB3DC7E2-BD84-4B87-A2A2-E22DB4B76BFE}" type="datetimeFigureOut">
               <a:rPr lang="en-US" smtClean="0"/>
-              <a:t>01-Mar-26</a:t>
+              <a:t>03-Mar-26</a:t>
             </a:fld>
             <a:endParaRPr lang="en-US"/>
           </a:p>
@@ -2819,7 +2826,7 @@
           <a:p>
             <a:fld id="{EB3DC7E2-BD84-4B87-A2A2-E22DB4B76BFE}" type="datetimeFigureOut">
               <a:rPr lang="en-US" smtClean="0"/>
-              <a:t>01-Mar-26</a:t>
+              <a:t>03-Mar-26</a:t>
             </a:fld>
             <a:endParaRPr lang="en-US"/>
           </a:p>
@@ -3107,7 +3114,7 @@
           <a:p>
             <a:fld id="{EB3DC7E2-BD84-4B87-A2A2-E22DB4B76BFE}" type="datetimeFigureOut">
               <a:rPr lang="en-US" smtClean="0"/>
-              <a:t>01-Mar-26</a:t>
+              <a:t>03-Mar-26</a:t>
             </a:fld>
             <a:endParaRPr lang="en-US"/>
           </a:p>
@@ -3348,7 +3355,7 @@
           <a:p>
             <a:fld id="{EB3DC7E2-BD84-4B87-A2A2-E22DB4B76BFE}" type="datetimeFigureOut">
               <a:rPr lang="en-US" smtClean="0"/>
-              <a:t>01-Mar-26</a:t>
+              <a:t>03-Mar-26</a:t>
             </a:fld>
             <a:endParaRPr lang="en-US"/>
           </a:p>
@@ -11934,7 +11941,7 @@
         </p:nvSpPr>
         <p:spPr>
           <a:xfrm>
-            <a:off x="9323304" y="1787459"/>
+            <a:off x="9323304" y="2712759"/>
             <a:ext cx="2582946" cy="307777"/>
           </a:xfrm>
           <a:prstGeom prst="rect">
@@ -11977,7 +11984,7 @@
         </p:nvSpPr>
         <p:spPr>
           <a:xfrm>
-            <a:off x="9323304" y="2155728"/>
+            <a:off x="9323304" y="3081028"/>
             <a:ext cx="2582946" cy="307777"/>
           </a:xfrm>
           <a:prstGeom prst="rect">
@@ -12020,7 +12027,7 @@
         </p:nvSpPr>
         <p:spPr>
           <a:xfrm>
-            <a:off x="9323304" y="2497871"/>
+            <a:off x="9323304" y="3423171"/>
             <a:ext cx="2582946" cy="307777"/>
           </a:xfrm>
           <a:prstGeom prst="rect">
@@ -12063,7 +12070,7 @@
         </p:nvSpPr>
         <p:spPr>
           <a:xfrm>
-            <a:off x="9323304" y="3225742"/>
+            <a:off x="9323304" y="4151042"/>
             <a:ext cx="2582946" cy="307777"/>
           </a:xfrm>
           <a:prstGeom prst="rect">
@@ -12657,7 +12664,7 @@
         </p:nvSpPr>
         <p:spPr>
           <a:xfrm>
-            <a:off x="9323304" y="2864388"/>
+            <a:off x="9323304" y="3789688"/>
             <a:ext cx="2582946" cy="307777"/>
           </a:xfrm>
           <a:prstGeom prst="rect">
@@ -13184,7 +13191,7 @@
         </p:nvSpPr>
         <p:spPr>
           <a:xfrm>
-            <a:off x="9319474" y="3586720"/>
+            <a:off x="9319474" y="4512020"/>
             <a:ext cx="2582946" cy="307777"/>
           </a:xfrm>
           <a:prstGeom prst="rect">
@@ -13349,7 +13356,7 @@
         </p:nvSpPr>
         <p:spPr>
           <a:xfrm>
-            <a:off x="9319474" y="3987603"/>
+            <a:off x="9319474" y="4912903"/>
             <a:ext cx="2582946" cy="307777"/>
           </a:xfrm>
           <a:prstGeom prst="rect">
@@ -13454,6 +13461,130 @@
             <a:r>
               <a:rPr lang="en-US" sz="1400" b="1" dirty="0"/>
               <a:t>SYNC</a:t>
+            </a:r>
+          </a:p>
+        </p:txBody>
+      </p:sp>
+      <p:sp>
+        <p:nvSpPr>
+          <p:cNvPr id="3" name="TextBox 2">
+            <a:extLst>
+              <a:ext uri="{FF2B5EF4-FFF2-40B4-BE49-F238E27FC236}">
+                <a16:creationId xmlns:a16="http://schemas.microsoft.com/office/drawing/2014/main" id="{28DDC449-8F93-B623-0617-0C9F1DAB036B}"/>
+              </a:ext>
+            </a:extLst>
+          </p:cNvPr>
+          <p:cNvSpPr txBox="1"/>
+          <p:nvPr/>
+        </p:nvSpPr>
+        <p:spPr>
+          <a:xfrm>
+            <a:off x="9533024" y="1749352"/>
+            <a:ext cx="2582946" cy="276999"/>
+          </a:xfrm>
+          <a:prstGeom prst="rect">
+            <a:avLst/>
+          </a:prstGeom>
+          <a:noFill/>
+        </p:spPr>
+        <p:txBody>
+          <a:bodyPr wrap="square" rtlCol="0">
+            <a:spAutoFit/>
+          </a:bodyPr>
+          <a:lstStyle/>
+          <a:p>
+            <a:pPr marL="171450" indent="-171450">
+              <a:buFont typeface="Wingdings" panose="05000000000000000000" pitchFamily="2" charset="2"/>
+              <a:buChar char="ü"/>
+            </a:pPr>
+            <a:r>
+              <a:rPr lang="en-US" sz="1200" b="1" dirty="0"/>
+              <a:t>Minimal ISO download from ACM </a:t>
+            </a:r>
+          </a:p>
+        </p:txBody>
+      </p:sp>
+      <p:sp>
+        <p:nvSpPr>
+          <p:cNvPr id="4" name="TextBox 3">
+            <a:extLst>
+              <a:ext uri="{FF2B5EF4-FFF2-40B4-BE49-F238E27FC236}">
+                <a16:creationId xmlns:a16="http://schemas.microsoft.com/office/drawing/2014/main" id="{A5011BC3-778E-C9E1-53CA-17DB1E5F7ABA}"/>
+              </a:ext>
+            </a:extLst>
+          </p:cNvPr>
+          <p:cNvSpPr txBox="1"/>
+          <p:nvPr/>
+        </p:nvSpPr>
+        <p:spPr>
+          <a:xfrm>
+            <a:off x="9533024" y="2365521"/>
+            <a:ext cx="2582946" cy="276999"/>
+          </a:xfrm>
+          <a:prstGeom prst="rect">
+            <a:avLst/>
+          </a:prstGeom>
+          <a:noFill/>
+        </p:spPr>
+        <p:txBody>
+          <a:bodyPr wrap="square" rtlCol="0">
+            <a:spAutoFit/>
+          </a:bodyPr>
+          <a:lstStyle/>
+          <a:p>
+            <a:pPr marL="171450" indent="-171450">
+              <a:buFont typeface="Wingdings" panose="05000000000000000000" pitchFamily="2" charset="2"/>
+              <a:buChar char="ü"/>
+            </a:pPr>
+            <a:r>
+              <a:rPr lang="en-US" sz="1200" b="1" dirty="0"/>
+              <a:t>Discovery Agents starts</a:t>
+            </a:r>
+          </a:p>
+        </p:txBody>
+      </p:sp>
+      <p:sp>
+        <p:nvSpPr>
+          <p:cNvPr id="5" name="TextBox 4">
+            <a:extLst>
+              <a:ext uri="{FF2B5EF4-FFF2-40B4-BE49-F238E27FC236}">
+                <a16:creationId xmlns:a16="http://schemas.microsoft.com/office/drawing/2014/main" id="{A3B8BE7A-B37B-D613-0B87-2896E35150C4}"/>
+              </a:ext>
+            </a:extLst>
+          </p:cNvPr>
+          <p:cNvSpPr txBox="1"/>
+          <p:nvPr/>
+        </p:nvSpPr>
+        <p:spPr>
+          <a:xfrm>
+            <a:off x="9533024" y="2065339"/>
+            <a:ext cx="2582946" cy="276999"/>
+          </a:xfrm>
+          <a:prstGeom prst="rect">
+            <a:avLst/>
+          </a:prstGeom>
+          <a:noFill/>
+        </p:spPr>
+        <p:txBody>
+          <a:bodyPr wrap="square" rtlCol="0">
+            <a:spAutoFit/>
+          </a:bodyPr>
+          <a:lstStyle/>
+          <a:p>
+            <a:pPr marL="171450" indent="-171450">
+              <a:buFont typeface="Wingdings" panose="05000000000000000000" pitchFamily="2" charset="2"/>
+              <a:buChar char="ü"/>
+            </a:pPr>
+            <a:r>
+              <a:rPr lang="en-US" sz="1200" b="1" dirty="0">
+                <a:solidFill>
+                  <a:schemeClr val="tx1">
+                    <a:lumMod val="50000"/>
+                    <a:lumOff val="50000"/>
+                  </a:schemeClr>
+                </a:solidFill>
+              </a:rPr>
+              <a:t>RootFS image pulled from http srv </a:t>
             </a:r>
           </a:p>
         </p:txBody>
@@ -13534,7 +13665,7 @@
                             </p:stCondLst>
                             <p:childTnLst>
                               <p:par>
-                                <p:cTn id="9" presetID="6" presetClass="entr" presetSubtype="16" fill="hold" grpId="0" nodeType="clickEffect">
+                                <p:cTn id="9" presetID="21" presetClass="entr" presetSubtype="1" fill="hold" grpId="0" nodeType="clickEffect">
                                   <p:stCondLst>
                                     <p:cond delay="500"/>
                                   </p:stCondLst>
@@ -13557,7 +13688,7 @@
                                         <p:strVal val="visible"/>
                                       </p:to>
                                     </p:set>
-                                    <p:animEffect transition="in" filter="circle(in)">
+                                    <p:animEffect transition="in" filter="wheel(1)">
                                       <p:cBhvr>
                                         <p:cTn id="11" dur="2000"/>
                                         <p:tgtEl>
@@ -13612,7 +13743,7 @@
                                     </p:set>
                                     <p:anim calcmode="lin" valueType="num">
                                       <p:cBhvr additive="base">
-                                        <p:cTn id="16" dur="500" fill="hold"/>
+                                        <p:cTn id="16" dur="250" fill="hold"/>
                                         <p:tgtEl>
                                           <p:spTgt spid="56"/>
                                         </p:tgtEl>
@@ -13635,7 +13766,7 @@
                                     </p:anim>
                                     <p:anim calcmode="lin" valueType="num">
                                       <p:cBhvr additive="base">
-                                        <p:cTn id="17" dur="500" fill="hold"/>
+                                        <p:cTn id="17" dur="250" fill="hold"/>
                                         <p:tgtEl>
                                           <p:spTgt spid="56"/>
                                         </p:tgtEl>
@@ -13687,7 +13818,7 @@
                                       <p:cBhvr>
                                         <p:cTn id="21" dur="1" fill="hold">
                                           <p:stCondLst>
-                                            <p:cond delay="0"/>
+                                            <p:cond delay="499"/>
                                           </p:stCondLst>
                                         </p:cTn>
                                         <p:tgtEl>
@@ -13749,60 +13880,6 @@
                                   </p:childTnLst>
                                 </p:cTn>
                               </p:par>
-                              <p:par>
-                                <p:cTn id="26" presetID="1" presetClass="exit" presetSubtype="0" fill="hold" grpId="1" nodeType="withEffect">
-                                  <p:stCondLst>
-                                    <p:cond delay="500"/>
-                                  </p:stCondLst>
-                                  <p:childTnLst>
-                                    <p:set>
-                                      <p:cBhvr>
-                                        <p:cTn id="27" dur="1" fill="hold">
-                                          <p:stCondLst>
-                                            <p:cond delay="0"/>
-                                          </p:stCondLst>
-                                        </p:cTn>
-                                        <p:tgtEl>
-                                          <p:spTgt spid="47"/>
-                                        </p:tgtEl>
-                                        <p:attrNameLst>
-                                          <p:attrName>style.visibility</p:attrName>
-                                        </p:attrNameLst>
-                                      </p:cBhvr>
-                                      <p:to>
-                                        <p:strVal val="hidden"/>
-                                      </p:to>
-                                    </p:set>
-                                  </p:childTnLst>
-                                </p:cTn>
-                              </p:par>
-                              <p:par>
-                                <p:cTn id="28" presetID="1" presetClass="exit" presetSubtype="0" fill="hold" nodeType="withEffect">
-                                  <p:stCondLst>
-                                    <p:cond delay="500"/>
-                                  </p:stCondLst>
-                                  <p:childTnLst>
-                                    <p:set>
-                                      <p:cBhvr>
-                                        <p:cTn id="29" dur="1" fill="hold">
-                                          <p:stCondLst>
-                                            <p:cond delay="0"/>
-                                          </p:stCondLst>
-                                        </p:cTn>
-                                        <p:tgtEl>
-                                          <p:spTgt spid="1064"/>
-                                        </p:tgtEl>
-                                        <p:attrNameLst>
-                                          <p:attrName>style.visibility</p:attrName>
-                                        </p:attrNameLst>
-                                      </p:cBhvr>
-                                      <p:to>
-                                        <p:strVal val="hidden"/>
-                                      </p:to>
-                                    </p:set>
-                                  </p:childTnLst>
-                                </p:cTn>
-                              </p:par>
                             </p:childTnLst>
                           </p:cTn>
                         </p:par>
@@ -13810,71 +13887,26 @@
                     </p:cTn>
                   </p:par>
                   <p:par>
-                    <p:cTn id="30" fill="hold">
+                    <p:cTn id="26" fill="hold">
                       <p:stCondLst>
                         <p:cond delay="indefinite"/>
                       </p:stCondLst>
                       <p:childTnLst>
                         <p:par>
-                          <p:cTn id="31" fill="hold">
+                          <p:cTn id="27" fill="hold">
                             <p:stCondLst>
                               <p:cond delay="0"/>
                             </p:stCondLst>
                             <p:childTnLst>
                               <p:par>
-                                <p:cTn id="32" presetID="1" presetClass="entr" presetSubtype="0" fill="hold" nodeType="clickEffect">
+                                <p:cTn id="28" presetID="2" presetClass="entr" presetSubtype="4" fill="hold" grpId="0" nodeType="clickEffect">
                                   <p:stCondLst>
-                                    <p:cond delay="500"/>
+                                    <p:cond delay="250"/>
                                   </p:stCondLst>
                                   <p:childTnLst>
                                     <p:set>
                                       <p:cBhvr>
-                                        <p:cTn id="33" dur="1" fill="hold">
-                                          <p:stCondLst>
-                                            <p:cond delay="0"/>
-                                          </p:stCondLst>
-                                        </p:cTn>
-                                        <p:tgtEl>
-                                          <p:spTgt spid="1061"/>
-                                        </p:tgtEl>
-                                        <p:attrNameLst>
-                                          <p:attrName>style.visibility</p:attrName>
-                                        </p:attrNameLst>
-                                      </p:cBhvr>
-                                      <p:to>
-                                        <p:strVal val="visible"/>
-                                      </p:to>
-                                    </p:set>
-                                  </p:childTnLst>
-                                </p:cTn>
-                              </p:par>
-                            </p:childTnLst>
-                          </p:cTn>
-                        </p:par>
-                      </p:childTnLst>
-                    </p:cTn>
-                  </p:par>
-                  <p:par>
-                    <p:cTn id="34" fill="hold">
-                      <p:stCondLst>
-                        <p:cond delay="indefinite"/>
-                      </p:stCondLst>
-                      <p:childTnLst>
-                        <p:par>
-                          <p:cTn id="35" fill="hold">
-                            <p:stCondLst>
-                              <p:cond delay="0"/>
-                            </p:stCondLst>
-                            <p:childTnLst>
-                              <p:par>
-                                <p:cTn id="36" presetID="2" presetClass="entr" presetSubtype="4" fill="hold" grpId="0" nodeType="clickEffect">
-                                  <p:stCondLst>
-                                    <p:cond delay="500"/>
-                                  </p:stCondLst>
-                                  <p:childTnLst>
-                                    <p:set>
-                                      <p:cBhvr>
-                                        <p:cTn id="37" dur="1" fill="hold">
+                                        <p:cTn id="29" dur="1" fill="hold">
                                           <p:stCondLst>
                                             <p:cond delay="0"/>
                                           </p:stCondLst>
@@ -13892,7 +13924,7 @@
                                     </p:set>
                                     <p:anim calcmode="lin" valueType="num">
                                       <p:cBhvr additive="base">
-                                        <p:cTn id="38" dur="500" fill="hold"/>
+                                        <p:cTn id="30" dur="250" fill="hold"/>
                                         <p:tgtEl>
                                           <p:spTgt spid="57"/>
                                         </p:tgtEl>
@@ -13915,7 +13947,7 @@
                                     </p:anim>
                                     <p:anim calcmode="lin" valueType="num">
                                       <p:cBhvr additive="base">
-                                        <p:cTn id="39" dur="500" fill="hold"/>
+                                        <p:cTn id="31" dur="250" fill="hold"/>
                                         <p:tgtEl>
                                           <p:spTgt spid="57"/>
                                         </p:tgtEl>
@@ -13946,26 +13978,410 @@
                     </p:cTn>
                   </p:par>
                   <p:par>
-                    <p:cTn id="40" fill="hold">
+                    <p:cTn id="32" fill="hold">
                       <p:stCondLst>
                         <p:cond delay="indefinite"/>
                       </p:stCondLst>
                       <p:childTnLst>
                         <p:par>
-                          <p:cTn id="41" fill="hold">
+                          <p:cTn id="33" fill="hold">
                             <p:stCondLst>
                               <p:cond delay="0"/>
                             </p:stCondLst>
                             <p:childTnLst>
                               <p:par>
-                                <p:cTn id="42" presetID="53" presetClass="entr" presetSubtype="16" fill="hold" grpId="0" nodeType="clickEffect">
+                                <p:cTn id="34" presetID="2" presetClass="entr" presetSubtype="2" fill="hold" grpId="0" nodeType="clickEffect">
                                   <p:stCondLst>
                                     <p:cond delay="500"/>
                                   </p:stCondLst>
                                   <p:childTnLst>
                                     <p:set>
                                       <p:cBhvr>
-                                        <p:cTn id="43" dur="1" fill="hold">
+                                        <p:cTn id="35" dur="1" fill="hold">
+                                          <p:stCondLst>
+                                            <p:cond delay="0"/>
+                                          </p:stCondLst>
+                                        </p:cTn>
+                                        <p:tgtEl>
+                                          <p:spTgt spid="3"/>
+                                        </p:tgtEl>
+                                        <p:attrNameLst>
+                                          <p:attrName>style.visibility</p:attrName>
+                                        </p:attrNameLst>
+                                      </p:cBhvr>
+                                      <p:to>
+                                        <p:strVal val="visible"/>
+                                      </p:to>
+                                    </p:set>
+                                    <p:anim calcmode="lin" valueType="num">
+                                      <p:cBhvr additive="base">
+                                        <p:cTn id="36" dur="500" fill="hold"/>
+                                        <p:tgtEl>
+                                          <p:spTgt spid="3"/>
+                                        </p:tgtEl>
+                                        <p:attrNameLst>
+                                          <p:attrName>ppt_x</p:attrName>
+                                        </p:attrNameLst>
+                                      </p:cBhvr>
+                                      <p:tavLst>
+                                        <p:tav tm="0">
+                                          <p:val>
+                                            <p:strVal val="1+#ppt_w/2"/>
+                                          </p:val>
+                                        </p:tav>
+                                        <p:tav tm="100000">
+                                          <p:val>
+                                            <p:strVal val="#ppt_x"/>
+                                          </p:val>
+                                        </p:tav>
+                                      </p:tavLst>
+                                    </p:anim>
+                                    <p:anim calcmode="lin" valueType="num">
+                                      <p:cBhvr additive="base">
+                                        <p:cTn id="37" dur="500" fill="hold"/>
+                                        <p:tgtEl>
+                                          <p:spTgt spid="3"/>
+                                        </p:tgtEl>
+                                        <p:attrNameLst>
+                                          <p:attrName>ppt_y</p:attrName>
+                                        </p:attrNameLst>
+                                      </p:cBhvr>
+                                      <p:tavLst>
+                                        <p:tav tm="0">
+                                          <p:val>
+                                            <p:strVal val="#ppt_y"/>
+                                          </p:val>
+                                        </p:tav>
+                                        <p:tav tm="100000">
+                                          <p:val>
+                                            <p:strVal val="#ppt_y"/>
+                                          </p:val>
+                                        </p:tav>
+                                      </p:tavLst>
+                                    </p:anim>
+                                  </p:childTnLst>
+                                </p:cTn>
+                              </p:par>
+                              <p:par>
+                                <p:cTn id="38" presetID="1" presetClass="exit" presetSubtype="0" fill="hold" grpId="1" nodeType="withEffect">
+                                  <p:stCondLst>
+                                    <p:cond delay="0"/>
+                                  </p:stCondLst>
+                                  <p:childTnLst>
+                                    <p:set>
+                                      <p:cBhvr>
+                                        <p:cTn id="39" dur="1" fill="hold">
+                                          <p:stCondLst>
+                                            <p:cond delay="0"/>
+                                          </p:stCondLst>
+                                        </p:cTn>
+                                        <p:tgtEl>
+                                          <p:spTgt spid="47"/>
+                                        </p:tgtEl>
+                                        <p:attrNameLst>
+                                          <p:attrName>style.visibility</p:attrName>
+                                        </p:attrNameLst>
+                                      </p:cBhvr>
+                                      <p:to>
+                                        <p:strVal val="hidden"/>
+                                      </p:to>
+                                    </p:set>
+                                  </p:childTnLst>
+                                </p:cTn>
+                              </p:par>
+                              <p:par>
+                                <p:cTn id="40" presetID="1" presetClass="exit" presetSubtype="0" fill="hold" nodeType="withEffect">
+                                  <p:stCondLst>
+                                    <p:cond delay="500"/>
+                                  </p:stCondLst>
+                                  <p:childTnLst>
+                                    <p:set>
+                                      <p:cBhvr>
+                                        <p:cTn id="41" dur="1" fill="hold">
+                                          <p:stCondLst>
+                                            <p:cond delay="499"/>
+                                          </p:stCondLst>
+                                        </p:cTn>
+                                        <p:tgtEl>
+                                          <p:spTgt spid="1064"/>
+                                        </p:tgtEl>
+                                        <p:attrNameLst>
+                                          <p:attrName>style.visibility</p:attrName>
+                                        </p:attrNameLst>
+                                      </p:cBhvr>
+                                      <p:to>
+                                        <p:strVal val="hidden"/>
+                                      </p:to>
+                                    </p:set>
+                                  </p:childTnLst>
+                                </p:cTn>
+                              </p:par>
+                            </p:childTnLst>
+                          </p:cTn>
+                        </p:par>
+                      </p:childTnLst>
+                    </p:cTn>
+                  </p:par>
+                  <p:par>
+                    <p:cTn id="42" fill="hold">
+                      <p:stCondLst>
+                        <p:cond delay="indefinite"/>
+                      </p:stCondLst>
+                      <p:childTnLst>
+                        <p:par>
+                          <p:cTn id="43" fill="hold">
+                            <p:stCondLst>
+                              <p:cond delay="0"/>
+                            </p:stCondLst>
+                            <p:childTnLst>
+                              <p:par>
+                                <p:cTn id="44" presetID="2" presetClass="entr" presetSubtype="2" fill="hold" nodeType="clickEffect">
+                                  <p:stCondLst>
+                                    <p:cond delay="500"/>
+                                  </p:stCondLst>
+                                  <p:childTnLst>
+                                    <p:set>
+                                      <p:cBhvr>
+                                        <p:cTn id="45" dur="1" fill="hold">
+                                          <p:stCondLst>
+                                            <p:cond delay="0"/>
+                                          </p:stCondLst>
+                                        </p:cTn>
+                                        <p:tgtEl>
+                                          <p:spTgt spid="5">
+                                            <p:txEl>
+                                              <p:pRg st="0" end="0"/>
+                                            </p:txEl>
+                                          </p:spTgt>
+                                        </p:tgtEl>
+                                        <p:attrNameLst>
+                                          <p:attrName>style.visibility</p:attrName>
+                                        </p:attrNameLst>
+                                      </p:cBhvr>
+                                      <p:to>
+                                        <p:strVal val="visible"/>
+                                      </p:to>
+                                    </p:set>
+                                    <p:anim calcmode="lin" valueType="num">
+                                      <p:cBhvr additive="base">
+                                        <p:cTn id="46" dur="500" fill="hold"/>
+                                        <p:tgtEl>
+                                          <p:spTgt spid="5">
+                                            <p:txEl>
+                                              <p:pRg st="0" end="0"/>
+                                            </p:txEl>
+                                          </p:spTgt>
+                                        </p:tgtEl>
+                                        <p:attrNameLst>
+                                          <p:attrName>ppt_x</p:attrName>
+                                        </p:attrNameLst>
+                                      </p:cBhvr>
+                                      <p:tavLst>
+                                        <p:tav tm="0">
+                                          <p:val>
+                                            <p:strVal val="1+#ppt_w/2"/>
+                                          </p:val>
+                                        </p:tav>
+                                        <p:tav tm="100000">
+                                          <p:val>
+                                            <p:strVal val="#ppt_x"/>
+                                          </p:val>
+                                        </p:tav>
+                                      </p:tavLst>
+                                    </p:anim>
+                                    <p:anim calcmode="lin" valueType="num">
+                                      <p:cBhvr additive="base">
+                                        <p:cTn id="47" dur="500" fill="hold"/>
+                                        <p:tgtEl>
+                                          <p:spTgt spid="5">
+                                            <p:txEl>
+                                              <p:pRg st="0" end="0"/>
+                                            </p:txEl>
+                                          </p:spTgt>
+                                        </p:tgtEl>
+                                        <p:attrNameLst>
+                                          <p:attrName>ppt_y</p:attrName>
+                                        </p:attrNameLst>
+                                      </p:cBhvr>
+                                      <p:tavLst>
+                                        <p:tav tm="0">
+                                          <p:val>
+                                            <p:strVal val="#ppt_y"/>
+                                          </p:val>
+                                        </p:tav>
+                                        <p:tav tm="100000">
+                                          <p:val>
+                                            <p:strVal val="#ppt_y"/>
+                                          </p:val>
+                                        </p:tav>
+                                      </p:tavLst>
+                                    </p:anim>
+                                  </p:childTnLst>
+                                </p:cTn>
+                              </p:par>
+                            </p:childTnLst>
+                          </p:cTn>
+                        </p:par>
+                      </p:childTnLst>
+                    </p:cTn>
+                  </p:par>
+                  <p:par>
+                    <p:cTn id="48" fill="hold">
+                      <p:stCondLst>
+                        <p:cond delay="indefinite"/>
+                      </p:stCondLst>
+                      <p:childTnLst>
+                        <p:par>
+                          <p:cTn id="49" fill="hold">
+                            <p:stCondLst>
+                              <p:cond delay="0"/>
+                            </p:stCondLst>
+                            <p:childTnLst>
+                              <p:par>
+                                <p:cTn id="50" presetID="2" presetClass="entr" presetSubtype="2" fill="hold" grpId="0" nodeType="clickEffect">
+                                  <p:stCondLst>
+                                    <p:cond delay="500"/>
+                                  </p:stCondLst>
+                                  <p:childTnLst>
+                                    <p:set>
+                                      <p:cBhvr>
+                                        <p:cTn id="51" dur="1" fill="hold">
+                                          <p:stCondLst>
+                                            <p:cond delay="0"/>
+                                          </p:stCondLst>
+                                        </p:cTn>
+                                        <p:tgtEl>
+                                          <p:spTgt spid="4"/>
+                                        </p:tgtEl>
+                                        <p:attrNameLst>
+                                          <p:attrName>style.visibility</p:attrName>
+                                        </p:attrNameLst>
+                                      </p:cBhvr>
+                                      <p:to>
+                                        <p:strVal val="visible"/>
+                                      </p:to>
+                                    </p:set>
+                                    <p:anim calcmode="lin" valueType="num">
+                                      <p:cBhvr additive="base">
+                                        <p:cTn id="52" dur="500" fill="hold"/>
+                                        <p:tgtEl>
+                                          <p:spTgt spid="4"/>
+                                        </p:tgtEl>
+                                        <p:attrNameLst>
+                                          <p:attrName>ppt_x</p:attrName>
+                                        </p:attrNameLst>
+                                      </p:cBhvr>
+                                      <p:tavLst>
+                                        <p:tav tm="0">
+                                          <p:val>
+                                            <p:strVal val="1+#ppt_w/2"/>
+                                          </p:val>
+                                        </p:tav>
+                                        <p:tav tm="100000">
+                                          <p:val>
+                                            <p:strVal val="#ppt_x"/>
+                                          </p:val>
+                                        </p:tav>
+                                      </p:tavLst>
+                                    </p:anim>
+                                    <p:anim calcmode="lin" valueType="num">
+                                      <p:cBhvr additive="base">
+                                        <p:cTn id="53" dur="500" fill="hold"/>
+                                        <p:tgtEl>
+                                          <p:spTgt spid="4"/>
+                                        </p:tgtEl>
+                                        <p:attrNameLst>
+                                          <p:attrName>ppt_y</p:attrName>
+                                        </p:attrNameLst>
+                                      </p:cBhvr>
+                                      <p:tavLst>
+                                        <p:tav tm="0">
+                                          <p:val>
+                                            <p:strVal val="#ppt_y"/>
+                                          </p:val>
+                                        </p:tav>
+                                        <p:tav tm="100000">
+                                          <p:val>
+                                            <p:strVal val="#ppt_y"/>
+                                          </p:val>
+                                        </p:tav>
+                                      </p:tavLst>
+                                    </p:anim>
+                                  </p:childTnLst>
+                                </p:cTn>
+                              </p:par>
+                            </p:childTnLst>
+                          </p:cTn>
+                        </p:par>
+                      </p:childTnLst>
+                    </p:cTn>
+                  </p:par>
+                  <p:par>
+                    <p:cTn id="54" fill="hold">
+                      <p:stCondLst>
+                        <p:cond delay="indefinite"/>
+                      </p:stCondLst>
+                      <p:childTnLst>
+                        <p:par>
+                          <p:cTn id="55" fill="hold">
+                            <p:stCondLst>
+                              <p:cond delay="0"/>
+                            </p:stCondLst>
+                            <p:childTnLst>
+                              <p:par>
+                                <p:cTn id="56" presetID="1" presetClass="entr" presetSubtype="0" fill="hold" nodeType="clickEffect">
+                                  <p:stCondLst>
+                                    <p:cond delay="500"/>
+                                  </p:stCondLst>
+                                  <p:childTnLst>
+                                    <p:set>
+                                      <p:cBhvr>
+                                        <p:cTn id="57" dur="1" fill="hold">
+                                          <p:stCondLst>
+                                            <p:cond delay="0"/>
+                                          </p:stCondLst>
+                                        </p:cTn>
+                                        <p:tgtEl>
+                                          <p:spTgt spid="1061"/>
+                                        </p:tgtEl>
+                                        <p:attrNameLst>
+                                          <p:attrName>style.visibility</p:attrName>
+                                        </p:attrNameLst>
+                                      </p:cBhvr>
+                                      <p:to>
+                                        <p:strVal val="visible"/>
+                                      </p:to>
+                                    </p:set>
+                                  </p:childTnLst>
+                                </p:cTn>
+                              </p:par>
+                            </p:childTnLst>
+                          </p:cTn>
+                        </p:par>
+                      </p:childTnLst>
+                    </p:cTn>
+                  </p:par>
+                  <p:par>
+                    <p:cTn id="58" fill="hold">
+                      <p:stCondLst>
+                        <p:cond delay="indefinite"/>
+                      </p:stCondLst>
+                      <p:childTnLst>
+                        <p:par>
+                          <p:cTn id="59" fill="hold">
+                            <p:stCondLst>
+                              <p:cond delay="0"/>
+                            </p:stCondLst>
+                            <p:childTnLst>
+                              <p:par>
+                                <p:cTn id="60" presetID="6" presetClass="entr" presetSubtype="16" fill="hold" grpId="0" nodeType="clickEffect">
+                                  <p:stCondLst>
+                                    <p:cond delay="500"/>
+                                  </p:stCondLst>
+                                  <p:childTnLst>
+                                    <p:set>
+                                      <p:cBhvr>
+                                        <p:cTn id="61" dur="1" fill="hold">
                                           <p:stCondLst>
                                             <p:cond delay="0"/>
                                           </p:stCondLst>
@@ -13981,55 +14397,9 @@
                                         <p:strVal val="visible"/>
                                       </p:to>
                                     </p:set>
-                                    <p:anim calcmode="lin" valueType="num">
+                                    <p:animEffect transition="in" filter="circle(in)">
                                       <p:cBhvr>
-                                        <p:cTn id="44" dur="500" fill="hold"/>
-                                        <p:tgtEl>
-                                          <p:spTgt spid="54"/>
-                                        </p:tgtEl>
-                                        <p:attrNameLst>
-                                          <p:attrName>ppt_w</p:attrName>
-                                        </p:attrNameLst>
-                                      </p:cBhvr>
-                                      <p:tavLst>
-                                        <p:tav tm="0">
-                                          <p:val>
-                                            <p:fltVal val="0"/>
-                                          </p:val>
-                                        </p:tav>
-                                        <p:tav tm="100000">
-                                          <p:val>
-                                            <p:strVal val="#ppt_w"/>
-                                          </p:val>
-                                        </p:tav>
-                                      </p:tavLst>
-                                    </p:anim>
-                                    <p:anim calcmode="lin" valueType="num">
-                                      <p:cBhvr>
-                                        <p:cTn id="45" dur="500" fill="hold"/>
-                                        <p:tgtEl>
-                                          <p:spTgt spid="54"/>
-                                        </p:tgtEl>
-                                        <p:attrNameLst>
-                                          <p:attrName>ppt_h</p:attrName>
-                                        </p:attrNameLst>
-                                      </p:cBhvr>
-                                      <p:tavLst>
-                                        <p:tav tm="0">
-                                          <p:val>
-                                            <p:fltVal val="0"/>
-                                          </p:val>
-                                        </p:tav>
-                                        <p:tav tm="100000">
-                                          <p:val>
-                                            <p:strVal val="#ppt_h"/>
-                                          </p:val>
-                                        </p:tav>
-                                      </p:tavLst>
-                                    </p:anim>
-                                    <p:animEffect transition="in" filter="fade">
-                                      <p:cBhvr>
-                                        <p:cTn id="46" dur="500"/>
+                                        <p:cTn id="62" dur="1000"/>
                                         <p:tgtEl>
                                           <p:spTgt spid="54"/>
                                         </p:tgtEl>
@@ -14045,28 +14415,28 @@
                     </p:cTn>
                   </p:par>
                   <p:par>
-                    <p:cTn id="47" fill="hold">
+                    <p:cTn id="63" fill="hold">
                       <p:stCondLst>
                         <p:cond delay="indefinite"/>
                       </p:stCondLst>
                       <p:childTnLst>
                         <p:par>
-                          <p:cTn id="48" fill="hold">
+                          <p:cTn id="64" fill="hold">
                             <p:stCondLst>
                               <p:cond delay="0"/>
                             </p:stCondLst>
                             <p:childTnLst>
                               <p:par>
-                                <p:cTn id="49" presetID="1" presetClass="entr" presetSubtype="0" fill="hold" nodeType="clickEffect">
+                                <p:cTn id="65" presetID="1" presetClass="entr" presetSubtype="0" fill="hold" nodeType="clickEffect">
                                   <p:stCondLst>
                                     <p:cond delay="1000"/>
                                   </p:stCondLst>
                                   <p:childTnLst>
                                     <p:set>
                                       <p:cBhvr>
-                                        <p:cTn id="50" dur="1" fill="hold">
+                                        <p:cTn id="66" dur="1" fill="hold">
                                           <p:stCondLst>
-                                            <p:cond delay="249"/>
+                                            <p:cond delay="749"/>
                                           </p:stCondLst>
                                         </p:cTn>
                                         <p:tgtEl>
@@ -14090,71 +14460,26 @@
                     </p:cTn>
                   </p:par>
                   <p:par>
-                    <p:cTn id="51" fill="hold">
+                    <p:cTn id="67" fill="hold">
                       <p:stCondLst>
                         <p:cond delay="indefinite"/>
                       </p:stCondLst>
                       <p:childTnLst>
                         <p:par>
-                          <p:cTn id="52" fill="hold">
+                          <p:cTn id="68" fill="hold">
                             <p:stCondLst>
                               <p:cond delay="0"/>
                             </p:stCondLst>
                             <p:childTnLst>
                               <p:par>
-                                <p:cTn id="53" presetID="1" presetClass="exit" presetSubtype="0" fill="hold" nodeType="clickEffect">
-                                  <p:stCondLst>
-                                    <p:cond delay="1000"/>
-                                  </p:stCondLst>
-                                  <p:childTnLst>
-                                    <p:set>
-                                      <p:cBhvr>
-                                        <p:cTn id="54" dur="1" fill="hold">
-                                          <p:stCondLst>
-                                            <p:cond delay="249"/>
-                                          </p:stCondLst>
-                                        </p:cTn>
-                                        <p:tgtEl>
-                                          <p:spTgt spid="1070"/>
-                                        </p:tgtEl>
-                                        <p:attrNameLst>
-                                          <p:attrName>style.visibility</p:attrName>
-                                        </p:attrNameLst>
-                                      </p:cBhvr>
-                                      <p:to>
-                                        <p:strVal val="hidden"/>
-                                      </p:to>
-                                    </p:set>
-                                  </p:childTnLst>
-                                </p:cTn>
-                              </p:par>
-                            </p:childTnLst>
-                          </p:cTn>
-                        </p:par>
-                      </p:childTnLst>
-                    </p:cTn>
-                  </p:par>
-                  <p:par>
-                    <p:cTn id="55" fill="hold">
-                      <p:stCondLst>
-                        <p:cond delay="indefinite"/>
-                      </p:stCondLst>
-                      <p:childTnLst>
-                        <p:par>
-                          <p:cTn id="56" fill="hold">
-                            <p:stCondLst>
-                              <p:cond delay="0"/>
-                            </p:stCondLst>
-                            <p:childTnLst>
-                              <p:par>
-                                <p:cTn id="57" presetID="2" presetClass="entr" presetSubtype="4" fill="hold" grpId="0" nodeType="clickEffect">
+                                <p:cTn id="69" presetID="2" presetClass="entr" presetSubtype="4" fill="hold" grpId="0" nodeType="clickEffect">
                                   <p:stCondLst>
                                     <p:cond delay="500"/>
                                   </p:stCondLst>
                                   <p:childTnLst>
                                     <p:set>
                                       <p:cBhvr>
-                                        <p:cTn id="58" dur="1" fill="hold">
+                                        <p:cTn id="70" dur="1" fill="hold">
                                           <p:stCondLst>
                                             <p:cond delay="0"/>
                                           </p:stCondLst>
@@ -14172,7 +14497,7 @@
                                     </p:set>
                                     <p:anim calcmode="lin" valueType="num">
                                       <p:cBhvr additive="base">
-                                        <p:cTn id="59" dur="500" fill="hold"/>
+                                        <p:cTn id="71" dur="500" fill="hold"/>
                                         <p:tgtEl>
                                           <p:spTgt spid="59"/>
                                         </p:tgtEl>
@@ -14195,7 +14520,7 @@
                                     </p:anim>
                                     <p:anim calcmode="lin" valueType="num">
                                       <p:cBhvr additive="base">
-                                        <p:cTn id="60" dur="500" fill="hold"/>
+                                        <p:cTn id="72" dur="500" fill="hold"/>
                                         <p:tgtEl>
                                           <p:spTgt spid="59"/>
                                         </p:tgtEl>
@@ -14226,26 +14551,71 @@
                     </p:cTn>
                   </p:par>
                   <p:par>
-                    <p:cTn id="61" fill="hold">
+                    <p:cTn id="73" fill="hold">
                       <p:stCondLst>
                         <p:cond delay="indefinite"/>
                       </p:stCondLst>
                       <p:childTnLst>
                         <p:par>
-                          <p:cTn id="62" fill="hold">
+                          <p:cTn id="74" fill="hold">
                             <p:stCondLst>
                               <p:cond delay="0"/>
                             </p:stCondLst>
                             <p:childTnLst>
                               <p:par>
-                                <p:cTn id="63" presetID="6" presetClass="entr" presetSubtype="16" fill="hold" nodeType="clickEffect">
+                                <p:cTn id="75" presetID="1" presetClass="exit" presetSubtype="0" fill="hold" nodeType="clickEffect">
                                   <p:stCondLst>
                                     <p:cond delay="500"/>
                                   </p:stCondLst>
                                   <p:childTnLst>
                                     <p:set>
                                       <p:cBhvr>
-                                        <p:cTn id="64" dur="1" fill="hold">
+                                        <p:cTn id="76" dur="1" fill="hold">
+                                          <p:stCondLst>
+                                            <p:cond delay="499"/>
+                                          </p:stCondLst>
+                                        </p:cTn>
+                                        <p:tgtEl>
+                                          <p:spTgt spid="1070"/>
+                                        </p:tgtEl>
+                                        <p:attrNameLst>
+                                          <p:attrName>style.visibility</p:attrName>
+                                        </p:attrNameLst>
+                                      </p:cBhvr>
+                                      <p:to>
+                                        <p:strVal val="hidden"/>
+                                      </p:to>
+                                    </p:set>
+                                  </p:childTnLst>
+                                </p:cTn>
+                              </p:par>
+                            </p:childTnLst>
+                          </p:cTn>
+                        </p:par>
+                      </p:childTnLst>
+                    </p:cTn>
+                  </p:par>
+                  <p:par>
+                    <p:cTn id="77" fill="hold">
+                      <p:stCondLst>
+                        <p:cond delay="indefinite"/>
+                      </p:stCondLst>
+                      <p:childTnLst>
+                        <p:par>
+                          <p:cTn id="78" fill="hold">
+                            <p:stCondLst>
+                              <p:cond delay="0"/>
+                            </p:stCondLst>
+                            <p:childTnLst>
+                              <p:par>
+                                <p:cTn id="79" presetID="6" presetClass="entr" presetSubtype="16" fill="hold" nodeType="clickEffect">
+                                  <p:stCondLst>
+                                    <p:cond delay="500"/>
+                                  </p:stCondLst>
+                                  <p:childTnLst>
+                                    <p:set>
+                                      <p:cBhvr>
+                                        <p:cTn id="80" dur="1" fill="hold">
                                           <p:stCondLst>
                                             <p:cond delay="0"/>
                                           </p:stCondLst>
@@ -14263,7 +14633,7 @@
                                     </p:set>
                                     <p:animEffect transition="in" filter="circle(in)">
                                       <p:cBhvr>
-                                        <p:cTn id="65" dur="2000"/>
+                                        <p:cTn id="81" dur="2000"/>
                                         <p:tgtEl>
                                           <p:spTgt spid="1085"/>
                                         </p:tgtEl>
@@ -14279,26 +14649,79 @@
                     </p:cTn>
                   </p:par>
                   <p:par>
-                    <p:cTn id="66" fill="hold">
+                    <p:cTn id="82" fill="hold">
                       <p:stCondLst>
                         <p:cond delay="indefinite"/>
                       </p:stCondLst>
                       <p:childTnLst>
                         <p:par>
-                          <p:cTn id="67" fill="hold">
+                          <p:cTn id="83" fill="hold">
                             <p:stCondLst>
                               <p:cond delay="0"/>
                             </p:stCondLst>
                             <p:childTnLst>
                               <p:par>
-                                <p:cTn id="68" presetID="1" presetClass="exit" presetSubtype="0" fill="hold" nodeType="clickEffect">
+                                <p:cTn id="84" presetID="6" presetClass="entr" presetSubtype="16" fill="hold" nodeType="clickEffect">
                                   <p:stCondLst>
                                     <p:cond delay="500"/>
                                   </p:stCondLst>
                                   <p:childTnLst>
                                     <p:set>
                                       <p:cBhvr>
-                                        <p:cTn id="69" dur="1" fill="hold">
+                                        <p:cTn id="85" dur="1" fill="hold">
+                                          <p:stCondLst>
+                                            <p:cond delay="0"/>
+                                          </p:stCondLst>
+                                        </p:cTn>
+                                        <p:tgtEl>
+                                          <p:spTgt spid="1096"/>
+                                        </p:tgtEl>
+                                        <p:attrNameLst>
+                                          <p:attrName>style.visibility</p:attrName>
+                                        </p:attrNameLst>
+                                      </p:cBhvr>
+                                      <p:to>
+                                        <p:strVal val="visible"/>
+                                      </p:to>
+                                    </p:set>
+                                    <p:animEffect transition="in" filter="circle(in)">
+                                      <p:cBhvr>
+                                        <p:cTn id="86" dur="2000"/>
+                                        <p:tgtEl>
+                                          <p:spTgt spid="1096"/>
+                                        </p:tgtEl>
+                                      </p:cBhvr>
+                                    </p:animEffect>
+                                  </p:childTnLst>
+                                </p:cTn>
+                              </p:par>
+                            </p:childTnLst>
+                          </p:cTn>
+                        </p:par>
+                      </p:childTnLst>
+                    </p:cTn>
+                  </p:par>
+                  <p:par>
+                    <p:cTn id="87" fill="hold">
+                      <p:stCondLst>
+                        <p:cond delay="indefinite"/>
+                      </p:stCondLst>
+                      <p:childTnLst>
+                        <p:par>
+                          <p:cTn id="88" fill="hold">
+                            <p:stCondLst>
+                              <p:cond delay="0"/>
+                            </p:stCondLst>
+                            <p:childTnLst>
+                              <p:par>
+                                <p:cTn id="89" presetID="1" presetClass="exit" presetSubtype="0" fill="hold" nodeType="clickEffect">
+                                  <p:stCondLst>
+                                    <p:cond delay="500"/>
+                                  </p:stCondLst>
+                                  <p:childTnLst>
+                                    <p:set>
+                                      <p:cBhvr>
+                                        <p:cTn id="90" dur="1" fill="hold">
                                           <p:stCondLst>
                                             <p:cond delay="0"/>
                                           </p:stCondLst>
@@ -14324,79 +14747,26 @@
                     </p:cTn>
                   </p:par>
                   <p:par>
-                    <p:cTn id="70" fill="hold">
+                    <p:cTn id="91" fill="hold">
                       <p:stCondLst>
                         <p:cond delay="indefinite"/>
                       </p:stCondLst>
                       <p:childTnLst>
                         <p:par>
-                          <p:cTn id="71" fill="hold">
+                          <p:cTn id="92" fill="hold">
                             <p:stCondLst>
                               <p:cond delay="0"/>
                             </p:stCondLst>
                             <p:childTnLst>
                               <p:par>
-                                <p:cTn id="72" presetID="6" presetClass="entr" presetSubtype="16" fill="hold" nodeType="clickEffect">
+                                <p:cTn id="93" presetID="2" presetClass="entr" presetSubtype="4" fill="hold" grpId="0" nodeType="clickEffect">
                                   <p:stCondLst>
                                     <p:cond delay="500"/>
                                   </p:stCondLst>
                                   <p:childTnLst>
                                     <p:set>
                                       <p:cBhvr>
-                                        <p:cTn id="73" dur="1" fill="hold">
-                                          <p:stCondLst>
-                                            <p:cond delay="0"/>
-                                          </p:stCondLst>
-                                        </p:cTn>
-                                        <p:tgtEl>
-                                          <p:spTgt spid="1096"/>
-                                        </p:tgtEl>
-                                        <p:attrNameLst>
-                                          <p:attrName>style.visibility</p:attrName>
-                                        </p:attrNameLst>
-                                      </p:cBhvr>
-                                      <p:to>
-                                        <p:strVal val="visible"/>
-                                      </p:to>
-                                    </p:set>
-                                    <p:animEffect transition="in" filter="circle(in)">
-                                      <p:cBhvr>
-                                        <p:cTn id="74" dur="2000"/>
-                                        <p:tgtEl>
-                                          <p:spTgt spid="1096"/>
-                                        </p:tgtEl>
-                                      </p:cBhvr>
-                                    </p:animEffect>
-                                  </p:childTnLst>
-                                </p:cTn>
-                              </p:par>
-                            </p:childTnLst>
-                          </p:cTn>
-                        </p:par>
-                      </p:childTnLst>
-                    </p:cTn>
-                  </p:par>
-                  <p:par>
-                    <p:cTn id="75" fill="hold">
-                      <p:stCondLst>
-                        <p:cond delay="indefinite"/>
-                      </p:stCondLst>
-                      <p:childTnLst>
-                        <p:par>
-                          <p:cTn id="76" fill="hold">
-                            <p:stCondLst>
-                              <p:cond delay="0"/>
-                            </p:stCondLst>
-                            <p:childTnLst>
-                              <p:par>
-                                <p:cTn id="77" presetID="2" presetClass="entr" presetSubtype="4" fill="hold" grpId="0" nodeType="clickEffect">
-                                  <p:stCondLst>
-                                    <p:cond delay="500"/>
-                                  </p:stCondLst>
-                                  <p:childTnLst>
-                                    <p:set>
-                                      <p:cBhvr>
-                                        <p:cTn id="78" dur="1" fill="hold">
+                                        <p:cTn id="94" dur="1" fill="hold">
                                           <p:stCondLst>
                                             <p:cond delay="0"/>
                                           </p:stCondLst>
@@ -14414,7 +14784,7 @@
                                     </p:set>
                                     <p:anim calcmode="lin" valueType="num">
                                       <p:cBhvr additive="base">
-                                        <p:cTn id="79" dur="500" fill="hold"/>
+                                        <p:cTn id="95" dur="500" fill="hold"/>
                                         <p:tgtEl>
                                           <p:spTgt spid="60"/>
                                         </p:tgtEl>
@@ -14437,7 +14807,7 @@
                                     </p:anim>
                                     <p:anim calcmode="lin" valueType="num">
                                       <p:cBhvr additive="base">
-                                        <p:cTn id="80" dur="500" fill="hold"/>
+                                        <p:cTn id="96" dur="500" fill="hold"/>
                                         <p:tgtEl>
                                           <p:spTgt spid="60"/>
                                         </p:tgtEl>
@@ -14468,26 +14838,26 @@
                     </p:cTn>
                   </p:par>
                   <p:par>
-                    <p:cTn id="81" fill="hold">
+                    <p:cTn id="97" fill="hold">
                       <p:stCondLst>
                         <p:cond delay="indefinite"/>
                       </p:stCondLst>
                       <p:childTnLst>
                         <p:par>
-                          <p:cTn id="82" fill="hold">
+                          <p:cTn id="98" fill="hold">
                             <p:stCondLst>
                               <p:cond delay="0"/>
                             </p:stCondLst>
                             <p:childTnLst>
                               <p:par>
-                                <p:cTn id="83" presetID="6" presetClass="exit" presetSubtype="32" fill="hold" nodeType="clickEffect">
+                                <p:cTn id="99" presetID="6" presetClass="exit" presetSubtype="32" fill="hold" nodeType="clickEffect">
                                   <p:stCondLst>
                                     <p:cond delay="500"/>
                                   </p:stCondLst>
                                   <p:childTnLst>
                                     <p:animEffect transition="out" filter="circle(out)">
                                       <p:cBhvr>
-                                        <p:cTn id="84" dur="2000"/>
+                                        <p:cTn id="100" dur="2000"/>
                                         <p:tgtEl>
                                           <p:spTgt spid="1061"/>
                                         </p:tgtEl>
@@ -14495,7 +14865,7 @@
                                     </p:animEffect>
                                     <p:set>
                                       <p:cBhvr>
-                                        <p:cTn id="85" dur="1" fill="hold">
+                                        <p:cTn id="101" dur="1" fill="hold">
                                           <p:stCondLst>
                                             <p:cond delay="1999"/>
                                           </p:stCondLst>
@@ -14521,26 +14891,26 @@
                     </p:cTn>
                   </p:par>
                   <p:par>
-                    <p:cTn id="86" fill="hold">
+                    <p:cTn id="102" fill="hold">
                       <p:stCondLst>
                         <p:cond delay="indefinite"/>
                       </p:stCondLst>
                       <p:childTnLst>
                         <p:par>
-                          <p:cTn id="87" fill="hold">
+                          <p:cTn id="103" fill="hold">
                             <p:stCondLst>
                               <p:cond delay="0"/>
                             </p:stCondLst>
                             <p:childTnLst>
                               <p:par>
-                                <p:cTn id="88" presetID="1" presetClass="exit" presetSubtype="0" fill="hold" grpId="1" nodeType="clickEffect">
+                                <p:cTn id="104" presetID="1" presetClass="exit" presetSubtype="0" fill="hold" grpId="1" nodeType="clickEffect">
                                   <p:stCondLst>
                                     <p:cond delay="500"/>
                                   </p:stCondLst>
                                   <p:childTnLst>
                                     <p:set>
                                       <p:cBhvr>
-                                        <p:cTn id="89" dur="1" fill="hold">
+                                        <p:cTn id="105" dur="1" fill="hold">
                                           <p:stCondLst>
                                             <p:cond delay="0"/>
                                           </p:stCondLst>
@@ -14566,26 +14936,26 @@
                     </p:cTn>
                   </p:par>
                   <p:par>
-                    <p:cTn id="90" fill="hold">
+                    <p:cTn id="106" fill="hold">
                       <p:stCondLst>
                         <p:cond delay="indefinite"/>
                       </p:stCondLst>
                       <p:childTnLst>
                         <p:par>
-                          <p:cTn id="91" fill="hold">
+                          <p:cTn id="107" fill="hold">
                             <p:stCondLst>
                               <p:cond delay="0"/>
                             </p:stCondLst>
                             <p:childTnLst>
                               <p:par>
-                                <p:cTn id="92" presetID="1" presetClass="entr" presetSubtype="0" fill="hold" grpId="0" nodeType="clickEffect">
+                                <p:cTn id="108" presetID="1" presetClass="entr" presetSubtype="0" fill="hold" grpId="0" nodeType="clickEffect">
                                   <p:stCondLst>
                                     <p:cond delay="500"/>
                                   </p:stCondLst>
                                   <p:childTnLst>
                                     <p:set>
                                       <p:cBhvr>
-                                        <p:cTn id="93" dur="1" fill="hold">
+                                        <p:cTn id="109" dur="1" fill="hold">
                                           <p:stCondLst>
                                             <p:cond delay="0"/>
                                           </p:stCondLst>
@@ -14611,26 +14981,26 @@
                     </p:cTn>
                   </p:par>
                   <p:par>
-                    <p:cTn id="94" fill="hold">
+                    <p:cTn id="110" fill="hold">
                       <p:stCondLst>
                         <p:cond delay="indefinite"/>
                       </p:stCondLst>
                       <p:childTnLst>
                         <p:par>
-                          <p:cTn id="95" fill="hold">
+                          <p:cTn id="111" fill="hold">
                             <p:stCondLst>
                               <p:cond delay="0"/>
                             </p:stCondLst>
                             <p:childTnLst>
                               <p:par>
-                                <p:cTn id="96" presetID="2" presetClass="entr" presetSubtype="4" fill="hold" grpId="0" nodeType="clickEffect">
+                                <p:cTn id="112" presetID="2" presetClass="entr" presetSubtype="4" fill="hold" grpId="0" nodeType="clickEffect">
                                   <p:stCondLst>
                                     <p:cond delay="500"/>
                                   </p:stCondLst>
                                   <p:childTnLst>
                                     <p:set>
                                       <p:cBhvr>
-                                        <p:cTn id="97" dur="1" fill="hold">
+                                        <p:cTn id="113" dur="1" fill="hold">
                                           <p:stCondLst>
                                             <p:cond delay="0"/>
                                           </p:stCondLst>
@@ -14648,7 +15018,7 @@
                                     </p:set>
                                     <p:anim calcmode="lin" valueType="num">
                                       <p:cBhvr additive="base">
-                                        <p:cTn id="98" dur="500" fill="hold"/>
+                                        <p:cTn id="114" dur="500" fill="hold"/>
                                         <p:tgtEl>
                                           <p:spTgt spid="61"/>
                                         </p:tgtEl>
@@ -14671,7 +15041,7 @@
                                     </p:anim>
                                     <p:anim calcmode="lin" valueType="num">
                                       <p:cBhvr additive="base">
-                                        <p:cTn id="99" dur="500" fill="hold"/>
+                                        <p:cTn id="115" dur="500" fill="hold"/>
                                         <p:tgtEl>
                                           <p:spTgt spid="61"/>
                                         </p:tgtEl>
@@ -14702,26 +15072,26 @@
                     </p:cTn>
                   </p:par>
                   <p:par>
-                    <p:cTn id="100" fill="hold">
+                    <p:cTn id="116" fill="hold">
                       <p:stCondLst>
                         <p:cond delay="indefinite"/>
                       </p:stCondLst>
                       <p:childTnLst>
                         <p:par>
-                          <p:cTn id="101" fill="hold">
+                          <p:cTn id="117" fill="hold">
                             <p:stCondLst>
                               <p:cond delay="0"/>
                             </p:stCondLst>
                             <p:childTnLst>
                               <p:par>
-                                <p:cTn id="102" presetID="16" presetClass="entr" presetSubtype="21" fill="hold" nodeType="clickEffect">
+                                <p:cTn id="118" presetID="16" presetClass="entr" presetSubtype="21" fill="hold" nodeType="clickEffect">
                                   <p:stCondLst>
                                     <p:cond delay="500"/>
                                   </p:stCondLst>
                                   <p:childTnLst>
                                     <p:set>
                                       <p:cBhvr>
-                                        <p:cTn id="103" dur="1" fill="hold">
+                                        <p:cTn id="119" dur="1" fill="hold">
                                           <p:stCondLst>
                                             <p:cond delay="0"/>
                                           </p:stCondLst>
@@ -14739,7 +15109,7 @@
                                     </p:set>
                                     <p:animEffect transition="in" filter="barn(inVertical)">
                                       <p:cBhvr>
-                                        <p:cTn id="104" dur="500"/>
+                                        <p:cTn id="120" dur="500"/>
                                         <p:tgtEl>
                                           <p:spTgt spid="1083"/>
                                         </p:tgtEl>
@@ -14755,26 +15125,26 @@
                     </p:cTn>
                   </p:par>
                   <p:par>
-                    <p:cTn id="105" fill="hold">
+                    <p:cTn id="121" fill="hold">
                       <p:stCondLst>
                         <p:cond delay="indefinite"/>
                       </p:stCondLst>
                       <p:childTnLst>
                         <p:par>
-                          <p:cTn id="106" fill="hold">
+                          <p:cTn id="122" fill="hold">
                             <p:stCondLst>
                               <p:cond delay="0"/>
                             </p:stCondLst>
                             <p:childTnLst>
                               <p:par>
-                                <p:cTn id="107" presetID="2" presetClass="entr" presetSubtype="4" fill="hold" grpId="0" nodeType="clickEffect">
+                                <p:cTn id="123" presetID="2" presetClass="entr" presetSubtype="4" fill="hold" grpId="0" nodeType="clickEffect">
                                   <p:stCondLst>
                                     <p:cond delay="500"/>
                                   </p:stCondLst>
                                   <p:childTnLst>
                                     <p:set>
                                       <p:cBhvr>
-                                        <p:cTn id="108" dur="1" fill="hold">
+                                        <p:cTn id="124" dur="1" fill="hold">
                                           <p:stCondLst>
                                             <p:cond delay="0"/>
                                           </p:stCondLst>
@@ -14792,7 +15162,7 @@
                                     </p:set>
                                     <p:anim calcmode="lin" valueType="num">
                                       <p:cBhvr additive="base">
-                                        <p:cTn id="109" dur="500" fill="hold"/>
+                                        <p:cTn id="125" dur="500" fill="hold"/>
                                         <p:tgtEl>
                                           <p:spTgt spid="62"/>
                                         </p:tgtEl>
@@ -14815,7 +15185,7 @@
                                     </p:anim>
                                     <p:anim calcmode="lin" valueType="num">
                                       <p:cBhvr additive="base">
-                                        <p:cTn id="110" dur="500" fill="hold"/>
+                                        <p:cTn id="126" dur="500" fill="hold"/>
                                         <p:tgtEl>
                                           <p:spTgt spid="62"/>
                                         </p:tgtEl>
@@ -14846,26 +15216,26 @@
                     </p:cTn>
                   </p:par>
                   <p:par>
-                    <p:cTn id="111" fill="hold">
+                    <p:cTn id="127" fill="hold">
                       <p:stCondLst>
                         <p:cond delay="indefinite"/>
                       </p:stCondLst>
                       <p:childTnLst>
                         <p:par>
-                          <p:cTn id="112" fill="hold">
+                          <p:cTn id="128" fill="hold">
                             <p:stCondLst>
                               <p:cond delay="0"/>
                             </p:stCondLst>
                             <p:childTnLst>
                               <p:par>
-                                <p:cTn id="113" presetID="1" presetClass="exit" presetSubtype="0" fill="hold" grpId="1" nodeType="clickEffect">
+                                <p:cTn id="129" presetID="1" presetClass="exit" presetSubtype="0" fill="hold" grpId="1" nodeType="clickEffect">
                                   <p:stCondLst>
                                     <p:cond delay="500"/>
                                   </p:stCondLst>
                                   <p:childTnLst>
                                     <p:set>
                                       <p:cBhvr>
-                                        <p:cTn id="114" dur="1" fill="hold">
+                                        <p:cTn id="130" dur="1" fill="hold">
                                           <p:stCondLst>
                                             <p:cond delay="0"/>
                                           </p:stCondLst>
@@ -14891,26 +15261,26 @@
                     </p:cTn>
                   </p:par>
                   <p:par>
-                    <p:cTn id="115" fill="hold">
+                    <p:cTn id="131" fill="hold">
                       <p:stCondLst>
                         <p:cond delay="indefinite"/>
                       </p:stCondLst>
                       <p:childTnLst>
                         <p:par>
-                          <p:cTn id="116" fill="hold">
+                          <p:cTn id="132" fill="hold">
                             <p:stCondLst>
                               <p:cond delay="0"/>
                             </p:stCondLst>
                             <p:childTnLst>
                               <p:par>
-                                <p:cTn id="117" presetID="1" presetClass="exit" presetSubtype="0" fill="hold" nodeType="clickEffect">
+                                <p:cTn id="133" presetID="1" presetClass="exit" presetSubtype="0" fill="hold" nodeType="clickEffect">
                                   <p:stCondLst>
                                     <p:cond delay="500"/>
                                   </p:stCondLst>
                                   <p:childTnLst>
                                     <p:set>
                                       <p:cBhvr>
-                                        <p:cTn id="118" dur="1" fill="hold">
+                                        <p:cTn id="134" dur="1" fill="hold">
                                           <p:stCondLst>
                                             <p:cond delay="0"/>
                                           </p:stCondLst>
@@ -14936,26 +15306,26 @@
                     </p:cTn>
                   </p:par>
                   <p:par>
-                    <p:cTn id="119" fill="hold">
+                    <p:cTn id="135" fill="hold">
                       <p:stCondLst>
                         <p:cond delay="indefinite"/>
                       </p:stCondLst>
                       <p:childTnLst>
                         <p:par>
-                          <p:cTn id="120" fill="hold">
+                          <p:cTn id="136" fill="hold">
                             <p:stCondLst>
                               <p:cond delay="0"/>
                             </p:stCondLst>
                             <p:childTnLst>
                               <p:par>
-                                <p:cTn id="121" presetID="1" presetClass="entr" presetSubtype="0" fill="hold" nodeType="clickEffect">
+                                <p:cTn id="137" presetID="1" presetClass="entr" presetSubtype="0" fill="hold" nodeType="clickEffect">
                                   <p:stCondLst>
                                     <p:cond delay="500"/>
                                   </p:stCondLst>
                                   <p:childTnLst>
                                     <p:set>
                                       <p:cBhvr>
-                                        <p:cTn id="122" dur="1" fill="hold">
+                                        <p:cTn id="138" dur="1" fill="hold">
                                           <p:stCondLst>
                                             <p:cond delay="0"/>
                                           </p:stCondLst>
@@ -14981,26 +15351,26 @@
                     </p:cTn>
                   </p:par>
                   <p:par>
-                    <p:cTn id="123" fill="hold">
+                    <p:cTn id="139" fill="hold">
                       <p:stCondLst>
                         <p:cond delay="indefinite"/>
                       </p:stCondLst>
                       <p:childTnLst>
                         <p:par>
-                          <p:cTn id="124" fill="hold">
+                          <p:cTn id="140" fill="hold">
                             <p:stCondLst>
                               <p:cond delay="0"/>
                             </p:stCondLst>
                             <p:childTnLst>
                               <p:par>
-                                <p:cTn id="125" presetID="6" presetClass="entr" presetSubtype="16" fill="hold" grpId="0" nodeType="clickEffect">
+                                <p:cTn id="141" presetID="14" presetClass="entr" presetSubtype="10" fill="hold" grpId="0" nodeType="clickEffect">
                                   <p:stCondLst>
-                                    <p:cond delay="500"/>
+                                    <p:cond delay="1000"/>
                                   </p:stCondLst>
                                   <p:childTnLst>
                                     <p:set>
                                       <p:cBhvr>
-                                        <p:cTn id="126" dur="1" fill="hold">
+                                        <p:cTn id="142" dur="1" fill="hold">
                                           <p:stCondLst>
                                             <p:cond delay="0"/>
                                           </p:stCondLst>
@@ -15016,9 +15386,9 @@
                                         <p:strVal val="visible"/>
                                       </p:to>
                                     </p:set>
-                                    <p:animEffect transition="in" filter="circle(in)">
+                                    <p:animEffect transition="in" filter="randombar(horizontal)">
                                       <p:cBhvr>
-                                        <p:cTn id="127" dur="2000"/>
+                                        <p:cTn id="143" dur="500"/>
                                         <p:tgtEl>
                                           <p:spTgt spid="45"/>
                                         </p:tgtEl>
@@ -15034,26 +15404,26 @@
                     </p:cTn>
                   </p:par>
                   <p:par>
-                    <p:cTn id="128" fill="hold">
+                    <p:cTn id="144" fill="hold">
                       <p:stCondLst>
                         <p:cond delay="indefinite"/>
                       </p:stCondLst>
                       <p:childTnLst>
                         <p:par>
-                          <p:cTn id="129" fill="hold">
+                          <p:cTn id="145" fill="hold">
                             <p:stCondLst>
                               <p:cond delay="0"/>
                             </p:stCondLst>
                             <p:childTnLst>
                               <p:par>
-                                <p:cTn id="130" presetID="1" presetClass="exit" presetSubtype="0" fill="hold" nodeType="clickEffect">
+                                <p:cTn id="146" presetID="1" presetClass="exit" presetSubtype="0" fill="hold" nodeType="clickEffect">
                                   <p:stCondLst>
                                     <p:cond delay="500"/>
                                   </p:stCondLst>
                                   <p:childTnLst>
                                     <p:set>
                                       <p:cBhvr>
-                                        <p:cTn id="131" dur="1" fill="hold">
+                                        <p:cTn id="147" dur="1" fill="hold">
                                           <p:stCondLst>
                                             <p:cond delay="0"/>
                                           </p:stCondLst>
@@ -15079,26 +15449,26 @@
                     </p:cTn>
                   </p:par>
                   <p:par>
-                    <p:cTn id="132" fill="hold">
+                    <p:cTn id="148" fill="hold">
                       <p:stCondLst>
                         <p:cond delay="indefinite"/>
                       </p:stCondLst>
                       <p:childTnLst>
                         <p:par>
-                          <p:cTn id="133" fill="hold">
+                          <p:cTn id="149" fill="hold">
                             <p:stCondLst>
                               <p:cond delay="0"/>
                             </p:stCondLst>
                             <p:childTnLst>
                               <p:par>
-                                <p:cTn id="134" presetID="2" presetClass="entr" presetSubtype="4" fill="hold" grpId="0" nodeType="clickEffect">
+                                <p:cTn id="150" presetID="2" presetClass="entr" presetSubtype="4" fill="hold" grpId="0" nodeType="clickEffect">
                                   <p:stCondLst>
                                     <p:cond delay="500"/>
                                   </p:stCondLst>
                                   <p:childTnLst>
                                     <p:set>
                                       <p:cBhvr>
-                                        <p:cTn id="135" dur="1" fill="hold">
+                                        <p:cTn id="151" dur="1" fill="hold">
                                           <p:stCondLst>
                                             <p:cond delay="0"/>
                                           </p:stCondLst>
@@ -15116,7 +15486,7 @@
                                     </p:set>
                                     <p:anim calcmode="lin" valueType="num">
                                       <p:cBhvr additive="base">
-                                        <p:cTn id="136" dur="500" fill="hold"/>
+                                        <p:cTn id="152" dur="500" fill="hold"/>
                                         <p:tgtEl>
                                           <p:spTgt spid="63"/>
                                         </p:tgtEl>
@@ -15139,7 +15509,7 @@
                                     </p:anim>
                                     <p:anim calcmode="lin" valueType="num">
                                       <p:cBhvr additive="base">
-                                        <p:cTn id="137" dur="500" fill="hold"/>
+                                        <p:cTn id="153" dur="500" fill="hold"/>
                                         <p:tgtEl>
                                           <p:spTgt spid="63"/>
                                         </p:tgtEl>
@@ -15170,26 +15540,26 @@
                     </p:cTn>
                   </p:par>
                   <p:par>
-                    <p:cTn id="138" fill="hold">
+                    <p:cTn id="154" fill="hold">
                       <p:stCondLst>
                         <p:cond delay="indefinite"/>
                       </p:stCondLst>
                       <p:childTnLst>
                         <p:par>
-                          <p:cTn id="139" fill="hold">
+                          <p:cTn id="155" fill="hold">
                             <p:stCondLst>
                               <p:cond delay="0"/>
                             </p:stCondLst>
                             <p:childTnLst>
                               <p:par>
-                                <p:cTn id="140" presetID="1" presetClass="entr" presetSubtype="0" fill="hold" nodeType="clickEffect">
+                                <p:cTn id="156" presetID="1" presetClass="entr" presetSubtype="0" fill="hold" nodeType="clickEffect">
                                   <p:stCondLst>
                                     <p:cond delay="500"/>
                                   </p:stCondLst>
                                   <p:childTnLst>
                                     <p:set>
                                       <p:cBhvr>
-                                        <p:cTn id="141" dur="1" fill="hold">
+                                        <p:cTn id="157" dur="1" fill="hold">
                                           <p:stCondLst>
                                             <p:cond delay="0"/>
                                           </p:stCondLst>
@@ -15215,26 +15585,26 @@
                     </p:cTn>
                   </p:par>
                   <p:par>
-                    <p:cTn id="142" fill="hold">
+                    <p:cTn id="158" fill="hold">
                       <p:stCondLst>
                         <p:cond delay="indefinite"/>
                       </p:stCondLst>
                       <p:childTnLst>
                         <p:par>
-                          <p:cTn id="143" fill="hold">
+                          <p:cTn id="159" fill="hold">
                             <p:stCondLst>
                               <p:cond delay="0"/>
                             </p:stCondLst>
                             <p:childTnLst>
                               <p:par>
-                                <p:cTn id="144" presetID="1" presetClass="entr" presetSubtype="0" fill="hold" grpId="0" nodeType="clickEffect">
+                                <p:cTn id="160" presetID="1" presetClass="entr" presetSubtype="0" fill="hold" grpId="0" nodeType="clickEffect">
                                   <p:stCondLst>
                                     <p:cond delay="500"/>
                                   </p:stCondLst>
                                   <p:childTnLst>
                                     <p:set>
                                       <p:cBhvr>
-                                        <p:cTn id="145" dur="1" fill="hold">
+                                        <p:cTn id="161" dur="1" fill="hold">
                                           <p:stCondLst>
                                             <p:cond delay="0"/>
                                           </p:stCondLst>
@@ -15260,26 +15630,26 @@
                     </p:cTn>
                   </p:par>
                   <p:par>
-                    <p:cTn id="146" fill="hold">
+                    <p:cTn id="162" fill="hold">
                       <p:stCondLst>
                         <p:cond delay="indefinite"/>
                       </p:stCondLst>
                       <p:childTnLst>
                         <p:par>
-                          <p:cTn id="147" fill="hold">
+                          <p:cTn id="163" fill="hold">
                             <p:stCondLst>
                               <p:cond delay="0"/>
                             </p:stCondLst>
                             <p:childTnLst>
                               <p:par>
-                                <p:cTn id="148" presetID="2" presetClass="entr" presetSubtype="4" fill="hold" grpId="0" nodeType="clickEffect">
+                                <p:cTn id="164" presetID="2" presetClass="entr" presetSubtype="4" fill="hold" grpId="0" nodeType="clickEffect">
                                   <p:stCondLst>
                                     <p:cond delay="500"/>
                                   </p:stCondLst>
                                   <p:childTnLst>
                                     <p:set>
                                       <p:cBhvr>
-                                        <p:cTn id="149" dur="1" fill="hold">
+                                        <p:cTn id="165" dur="1" fill="hold">
                                           <p:stCondLst>
                                             <p:cond delay="0"/>
                                           </p:stCondLst>
@@ -15297,7 +15667,7 @@
                                     </p:set>
                                     <p:anim calcmode="lin" valueType="num">
                                       <p:cBhvr additive="base">
-                                        <p:cTn id="150" dur="500" fill="hold"/>
+                                        <p:cTn id="166" dur="500" fill="hold"/>
                                         <p:tgtEl>
                                           <p:spTgt spid="1093"/>
                                         </p:tgtEl>
@@ -15320,7 +15690,7 @@
                                     </p:anim>
                                     <p:anim calcmode="lin" valueType="num">
                                       <p:cBhvr additive="base">
-                                        <p:cTn id="151" dur="500" fill="hold"/>
+                                        <p:cTn id="167" dur="500" fill="hold"/>
                                         <p:tgtEl>
                                           <p:spTgt spid="1093"/>
                                         </p:tgtEl>
@@ -15351,26 +15721,26 @@
                     </p:cTn>
                   </p:par>
                   <p:par>
-                    <p:cTn id="152" fill="hold">
+                    <p:cTn id="168" fill="hold">
                       <p:stCondLst>
                         <p:cond delay="indefinite"/>
                       </p:stCondLst>
                       <p:childTnLst>
                         <p:par>
-                          <p:cTn id="153" fill="hold">
+                          <p:cTn id="169" fill="hold">
                             <p:stCondLst>
                               <p:cond delay="0"/>
                             </p:stCondLst>
                             <p:childTnLst>
                               <p:par>
-                                <p:cTn id="154" presetID="6" presetClass="entr" presetSubtype="16" fill="hold" nodeType="clickEffect">
+                                <p:cTn id="170" presetID="6" presetClass="entr" presetSubtype="16" fill="hold" nodeType="clickEffect">
                                   <p:stCondLst>
                                     <p:cond delay="500"/>
                                   </p:stCondLst>
                                   <p:childTnLst>
                                     <p:set>
                                       <p:cBhvr>
-                                        <p:cTn id="155" dur="1" fill="hold">
+                                        <p:cTn id="171" dur="1" fill="hold">
                                           <p:stCondLst>
                                             <p:cond delay="0"/>
                                           </p:stCondLst>
@@ -15388,7 +15758,7 @@
                                     </p:set>
                                     <p:animEffect transition="in" filter="circle(in)">
                                       <p:cBhvr>
-                                        <p:cTn id="156" dur="2000"/>
+                                        <p:cTn id="172" dur="2000"/>
                                         <p:tgtEl>
                                           <p:spTgt spid="1099"/>
                                         </p:tgtEl>
@@ -15404,26 +15774,26 @@
                     </p:cTn>
                   </p:par>
                   <p:par>
-                    <p:cTn id="157" fill="hold">
+                    <p:cTn id="173" fill="hold">
                       <p:stCondLst>
                         <p:cond delay="indefinite"/>
                       </p:stCondLst>
                       <p:childTnLst>
                         <p:par>
-                          <p:cTn id="158" fill="hold">
+                          <p:cTn id="174" fill="hold">
                             <p:stCondLst>
                               <p:cond delay="0"/>
                             </p:stCondLst>
                             <p:childTnLst>
                               <p:par>
-                                <p:cTn id="159" presetID="2" presetClass="entr" presetSubtype="4" fill="hold" grpId="0" nodeType="clickEffect">
+                                <p:cTn id="175" presetID="2" presetClass="entr" presetSubtype="4" fill="hold" grpId="0" nodeType="clickEffect">
                                   <p:stCondLst>
                                     <p:cond delay="500"/>
                                   </p:stCondLst>
                                   <p:childTnLst>
                                     <p:set>
                                       <p:cBhvr>
-                                        <p:cTn id="160" dur="1" fill="hold">
+                                        <p:cTn id="176" dur="1" fill="hold">
                                           <p:stCondLst>
                                             <p:cond delay="0"/>
                                           </p:stCondLst>
@@ -15441,7 +15811,7 @@
                                     </p:set>
                                     <p:anim calcmode="lin" valueType="num">
                                       <p:cBhvr additive="base">
-                                        <p:cTn id="161" dur="500" fill="hold"/>
+                                        <p:cTn id="177" dur="500" fill="hold"/>
                                         <p:tgtEl>
                                           <p:spTgt spid="1097"/>
                                         </p:tgtEl>
@@ -15464,7 +15834,7 @@
                                     </p:anim>
                                     <p:anim calcmode="lin" valueType="num">
                                       <p:cBhvr additive="base">
-                                        <p:cTn id="162" dur="500" fill="hold"/>
+                                        <p:cTn id="178" dur="500" fill="hold"/>
                                         <p:tgtEl>
                                           <p:spTgt spid="1097"/>
                                         </p:tgtEl>
@@ -15495,26 +15865,26 @@
                     </p:cTn>
                   </p:par>
                   <p:par>
-                    <p:cTn id="163" fill="hold">
+                    <p:cTn id="179" fill="hold">
                       <p:stCondLst>
                         <p:cond delay="indefinite"/>
                       </p:stCondLst>
                       <p:childTnLst>
                         <p:par>
-                          <p:cTn id="164" fill="hold">
+                          <p:cTn id="180" fill="hold">
                             <p:stCondLst>
                               <p:cond delay="0"/>
                             </p:stCondLst>
                             <p:childTnLst>
                               <p:par>
-                                <p:cTn id="165" presetID="6" presetClass="entr" presetSubtype="16" fill="hold" grpId="0" nodeType="clickEffect">
+                                <p:cTn id="181" presetID="6" presetClass="entr" presetSubtype="16" fill="hold" grpId="0" nodeType="clickEffect">
                                   <p:stCondLst>
-                                    <p:cond delay="1000"/>
+                                    <p:cond delay="2000"/>
                                   </p:stCondLst>
                                   <p:childTnLst>
                                     <p:set>
                                       <p:cBhvr>
-                                        <p:cTn id="166" dur="1" fill="hold">
+                                        <p:cTn id="182" dur="1" fill="hold">
                                           <p:stCondLst>
                                             <p:cond delay="0"/>
                                           </p:stCondLst>
@@ -15532,12 +15902,103 @@
                                     </p:set>
                                     <p:animEffect transition="in" filter="circle(in)">
                                       <p:cBhvr>
-                                        <p:cTn id="167" dur="2000"/>
+                                        <p:cTn id="183" dur="2000"/>
                                         <p:tgtEl>
                                           <p:spTgt spid="2"/>
                                         </p:tgtEl>
                                       </p:cBhvr>
                                     </p:animEffect>
+                                  </p:childTnLst>
+                                </p:cTn>
+                              </p:par>
+                            </p:childTnLst>
+                          </p:cTn>
+                        </p:par>
+                      </p:childTnLst>
+                    </p:cTn>
+                  </p:par>
+                  <p:par>
+                    <p:cTn id="184" fill="hold">
+                      <p:stCondLst>
+                        <p:cond delay="indefinite"/>
+                      </p:stCondLst>
+                      <p:childTnLst>
+                        <p:par>
+                          <p:cTn id="185" fill="hold">
+                            <p:stCondLst>
+                              <p:cond delay="0"/>
+                            </p:stCondLst>
+                            <p:childTnLst>
+                              <p:par>
+                                <p:cTn id="186" presetID="2" presetClass="entr" presetSubtype="2" fill="hold" grpId="0" nodeType="clickEffect">
+                                  <p:stCondLst>
+                                    <p:cond delay="500"/>
+                                  </p:stCondLst>
+                                  <p:childTnLst>
+                                    <p:set>
+                                      <p:cBhvr>
+                                        <p:cTn id="187" dur="1" fill="hold">
+                                          <p:stCondLst>
+                                            <p:cond delay="0"/>
+                                          </p:stCondLst>
+                                        </p:cTn>
+                                        <p:tgtEl>
+                                          <p:spTgt spid="5"/>
+                                        </p:tgtEl>
+                                        <p:attrNameLst>
+                                          <p:attrName>style.visibility</p:attrName>
+                                        </p:attrNameLst>
+                                      </p:cBhvr>
+                                      <p:to>
+                                        <p:strVal val="visible"/>
+                                      </p:to>
+                                    </p:set>
+                                    <p:anim calcmode="lin" valueType="num">
+                                      <p:cBhvr additive="base">
+                                        <p:cTn id="188" dur="500" fill="hold"/>
+                                        <p:tgtEl>
+                                          <p:spTgt spid="5"/>
+                                        </p:tgtEl>
+                                        <p:attrNameLst>
+                                          <p:attrName>ppt_x</p:attrName>
+                                        </p:attrNameLst>
+                                      </p:cBhvr>
+                                      <p:tavLst>
+                                        <p:tav tm="0">
+                                          <p:val>
+                                            <p:strVal val="1+#ppt_w/2"/>
+                                          </p:val>
+                                        </p:tav>
+                                        <p:tav tm="100000">
+                                          <p:val>
+                                            <p:strVal val="#ppt_x"/>
+                                          </p:val>
+                                        </p:tav>
+                                      </p:tavLst>
+                                    </p:anim>
+                                    <p:anim calcmode="lin" valueType="num">
+                                      <p:cBhvr additive="base">
+                                        <p:cTn id="189" dur="500" fill="hold"/>
+                                        <p:tgtEl>
+                                          <p:spTgt spid="5"/>
+                                        </p:tgtEl>
+                                        <p:attrNameLst>
+                                          <p:attrName>ppt_y</p:attrName>
+                                        </p:attrNameLst>
+                                      </p:cBhvr>
+                                      <p:tavLst>
+                                        <p:tav tm="0">
+                                          <p:val>
+                                            <p:strVal val="#ppt_y"/>
+                                          </p:val>
+                                        </p:tav>
+                                        <p:tav tm="100000">
+                                          <p:val>
+                                            <p:strVal val="#ppt_y"/>
+                                          </p:val>
+                                        </p:tav>
+                                      </p:tavLst>
+                                    </p:anim>
                                   </p:childTnLst>
                                 </p:cTn>
                               </p:par>
@@ -15587,6 +16048,9 @@
       <p:bldP spid="46" grpId="0" animBg="1"/>
       <p:bldP spid="1097" grpId="0"/>
       <p:bldP spid="2" grpId="0"/>
+      <p:bldP spid="3" grpId="0"/>
+      <p:bldP spid="4" grpId="0"/>
+      <p:bldP spid="5" grpId="0"/>
     </p:bldLst>
   </p:timing>
 </p:sld>
